--- a/Presentations/MA_Final_Presentation.pptx
+++ b/Presentations/MA_Final_Presentation.pptx
@@ -4041,7 +4041,7 @@
           <a:p>
             <a:fld id="{2B685DCD-866D-47AE-A236-118539F53379}" type="slidenum">
               <a:rPr lang="de-CH" smtClean="0"/>
-              <a:t>‹#›</a:t>
+              <a:t>‹Nr.›</a:t>
             </a:fld>
             <a:endParaRPr lang="de-CH"/>
           </a:p>
@@ -4299,7 +4299,7 @@
           <a:p>
             <a:fld id="{F615DDFD-030C-4D5A-B33E-3A7E7538D2BE}" type="slidenum">
               <a:rPr lang="de-CH" smtClean="0"/>
-              <a:t>‹#›</a:t>
+              <a:t>‹Nr.›</a:t>
             </a:fld>
             <a:endParaRPr lang="de-CH"/>
           </a:p>
@@ -4832,27 +4832,13 @@
           <a:p>
             <a:r>
               <a:rPr lang="en-US" dirty="0"/>
-              <a:t>I want to flag something that connects directly back to Constantin's segmentation work. When Sequential Forward Selection chose which features to keep, it didn't retain all eight cluster affinities — it kept exactly four. And those four are Bags, Tops, Dresses, and Jackets — the precise clusters that the business profiling identified as the economic anchors of the platform.</a:t>
-            </a:r>
-          </a:p>
-          <a:p>
+              <a:t>I want to flag something that connects directly back to Constantin's segmentation work. When Sequential Forward Selection chose which features to keep, it didn't retain all eight cluster affinities — it kept exactly four. And those four are Bags, Tops, Dresses, and Jackets — the precise clusters that the business profiling identified as the economic anchors of </a:t>
+            </a:r>
+            <a:r>
+              <a:rPr lang="en-US"/>
+              <a:t>the platform</a:t>
+            </a:r>
             <a:endParaRPr lang="en-US" dirty="0"/>
-          </a:p>
-          <a:p>
-            <a:r>
-              <a:rPr lang="en-US" dirty="0"/>
-              <a:t>The algorithm arrived at the same conclusion through a completely independent route. That's not a coincidence — it's validation. Product-level intelligence isn't just interpretable, it's genuinely predictive.</a:t>
-            </a:r>
-          </a:p>
-          <a:p>
-            <a:endParaRPr lang="en-US" dirty="0"/>
-          </a:p>
-          <a:p>
-            <a:r>
-              <a:rPr lang="en-US" dirty="0"/>
-              <a:t>Style entropy — the diversity measure — dropped out once specific cluster affinities were included. Knowing which clusters a customer engages with turns out to be more precise than just knowing how broadly they engage</a:t>
-            </a:r>
-            <a:endParaRPr lang="de-DE" dirty="0"/>
           </a:p>
         </p:txBody>
       </p:sp>
@@ -5099,6 +5085,443 @@
               <a:rPr lang="de-DE" dirty="0" err="1"/>
               <a:t>information</a:t>
             </a:r>
+            <a:endParaRPr lang="de-DE" dirty="0"/>
+          </a:p>
+          <a:p>
+            <a:endParaRPr lang="de-DE" dirty="0"/>
+          </a:p>
+          <a:p>
+            <a:r>
+              <a:rPr lang="de-DE" dirty="0"/>
+              <a:t>Bags: high </a:t>
+            </a:r>
+            <a:r>
+              <a:rPr lang="de-DE" dirty="0" err="1"/>
+              <a:t>utilization</a:t>
+            </a:r>
+            <a:r>
+              <a:rPr lang="de-DE" dirty="0"/>
+              <a:t> – </a:t>
+            </a:r>
+            <a:r>
+              <a:rPr lang="de-DE" dirty="0" err="1"/>
+              <a:t>maybe</a:t>
+            </a:r>
+            <a:r>
+              <a:rPr lang="de-DE" dirty="0"/>
+              <a:t> </a:t>
+            </a:r>
+            <a:r>
+              <a:rPr lang="de-DE" dirty="0" err="1"/>
+              <a:t>increase</a:t>
+            </a:r>
+            <a:r>
+              <a:rPr lang="de-DE" dirty="0"/>
+              <a:t> </a:t>
+            </a:r>
+            <a:r>
+              <a:rPr lang="de-DE" dirty="0" err="1"/>
+              <a:t>price</a:t>
+            </a:r>
+            <a:r>
+              <a:rPr lang="de-DE" dirty="0"/>
+              <a:t> </a:t>
+            </a:r>
+            <a:r>
+              <a:rPr lang="de-DE" dirty="0" err="1"/>
+              <a:t>sligthly</a:t>
+            </a:r>
+            <a:r>
+              <a:rPr lang="de-DE" dirty="0"/>
+              <a:t>, </a:t>
+            </a:r>
+            <a:r>
+              <a:rPr lang="de-DE" dirty="0" err="1"/>
+              <a:t>buy</a:t>
+            </a:r>
+            <a:r>
+              <a:rPr lang="de-DE" dirty="0"/>
+              <a:t> </a:t>
+            </a:r>
+            <a:r>
+              <a:rPr lang="de-DE" dirty="0" err="1"/>
+              <a:t>similar</a:t>
+            </a:r>
+            <a:r>
+              <a:rPr lang="de-DE" dirty="0"/>
+              <a:t> </a:t>
+            </a:r>
+            <a:r>
+              <a:rPr lang="de-DE" dirty="0" err="1"/>
+              <a:t>bags</a:t>
+            </a:r>
+            <a:r>
+              <a:rPr lang="de-DE" dirty="0"/>
+              <a:t> to </a:t>
+            </a:r>
+            <a:r>
+              <a:rPr lang="de-DE" dirty="0" err="1"/>
+              <a:t>does</a:t>
+            </a:r>
+            <a:r>
+              <a:rPr lang="de-DE" dirty="0"/>
+              <a:t> </a:t>
+            </a:r>
+            <a:r>
+              <a:rPr lang="de-DE" dirty="0" err="1"/>
+              <a:t>rented</a:t>
+            </a:r>
+            <a:r>
+              <a:rPr lang="de-DE" dirty="0"/>
+              <a:t> </a:t>
+            </a:r>
+            <a:r>
+              <a:rPr lang="de-DE" dirty="0" err="1"/>
+              <a:t>often</a:t>
+            </a:r>
+            <a:r>
+              <a:rPr lang="de-DE" dirty="0"/>
+              <a:t> – they have </a:t>
+            </a:r>
+            <a:r>
+              <a:rPr lang="de-DE" dirty="0" err="1"/>
+              <a:t>higher</a:t>
+            </a:r>
+            <a:r>
+              <a:rPr lang="de-DE" dirty="0"/>
+              <a:t> </a:t>
+            </a:r>
+            <a:r>
+              <a:rPr lang="de-DE" dirty="0" err="1"/>
+              <a:t>utiliasation</a:t>
+            </a:r>
+            <a:r>
+              <a:rPr lang="de-DE" dirty="0"/>
+              <a:t> and </a:t>
+            </a:r>
+            <a:r>
+              <a:rPr lang="de-DE" dirty="0" err="1"/>
+              <a:t>better</a:t>
+            </a:r>
+            <a:r>
+              <a:rPr lang="de-DE" dirty="0"/>
+              <a:t> ROI</a:t>
+            </a:r>
+          </a:p>
+          <a:p>
+            <a:endParaRPr lang="de-DE" dirty="0"/>
+          </a:p>
+          <a:p>
+            <a:r>
+              <a:rPr lang="de-DE" dirty="0"/>
+              <a:t>Shift </a:t>
+            </a:r>
+            <a:r>
+              <a:rPr lang="de-DE" dirty="0" err="1"/>
+              <a:t>away</a:t>
+            </a:r>
+            <a:r>
+              <a:rPr lang="de-DE" dirty="0"/>
+              <a:t> </a:t>
+            </a:r>
+            <a:r>
+              <a:rPr lang="de-DE" dirty="0" err="1"/>
+              <a:t>from</a:t>
+            </a:r>
+            <a:r>
+              <a:rPr lang="de-DE" dirty="0"/>
+              <a:t> </a:t>
+            </a:r>
+            <a:r>
+              <a:rPr lang="de-DE" dirty="0" err="1"/>
+              <a:t>trousers</a:t>
+            </a:r>
+            <a:r>
+              <a:rPr lang="de-DE" dirty="0"/>
+              <a:t> and </a:t>
+            </a:r>
+            <a:r>
+              <a:rPr lang="de-DE" dirty="0" err="1"/>
+              <a:t>skirts</a:t>
+            </a:r>
+            <a:r>
+              <a:rPr lang="de-DE" dirty="0"/>
+              <a:t> – </a:t>
+            </a:r>
+            <a:r>
+              <a:rPr lang="de-DE" dirty="0" err="1"/>
+              <a:t>since</a:t>
+            </a:r>
+            <a:r>
+              <a:rPr lang="de-DE" dirty="0"/>
+              <a:t> high </a:t>
+            </a:r>
+            <a:r>
+              <a:rPr lang="de-DE" dirty="0" err="1"/>
+              <a:t>share</a:t>
+            </a:r>
+            <a:r>
+              <a:rPr lang="de-DE" dirty="0"/>
+              <a:t> </a:t>
+            </a:r>
+            <a:r>
+              <a:rPr lang="de-DE" dirty="0" err="1"/>
+              <a:t>of</a:t>
+            </a:r>
+            <a:r>
+              <a:rPr lang="de-DE" dirty="0"/>
+              <a:t> </a:t>
+            </a:r>
+            <a:r>
+              <a:rPr lang="de-DE" dirty="0" err="1"/>
+              <a:t>never</a:t>
+            </a:r>
+            <a:r>
+              <a:rPr lang="de-DE" dirty="0"/>
+              <a:t> </a:t>
+            </a:r>
+            <a:r>
+              <a:rPr lang="de-DE" dirty="0" err="1"/>
+              <a:t>rented</a:t>
+            </a:r>
+            <a:r>
+              <a:rPr lang="de-DE" dirty="0"/>
+              <a:t> </a:t>
+            </a:r>
+            <a:r>
+              <a:rPr lang="de-DE" dirty="0" err="1"/>
+              <a:t>items</a:t>
+            </a:r>
+            <a:r>
+              <a:rPr lang="de-DE" dirty="0"/>
+              <a:t> – shift </a:t>
+            </a:r>
+            <a:r>
+              <a:rPr lang="de-DE" dirty="0" err="1"/>
+              <a:t>towards</a:t>
+            </a:r>
+            <a:r>
+              <a:rPr lang="de-DE" dirty="0"/>
+              <a:t> </a:t>
+            </a:r>
+            <a:r>
+              <a:rPr lang="de-DE" dirty="0" err="1"/>
+              <a:t>tops</a:t>
+            </a:r>
+            <a:r>
+              <a:rPr lang="de-DE" dirty="0"/>
+              <a:t> and </a:t>
+            </a:r>
+            <a:r>
+              <a:rPr lang="de-DE" dirty="0" err="1"/>
+              <a:t>sweaters</a:t>
+            </a:r>
+            <a:r>
+              <a:rPr lang="de-DE" dirty="0"/>
+              <a:t> with </a:t>
+            </a:r>
+            <a:r>
+              <a:rPr lang="de-DE" dirty="0" err="1"/>
+              <a:t>higher</a:t>
+            </a:r>
+            <a:r>
+              <a:rPr lang="de-DE" dirty="0"/>
+              <a:t> </a:t>
+            </a:r>
+            <a:r>
+              <a:rPr lang="de-DE" dirty="0" err="1"/>
+              <a:t>roi</a:t>
+            </a:r>
+            <a:endParaRPr lang="de-DE" dirty="0"/>
+          </a:p>
+          <a:p>
+            <a:endParaRPr lang="de-DE" dirty="0"/>
+          </a:p>
+          <a:p>
+            <a:r>
+              <a:rPr lang="de-DE" dirty="0"/>
+              <a:t>Dress </a:t>
+            </a:r>
+            <a:r>
+              <a:rPr lang="de-DE" dirty="0" err="1"/>
+              <a:t>rental</a:t>
+            </a:r>
+            <a:r>
+              <a:rPr lang="de-DE" dirty="0"/>
+              <a:t> </a:t>
+            </a:r>
+            <a:r>
+              <a:rPr lang="de-DE" dirty="0" err="1"/>
+              <a:t>seems</a:t>
+            </a:r>
+            <a:r>
+              <a:rPr lang="de-DE" dirty="0"/>
+              <a:t> to </a:t>
+            </a:r>
+            <a:r>
+              <a:rPr lang="de-DE" dirty="0" err="1"/>
+              <a:t>be</a:t>
+            </a:r>
+            <a:r>
+              <a:rPr lang="de-DE" dirty="0"/>
+              <a:t> a good </a:t>
+            </a:r>
+            <a:r>
+              <a:rPr lang="de-DE" dirty="0" err="1"/>
+              <a:t>churn</a:t>
+            </a:r>
+            <a:r>
+              <a:rPr lang="de-DE" dirty="0"/>
+              <a:t> </a:t>
+            </a:r>
+            <a:r>
+              <a:rPr lang="de-DE" dirty="0" err="1"/>
+              <a:t>predictor</a:t>
+            </a:r>
+            <a:r>
+              <a:rPr lang="de-DE" dirty="0"/>
+              <a:t> – so </a:t>
+            </a:r>
+            <a:r>
+              <a:rPr lang="de-DE" dirty="0" err="1"/>
+              <a:t>goal</a:t>
+            </a:r>
+            <a:r>
+              <a:rPr lang="de-DE" dirty="0"/>
+              <a:t> </a:t>
+            </a:r>
+            <a:r>
+              <a:rPr lang="de-DE" dirty="0" err="1"/>
+              <a:t>should</a:t>
+            </a:r>
+            <a:r>
+              <a:rPr lang="de-DE" dirty="0"/>
+              <a:t> </a:t>
+            </a:r>
+            <a:r>
+              <a:rPr lang="de-DE" dirty="0" err="1"/>
+              <a:t>be</a:t>
+            </a:r>
+            <a:r>
+              <a:rPr lang="de-DE" dirty="0"/>
+              <a:t> to </a:t>
+            </a:r>
+            <a:r>
+              <a:rPr lang="de-DE" dirty="0" err="1"/>
+              <a:t>get</a:t>
+            </a:r>
+            <a:r>
+              <a:rPr lang="de-DE" dirty="0"/>
+              <a:t> </a:t>
+            </a:r>
+            <a:r>
+              <a:rPr lang="de-DE" dirty="0" err="1"/>
+              <a:t>customers</a:t>
+            </a:r>
+            <a:r>
+              <a:rPr lang="de-DE" dirty="0"/>
+              <a:t> to </a:t>
+            </a:r>
+            <a:r>
+              <a:rPr lang="de-DE" dirty="0" err="1"/>
+              <a:t>rent</a:t>
+            </a:r>
+            <a:r>
+              <a:rPr lang="de-DE" dirty="0"/>
+              <a:t> </a:t>
+            </a:r>
+            <a:r>
+              <a:rPr lang="de-DE" dirty="0" err="1"/>
+              <a:t>from</a:t>
+            </a:r>
+            <a:r>
+              <a:rPr lang="de-DE" dirty="0"/>
+              <a:t> </a:t>
+            </a:r>
+            <a:r>
+              <a:rPr lang="de-DE" dirty="0" err="1"/>
+              <a:t>everyday</a:t>
+            </a:r>
+            <a:r>
+              <a:rPr lang="de-DE" dirty="0"/>
+              <a:t> </a:t>
+            </a:r>
+            <a:r>
+              <a:rPr lang="de-DE" dirty="0" err="1"/>
+              <a:t>clothes</a:t>
+            </a:r>
+            <a:r>
+              <a:rPr lang="de-DE" dirty="0"/>
+              <a:t> </a:t>
+            </a:r>
+            <a:r>
+              <a:rPr lang="de-DE" dirty="0" err="1"/>
+              <a:t>categories</a:t>
+            </a:r>
+            <a:r>
+              <a:rPr lang="de-DE" dirty="0"/>
+              <a:t> to </a:t>
+            </a:r>
+            <a:r>
+              <a:rPr lang="de-DE" dirty="0" err="1"/>
+              <a:t>get</a:t>
+            </a:r>
+            <a:r>
+              <a:rPr lang="de-DE" dirty="0"/>
+              <a:t> </a:t>
+            </a:r>
+            <a:r>
+              <a:rPr lang="de-DE" dirty="0" err="1"/>
+              <a:t>them</a:t>
+            </a:r>
+            <a:r>
+              <a:rPr lang="de-DE" dirty="0"/>
+              <a:t> </a:t>
+            </a:r>
+            <a:r>
+              <a:rPr lang="de-DE" dirty="0" err="1"/>
+              <a:t>away</a:t>
+            </a:r>
+            <a:r>
+              <a:rPr lang="de-DE" dirty="0"/>
+              <a:t> </a:t>
+            </a:r>
+            <a:r>
+              <a:rPr lang="de-DE" dirty="0" err="1"/>
+              <a:t>from</a:t>
+            </a:r>
+            <a:r>
+              <a:rPr lang="de-DE" dirty="0"/>
+              <a:t> </a:t>
+            </a:r>
+            <a:r>
+              <a:rPr lang="de-DE" dirty="0" err="1"/>
+              <a:t>the</a:t>
+            </a:r>
+            <a:r>
+              <a:rPr lang="de-DE" dirty="0"/>
+              <a:t> </a:t>
+            </a:r>
+            <a:r>
+              <a:rPr lang="de-DE" dirty="0" err="1"/>
+              <a:t>special</a:t>
+            </a:r>
+            <a:r>
+              <a:rPr lang="de-DE" dirty="0"/>
+              <a:t> </a:t>
+            </a:r>
+            <a:r>
+              <a:rPr lang="de-DE" dirty="0" err="1"/>
+              <a:t>occasion</a:t>
+            </a:r>
+            <a:r>
+              <a:rPr lang="de-DE" dirty="0"/>
+              <a:t> </a:t>
+            </a:r>
+            <a:r>
+              <a:rPr lang="de-DE" dirty="0" err="1"/>
+              <a:t>rents</a:t>
+            </a:r>
             <a:endParaRPr lang="en-US" dirty="0"/>
           </a:p>
         </p:txBody>
@@ -6468,7 +6891,71 @@
             </a:r>
             <a:r>
               <a:rPr lang="de-DE" dirty="0"/>
-              <a:t> but </a:t>
+              <a:t> a </a:t>
+            </a:r>
+            <a:r>
+              <a:rPr lang="de-DE" dirty="0" err="1"/>
+              <a:t>lot</a:t>
+            </a:r>
+            <a:r>
+              <a:rPr lang="de-DE" dirty="0"/>
+              <a:t> did not </a:t>
+            </a:r>
+            <a:r>
+              <a:rPr lang="de-DE" dirty="0" err="1"/>
+              <a:t>work</a:t>
+            </a:r>
+            <a:r>
+              <a:rPr lang="de-DE" dirty="0"/>
+              <a:t> like log </a:t>
+            </a:r>
+            <a:r>
+              <a:rPr lang="de-DE" dirty="0" err="1"/>
+              <a:t>transformation</a:t>
+            </a:r>
+            <a:r>
+              <a:rPr lang="de-DE" dirty="0"/>
+              <a:t> </a:t>
+            </a:r>
+            <a:r>
+              <a:rPr lang="de-DE" dirty="0" err="1"/>
+              <a:t>or</a:t>
+            </a:r>
+            <a:r>
+              <a:rPr lang="de-DE" dirty="0"/>
+              <a:t> </a:t>
+            </a:r>
+            <a:r>
+              <a:rPr lang="de-DE" dirty="0" err="1"/>
+              <a:t>standardization</a:t>
+            </a:r>
+            <a:r>
+              <a:rPr lang="de-DE" dirty="0"/>
+              <a:t> </a:t>
+            </a:r>
+            <a:r>
+              <a:rPr lang="de-DE" dirty="0" err="1"/>
+              <a:t>of</a:t>
+            </a:r>
+            <a:r>
+              <a:rPr lang="de-DE" dirty="0"/>
+              <a:t> </a:t>
+            </a:r>
+            <a:r>
+              <a:rPr lang="de-DE" dirty="0" err="1"/>
+              <a:t>the</a:t>
+            </a:r>
+            <a:r>
+              <a:rPr lang="de-DE" dirty="0"/>
+              <a:t> </a:t>
+            </a:r>
+            <a:r>
+              <a:rPr lang="de-DE" dirty="0" err="1"/>
+              <a:t>dependent</a:t>
+            </a:r>
+            <a:r>
+              <a:rPr lang="de-DE" dirty="0"/>
+              <a:t> variable but </a:t>
             </a:r>
             <a:r>
               <a:rPr lang="de-DE" dirty="0" err="1"/>
@@ -6520,12 +7007,223 @@
             <a:endParaRPr lang="de-DE" dirty="0"/>
           </a:p>
           <a:p>
+            <a:r>
+              <a:rPr lang="de-DE" dirty="0"/>
+              <a:t>First </a:t>
+            </a:r>
+            <a:r>
+              <a:rPr lang="de-DE" dirty="0" err="1"/>
+              <a:t>thing</a:t>
+            </a:r>
+            <a:r>
+              <a:rPr lang="de-DE" dirty="0"/>
+              <a:t> </a:t>
+            </a:r>
+            <a:r>
+              <a:rPr lang="de-DE" dirty="0" err="1"/>
+              <a:t>we</a:t>
+            </a:r>
+            <a:r>
+              <a:rPr lang="de-DE" dirty="0"/>
+              <a:t> did </a:t>
+            </a:r>
+            <a:r>
+              <a:rPr lang="de-DE" dirty="0" err="1"/>
+              <a:t>where</a:t>
+            </a:r>
+            <a:r>
+              <a:rPr lang="de-DE" dirty="0"/>
+              <a:t> </a:t>
+            </a:r>
+            <a:r>
+              <a:rPr lang="de-DE" dirty="0" err="1"/>
+              <a:t>we</a:t>
+            </a:r>
+            <a:r>
+              <a:rPr lang="de-DE" dirty="0"/>
+              <a:t> </a:t>
+            </a:r>
+            <a:r>
+              <a:rPr lang="de-DE" dirty="0" err="1"/>
+              <a:t>thought</a:t>
+            </a:r>
+            <a:r>
+              <a:rPr lang="de-DE" dirty="0"/>
+              <a:t> </a:t>
+            </a:r>
+            <a:r>
+              <a:rPr lang="de-DE" dirty="0" err="1"/>
+              <a:t>it</a:t>
+            </a:r>
+            <a:r>
+              <a:rPr lang="de-DE" dirty="0"/>
+              <a:t> </a:t>
+            </a:r>
+            <a:r>
+              <a:rPr lang="de-DE" dirty="0" err="1"/>
+              <a:t>could</a:t>
+            </a:r>
+            <a:r>
+              <a:rPr lang="de-DE" dirty="0"/>
+              <a:t> </a:t>
+            </a:r>
+            <a:r>
+              <a:rPr lang="de-DE" dirty="0" err="1"/>
+              <a:t>increase</a:t>
+            </a:r>
+            <a:r>
+              <a:rPr lang="de-DE" dirty="0"/>
+              <a:t> </a:t>
+            </a:r>
+            <a:r>
+              <a:rPr lang="de-DE" dirty="0" err="1"/>
+              <a:t>performance</a:t>
+            </a:r>
+            <a:r>
+              <a:rPr lang="de-DE" dirty="0"/>
+              <a:t> </a:t>
+            </a:r>
+            <a:r>
+              <a:rPr lang="de-DE" dirty="0" err="1"/>
+              <a:t>is</a:t>
+            </a:r>
+            <a:r>
+              <a:rPr lang="de-DE" dirty="0"/>
+              <a:t> </a:t>
+            </a:r>
+            <a:r>
+              <a:rPr lang="de-DE" dirty="0" err="1"/>
+              <a:t>adding</a:t>
+            </a:r>
+            <a:r>
+              <a:rPr lang="de-DE" dirty="0"/>
+              <a:t> </a:t>
+            </a:r>
+            <a:r>
+              <a:rPr lang="de-DE" dirty="0" err="1"/>
+              <a:t>features</a:t>
+            </a:r>
+            <a:r>
+              <a:rPr lang="de-DE" dirty="0"/>
+              <a:t> so </a:t>
+            </a:r>
+            <a:r>
+              <a:rPr lang="de-DE" dirty="0" err="1"/>
+              <a:t>we</a:t>
+            </a:r>
+            <a:r>
+              <a:rPr lang="de-DE" dirty="0"/>
+              <a:t> </a:t>
+            </a:r>
+            <a:r>
+              <a:rPr lang="de-DE" dirty="0" err="1"/>
+              <a:t>engineered</a:t>
+            </a:r>
+            <a:r>
+              <a:rPr lang="de-DE" dirty="0"/>
+              <a:t> 36 </a:t>
+            </a:r>
+            <a:r>
+              <a:rPr lang="de-DE" dirty="0" err="1"/>
+              <a:t>features</a:t>
+            </a:r>
+            <a:r>
+              <a:rPr lang="de-DE" dirty="0"/>
+              <a:t> in total but </a:t>
+            </a:r>
+            <a:r>
+              <a:rPr lang="de-DE" dirty="0" err="1"/>
+              <a:t>it</a:t>
+            </a:r>
+            <a:r>
+              <a:rPr lang="de-DE" dirty="0"/>
+              <a:t> </a:t>
+            </a:r>
+            <a:r>
+              <a:rPr lang="de-DE" dirty="0" err="1"/>
+              <a:t>actually</a:t>
+            </a:r>
+            <a:r>
+              <a:rPr lang="de-DE" dirty="0"/>
+              <a:t> hurt </a:t>
+            </a:r>
+            <a:r>
+              <a:rPr lang="de-DE" dirty="0" err="1"/>
+              <a:t>the</a:t>
+            </a:r>
+            <a:r>
+              <a:rPr lang="de-DE" dirty="0"/>
+              <a:t> </a:t>
+            </a:r>
+            <a:r>
+              <a:rPr lang="de-DE" dirty="0" err="1"/>
+              <a:t>model</a:t>
+            </a:r>
+            <a:r>
+              <a:rPr lang="de-DE" dirty="0"/>
+              <a:t> and </a:t>
+            </a:r>
+            <a:r>
+              <a:rPr lang="de-DE" dirty="0" err="1"/>
+              <a:t>the</a:t>
+            </a:r>
+            <a:r>
+              <a:rPr lang="de-DE" dirty="0"/>
+              <a:t> MAE </a:t>
+            </a:r>
+            <a:r>
+              <a:rPr lang="de-DE" dirty="0" err="1"/>
+              <a:t>increased</a:t>
+            </a:r>
+            <a:r>
+              <a:rPr lang="de-DE" dirty="0"/>
+              <a:t>…but </a:t>
+            </a:r>
+            <a:r>
+              <a:rPr lang="de-DE" dirty="0" err="1"/>
+              <a:t>we</a:t>
+            </a:r>
+            <a:r>
+              <a:rPr lang="de-DE" dirty="0"/>
+              <a:t> </a:t>
+            </a:r>
+            <a:r>
+              <a:rPr lang="de-DE" dirty="0" err="1"/>
+              <a:t>are</a:t>
+            </a:r>
+            <a:r>
+              <a:rPr lang="de-DE" dirty="0"/>
+              <a:t> still </a:t>
+            </a:r>
+            <a:r>
+              <a:rPr lang="de-DE" dirty="0" err="1"/>
+              <a:t>better</a:t>
+            </a:r>
+            <a:r>
+              <a:rPr lang="de-DE" dirty="0"/>
+              <a:t> than </a:t>
+            </a:r>
+            <a:r>
+              <a:rPr lang="de-DE" dirty="0" err="1"/>
+              <a:t>the</a:t>
+            </a:r>
+            <a:r>
+              <a:rPr lang="de-DE" dirty="0"/>
+              <a:t> </a:t>
+            </a:r>
+            <a:r>
+              <a:rPr lang="de-DE" dirty="0" err="1"/>
+              <a:t>CLVTools</a:t>
+            </a:r>
             <a:endParaRPr lang="de-DE" dirty="0"/>
           </a:p>
           <a:p>
+            <a:endParaRPr lang="de-DE" dirty="0"/>
+          </a:p>
+          <a:p>
             <a:r>
               <a:rPr lang="en-US" dirty="0"/>
-              <a:t>First problem: 93% of customers generate exactly zero revenue in the prediction window. Standard regression wasn't built for that — it assumes a roughly normal error distribution. The Tweedie objective was designed precisely for zero-inflated, right-skewed data like this.</a:t>
+              <a:t>Secondly I guess everyone of us realized the same problem when testing around 90% of customers generate exactly zero revenue in the prediction window. Standard regression objectives weren’t built for that — most assume a roughly normal error distribution.  By accident I came across the Tweedie objective was designed precisely for zero-inflated, right-skewed data like this.</a:t>
             </a:r>
           </a:p>
           <a:p>
@@ -6543,8 +7241,13 @@
           <a:p>
             <a:r>
               <a:rPr lang="en-US" dirty="0"/>
-              <a:t>Third problem: even a well-calibrated model still over-predicts for customers who have quietly stopped renting. That's the latent attrition problem Constantin introduced earlier. The hybrid architecture is our answer to that.</a:t>
-            </a:r>
+              <a:t>Third problem: even a well-calibrated model still over-predicts for customers who have quietly stopped renting. That's the latent attrition problem Constantin introduced earlier. </a:t>
+            </a:r>
+            <a:r>
+              <a:rPr lang="en-US"/>
+              <a:t>The hybrid architecture is our answer to that.</a:t>
+            </a:r>
+            <a:endParaRPr lang="en-US" dirty="0"/>
           </a:p>
         </p:txBody>
       </p:sp>
@@ -7102,7 +7805,7 @@
           <a:p>
             <a:fld id="{5ACA52AF-F19D-405C-AD5F-7D94B96A5CC3}" type="slidenum">
               <a:rPr lang="de-CH" noProof="0" smtClean="0"/>
-              <a:t>‹#›</a:t>
+              <a:t>‹Nr.›</a:t>
             </a:fld>
             <a:endParaRPr lang="de-CH" noProof="0"/>
           </a:p>
@@ -7297,7 +8000,7 @@
           <a:p>
             <a:fld id="{5ACA52AF-F19D-405C-AD5F-7D94B96A5CC3}" type="slidenum">
               <a:rPr lang="de-CH" noProof="0" smtClean="0"/>
-              <a:t>‹#›</a:t>
+              <a:t>‹Nr.›</a:t>
             </a:fld>
             <a:endParaRPr lang="de-CH" noProof="0"/>
           </a:p>
@@ -7584,7 +8287,7 @@
           <a:p>
             <a:fld id="{5ACA52AF-F19D-405C-AD5F-7D94B96A5CC3}" type="slidenum">
               <a:rPr lang="de-CH" noProof="0" smtClean="0"/>
-              <a:t>‹#›</a:t>
+              <a:t>‹Nr.›</a:t>
             </a:fld>
             <a:endParaRPr lang="de-CH" noProof="0"/>
           </a:p>
@@ -7882,7 +8585,7 @@
           <a:p>
             <a:fld id="{5ACA52AF-F19D-405C-AD5F-7D94B96A5CC3}" type="slidenum">
               <a:rPr lang="de-CH" noProof="0" smtClean="0"/>
-              <a:t>‹#›</a:t>
+              <a:t>‹Nr.›</a:t>
             </a:fld>
             <a:endParaRPr lang="de-CH" noProof="0"/>
           </a:p>
@@ -8282,7 +8985,7 @@
           <a:p>
             <a:fld id="{5ACA52AF-F19D-405C-AD5F-7D94B96A5CC3}" type="slidenum">
               <a:rPr lang="de-CH" noProof="0" smtClean="0"/>
-              <a:t>‹#›</a:t>
+              <a:t>‹Nr.›</a:t>
             </a:fld>
             <a:endParaRPr lang="de-CH" noProof="0"/>
           </a:p>
@@ -8650,7 +9353,7 @@
           <a:p>
             <a:fld id="{5ACA52AF-F19D-405C-AD5F-7D94B96A5CC3}" type="slidenum">
               <a:rPr lang="de-CH" noProof="0" smtClean="0"/>
-              <a:t>‹#›</a:t>
+              <a:t>‹Nr.›</a:t>
             </a:fld>
             <a:endParaRPr lang="de-CH" noProof="0"/>
           </a:p>
@@ -10679,7 +11382,7 @@
           <a:p>
             <a:fld id="{5ACA52AF-F19D-405C-AD5F-7D94B96A5CC3}" type="slidenum">
               <a:rPr lang="de-CH" noProof="0" smtClean="0"/>
-              <a:t>‹#›</a:t>
+              <a:t>‹Nr.›</a:t>
             </a:fld>
             <a:endParaRPr lang="de-CH" noProof="0"/>
           </a:p>
@@ -10922,7 +11625,7 @@
           <a:p>
             <a:fld id="{5ACA52AF-F19D-405C-AD5F-7D94B96A5CC3}" type="slidenum">
               <a:rPr lang="de-CH" noProof="0" smtClean="0"/>
-              <a:t>‹#›</a:t>
+              <a:t>‹Nr.›</a:t>
             </a:fld>
             <a:endParaRPr lang="de-CH" noProof="0"/>
           </a:p>
@@ -11170,7 +11873,7 @@
           <a:p>
             <a:fld id="{5ACA52AF-F19D-405C-AD5F-7D94B96A5CC3}" type="slidenum">
               <a:rPr lang="de-CH" noProof="0" smtClean="0"/>
-              <a:t>‹#›</a:t>
+              <a:t>‹Nr.›</a:t>
             </a:fld>
             <a:endParaRPr lang="de-CH" noProof="0"/>
           </a:p>
@@ -11463,7 +12166,7 @@
             <a:fld id="{5ACA52AF-F19D-405C-AD5F-7D94B96A5CC3}" type="slidenum">
               <a:rPr lang="de-CH" noProof="0" smtClean="0"/>
               <a:pPr/>
-              <a:t>‹#›</a:t>
+              <a:t>‹Nr.›</a:t>
             </a:fld>
             <a:endParaRPr lang="de-CH" noProof="0"/>
           </a:p>
@@ -13406,7 +14109,7 @@
             <a:fld id="{5ACA52AF-F19D-405C-AD5F-7D94B96A5CC3}" type="slidenum">
               <a:rPr lang="de-CH" noProof="0" smtClean="0"/>
               <a:pPr/>
-              <a:t>‹#›</a:t>
+              <a:t>‹Nr.›</a:t>
             </a:fld>
             <a:endParaRPr lang="de-CH" noProof="0"/>
           </a:p>
@@ -30280,18 +30983,18 @@
 </file>
 
 <file path=customXml/item1.xml><?xml version="1.0" encoding="utf-8"?>
-<p:properties xmlns:p="http://schemas.microsoft.com/office/2006/metadata/properties" xmlns:xsi="http://www.w3.org/2001/XMLSchema-instance" xmlns:pc="http://schemas.microsoft.com/office/infopath/2007/PartnerControls">
-  <documentManagement/>
-</p:properties>
-</file>
-
-<file path=customXml/item2.xml><?xml version="1.0" encoding="utf-8"?>
 <?mso-contentType ?>
 <FormTemplates xmlns="http://schemas.microsoft.com/sharepoint/v3/contenttype/forms">
   <Display>DocumentLibraryForm</Display>
   <Edit>DocumentLibraryForm</Edit>
   <New>DocumentLibraryForm</New>
 </FormTemplates>
+</file>
+
+<file path=customXml/item2.xml><?xml version="1.0" encoding="utf-8"?>
+<p:properties xmlns:p="http://schemas.microsoft.com/office/2006/metadata/properties" xmlns:xsi="http://www.w3.org/2001/XMLSchema-instance" xmlns:pc="http://schemas.microsoft.com/office/infopath/2007/PartnerControls">
+  <documentManagement/>
+</p:properties>
 </file>
 
 <file path=customXml/item3.xml><?xml version="1.0" encoding="utf-8"?>
@@ -30457,6 +31160,14 @@
 </file>
 
 <file path=customXml/itemProps1.xml><?xml version="1.0" encoding="utf-8"?>
+<ds:datastoreItem xmlns:ds="http://schemas.openxmlformats.org/officeDocument/2006/customXml" ds:itemID="{E0CFCB78-2973-46E2-963D-C72C98C43B41}">
+  <ds:schemaRefs>
+    <ds:schemaRef ds:uri="http://schemas.microsoft.com/sharepoint/v3/contenttype/forms"/>
+  </ds:schemaRefs>
+</ds:datastoreItem>
+</file>
+
+<file path=customXml/itemProps2.xml><?xml version="1.0" encoding="utf-8"?>
 <ds:datastoreItem xmlns:ds="http://schemas.openxmlformats.org/officeDocument/2006/customXml" ds:itemID="{2C3B1C8D-BA84-44B8-B31F-BF26E7BAC85C}">
   <ds:schemaRefs>
     <ds:schemaRef ds:uri="7fd05bba-d45d-467f-a5a8-3f2970e80e4a"/>
@@ -30468,14 +31179,6 @@
     <ds:schemaRef ds:uri="http://www.w3.org/XML/1998/namespace"/>
     <ds:schemaRef ds:uri="http://purl.org/dc/elements/1.1/"/>
     <ds:schemaRef ds:uri="http://schemas.microsoft.com/office/infopath/2007/PartnerControls"/>
-  </ds:schemaRefs>
-</ds:datastoreItem>
-</file>
-
-<file path=customXml/itemProps2.xml><?xml version="1.0" encoding="utf-8"?>
-<ds:datastoreItem xmlns:ds="http://schemas.openxmlformats.org/officeDocument/2006/customXml" ds:itemID="{E0CFCB78-2973-46E2-963D-C72C98C43B41}">
-  <ds:schemaRefs>
-    <ds:schemaRef ds:uri="http://schemas.microsoft.com/sharepoint/v3/contenttype/forms"/>
   </ds:schemaRefs>
 </ds:datastoreItem>
 </file>

--- a/Presentations/MA_Final_Presentation.pptx
+++ b/Presentations/MA_Final_Presentation.pptx
@@ -22750,14 +22750,13 @@
               </a:ext>
             </a:extLst>
           </a:blip>
-          <a:stretch>
-            <a:fillRect/>
-          </a:stretch>
+          <a:srcRect/>
+          <a:stretch/>
         </p:blipFill>
         <p:spPr>
           <a:xfrm>
-            <a:off x="8037554" y="3312970"/>
-            <a:ext cx="3798684" cy="3140246"/>
+            <a:off x="8037554" y="3313420"/>
+            <a:ext cx="3798684" cy="3139346"/>
           </a:xfrm>
           <a:prstGeom prst="rect">
             <a:avLst/>
@@ -30983,21 +30982,6 @@
 </file>
 
 <file path=customXml/item1.xml><?xml version="1.0" encoding="utf-8"?>
-<?mso-contentType ?>
-<FormTemplates xmlns="http://schemas.microsoft.com/sharepoint/v3/contenttype/forms">
-  <Display>DocumentLibraryForm</Display>
-  <Edit>DocumentLibraryForm</Edit>
-  <New>DocumentLibraryForm</New>
-</FormTemplates>
-</file>
-
-<file path=customXml/item2.xml><?xml version="1.0" encoding="utf-8"?>
-<p:properties xmlns:p="http://schemas.microsoft.com/office/2006/metadata/properties" xmlns:xsi="http://www.w3.org/2001/XMLSchema-instance" xmlns:pc="http://schemas.microsoft.com/office/infopath/2007/PartnerControls">
-  <documentManagement/>
-</p:properties>
-</file>
-
-<file path=customXml/item3.xml><?xml version="1.0" encoding="utf-8"?>
 <ct:contentTypeSchema xmlns:ct="http://schemas.microsoft.com/office/2006/metadata/contentType" xmlns:ma="http://schemas.microsoft.com/office/2006/metadata/properties/metaAttributes" ct:_="" ma:_="" ma:contentTypeName="Dokument" ma:contentTypeID="0x010100D0F59E03F3A02E49BD70E31348545014" ma:contentTypeVersion="7" ma:contentTypeDescription="Ein neues Dokument erstellen." ma:contentTypeScope="" ma:versionID="907cdc0f808be0b4bc1373a5a8f6a492">
   <xsd:schema xmlns:xsd="http://www.w3.org/2001/XMLSchema" xmlns:xs="http://www.w3.org/2001/XMLSchema" xmlns:p="http://schemas.microsoft.com/office/2006/metadata/properties" xmlns:ns2="7fd05bba-d45d-467f-a5a8-3f2970e80e4a" targetNamespace="http://schemas.microsoft.com/office/2006/metadata/properties" ma:root="true" ma:fieldsID="6eaf8534fcc486a778b01aa1a7a62fa4" ns2:_="">
     <xsd:import namespace="7fd05bba-d45d-467f-a5a8-3f2970e80e4a"/>
@@ -31159,10 +31143,35 @@
 </ct:contentTypeSchema>
 </file>
 
+<file path=customXml/item2.xml><?xml version="1.0" encoding="utf-8"?>
+<p:properties xmlns:p="http://schemas.microsoft.com/office/2006/metadata/properties" xmlns:xsi="http://www.w3.org/2001/XMLSchema-instance" xmlns:pc="http://schemas.microsoft.com/office/infopath/2007/PartnerControls">
+  <documentManagement/>
+</p:properties>
+</file>
+
+<file path=customXml/item3.xml><?xml version="1.0" encoding="utf-8"?>
+<?mso-contentType ?>
+<FormTemplates xmlns="http://schemas.microsoft.com/sharepoint/v3/contenttype/forms">
+  <Display>DocumentLibraryForm</Display>
+  <Edit>DocumentLibraryForm</Edit>
+  <New>DocumentLibraryForm</New>
+</FormTemplates>
+</file>
+
 <file path=customXml/itemProps1.xml><?xml version="1.0" encoding="utf-8"?>
-<ds:datastoreItem xmlns:ds="http://schemas.openxmlformats.org/officeDocument/2006/customXml" ds:itemID="{E0CFCB78-2973-46E2-963D-C72C98C43B41}">
+<ds:datastoreItem xmlns:ds="http://schemas.openxmlformats.org/officeDocument/2006/customXml" ds:itemID="{6B7B52BC-33EF-4C54-820C-9984D5F8AFB1}">
   <ds:schemaRefs>
-    <ds:schemaRef ds:uri="http://schemas.microsoft.com/sharepoint/v3/contenttype/forms"/>
+    <ds:schemaRef ds:uri="7fd05bba-d45d-467f-a5a8-3f2970e80e4a"/>
+    <ds:schemaRef ds:uri="http://purl.org/dc/elements/1.1/"/>
+    <ds:schemaRef ds:uri="http://purl.org/dc/terms/"/>
+    <ds:schemaRef ds:uri="http://schemas.microsoft.com/internal/obd"/>
+    <ds:schemaRef ds:uri="http://schemas.microsoft.com/office/2006/documentManagement/types"/>
+    <ds:schemaRef ds:uri="http://schemas.microsoft.com/office/2006/metadata/contentType"/>
+    <ds:schemaRef ds:uri="http://schemas.microsoft.com/office/2006/metadata/properties"/>
+    <ds:schemaRef ds:uri="http://schemas.microsoft.com/office/2006/metadata/properties/metaAttributes"/>
+    <ds:schemaRef ds:uri="http://schemas.microsoft.com/office/infopath/2007/PartnerControls"/>
+    <ds:schemaRef ds:uri="http://schemas.openxmlformats.org/package/2006/metadata/core-properties"/>
+    <ds:schemaRef ds:uri="http://www.w3.org/2001/XMLSchema"/>
   </ds:schemaRefs>
 </ds:datastoreItem>
 </file>
@@ -31184,19 +31193,9 @@
 </file>
 
 <file path=customXml/itemProps3.xml><?xml version="1.0" encoding="utf-8"?>
-<ds:datastoreItem xmlns:ds="http://schemas.openxmlformats.org/officeDocument/2006/customXml" ds:itemID="{6B7B52BC-33EF-4C54-820C-9984D5F8AFB1}">
+<ds:datastoreItem xmlns:ds="http://schemas.openxmlformats.org/officeDocument/2006/customXml" ds:itemID="{E0CFCB78-2973-46E2-963D-C72C98C43B41}">
   <ds:schemaRefs>
-    <ds:schemaRef ds:uri="7fd05bba-d45d-467f-a5a8-3f2970e80e4a"/>
-    <ds:schemaRef ds:uri="http://purl.org/dc/elements/1.1/"/>
-    <ds:schemaRef ds:uri="http://purl.org/dc/terms/"/>
-    <ds:schemaRef ds:uri="http://schemas.microsoft.com/internal/obd"/>
-    <ds:schemaRef ds:uri="http://schemas.microsoft.com/office/2006/documentManagement/types"/>
-    <ds:schemaRef ds:uri="http://schemas.microsoft.com/office/2006/metadata/contentType"/>
-    <ds:schemaRef ds:uri="http://schemas.microsoft.com/office/2006/metadata/properties"/>
-    <ds:schemaRef ds:uri="http://schemas.microsoft.com/office/2006/metadata/properties/metaAttributes"/>
-    <ds:schemaRef ds:uri="http://schemas.microsoft.com/office/infopath/2007/PartnerControls"/>
-    <ds:schemaRef ds:uri="http://schemas.openxmlformats.org/package/2006/metadata/core-properties"/>
-    <ds:schemaRef ds:uri="http://www.w3.org/2001/XMLSchema"/>
+    <ds:schemaRef ds:uri="http://schemas.microsoft.com/sharepoint/v3/contenttype/forms"/>
   </ds:schemaRefs>
 </ds:datastoreItem>
 </file>
--- a/Presentations/MA_Final_Presentation.pptx
+++ b/Presentations/MA_Final_Presentation.pptx
@@ -4041,7 +4041,7 @@
           <a:p>
             <a:fld id="{2B685DCD-866D-47AE-A236-118539F53379}" type="slidenum">
               <a:rPr lang="de-CH" smtClean="0"/>
-              <a:t>‹Nr.›</a:t>
+              <a:t>‹#›</a:t>
             </a:fld>
             <a:endParaRPr lang="de-CH"/>
           </a:p>
@@ -4299,7 +4299,7 @@
           <a:p>
             <a:fld id="{F615DDFD-030C-4D5A-B33E-3A7E7538D2BE}" type="slidenum">
               <a:rPr lang="de-CH" smtClean="0"/>
-              <a:t>‹Nr.›</a:t>
+              <a:t>‹#›</a:t>
             </a:fld>
             <a:endParaRPr lang="de-CH"/>
           </a:p>
@@ -5626,7 +5626,7 @@
           <a:p>
             <a:r>
               <a:rPr lang="en-US" dirty="0"/>
-              <a:t>So, let's start with why we're here.</a:t>
+              <a:t>So, let's start with the company.</a:t>
             </a:r>
           </a:p>
           <a:p>
@@ -5639,7 +5639,7 @@
             </a:r>
             <a:r>
               <a:rPr lang="en-US" dirty="0"/>
-              <a:t> is a Norwegian fashion rental platform with 7,400 customers, almost 16,000 garments. And at first glance it looks like a standard e-commerce business. But it's not. Because in retail, a customer buys something, and you know exactly what that transaction is worth. In rental, there's no guaranteed repeat. A customer might rent once for a wedding and disappear. Or they might rent every month for three years. The same transaction history can mean completely different things depending on the person.</a:t>
+              <a:t> is a Norwegian fashion rental platform with 7,400 customers, almost 16,000 garments. And it’s not a standard e-commerce business. Because in retail, a customer buys something, and you know exactly what that transaction is worth. In rental, there's no guaranteed repeat. A customer might rent once for a wedding and disappear. Or they might rent every month for three years. The same transaction history can mean completely different things depending on the person.</a:t>
             </a:r>
           </a:p>
           <a:p>
@@ -5656,7 +5656,7 @@
             </a:r>
             <a:r>
               <a:rPr lang="en-US" dirty="0"/>
-              <a:t> it's driven by rental frequency, category preference, duration, and all of these things shift over time.</a:t>
+              <a:t> it's driven by rental frequency, category preference and duration, and all of these things shift over time.</a:t>
             </a:r>
           </a:p>
           <a:p>
@@ -5818,7 +5818,7 @@
           <a:p>
             <a:r>
               <a:rPr lang="en-US" dirty="0"/>
-              <a:t>We have data from March 2016 to September 2023. 77,000 rental events, 7,400 customers. But if you plot transaction volume over time, something jumps out immediately, and you can see it right here in the chart. Around April 2020, everything changes. Median rental duration goes from 4 days to 30 days overnight. Monthly transactions go from roughly 100 to over 2,000. </a:t>
+              <a:t>We have data from March 2016 to September 2023. 77,000 rental events, 7,400 customers. But if you plot transaction volume over time, something jumps out immediately, and you can see it right here in the chart. Around April 2020, everything changes. Median rental duration goes from 4 days to 30 days. Monthly transactions go from roughly 100 to over 2,000. </a:t>
             </a:r>
             <a:r>
               <a:rPr lang="en-US" dirty="0" err="1"/>
@@ -5844,7 +5844,7 @@
           <a:p>
             <a:r>
               <a:rPr lang="en-US" dirty="0"/>
-              <a:t>And then for validation, we used an expanding window split. Train on features up to September 2021, predict the following year. Then expand the window to 2022, predict 2023. The window always moves forward. The model never sees the future it's predicting. This is important because random splits would leak future transactions into past predictions</a:t>
+              <a:t>And then for validation, we used an expanding window split. Train on features up to September 2021, predict the following year. Then expand the window to 2022, predict 2023. The model never sees the future it's predicting. This is important because random splits would leak future transactions into past predictions</a:t>
             </a:r>
           </a:p>
         </p:txBody>
@@ -5972,7 +5972,7 @@
             </a:r>
             <a:r>
               <a:rPr lang="en-US" dirty="0"/>
-              <a:t> of dress, the silhouette, the occasion, the color palette. So we used Voyage Multimodal 3.5, which integrates both the product image and the text description into a single vector. One representation per garment, no modality mismatch.</a:t>
+              <a:t> of dress, the silhouette, the occasion, the color palette and so on. So we used Voyage Multimodal 3.5, which integrates both the product image and the text description into a single vector. One representation per garment, no modality mismatch.</a:t>
             </a:r>
           </a:p>
           <a:p>
@@ -5998,7 +5998,7 @@
           <a:p>
             <a:r>
               <a:rPr lang="en-US" dirty="0"/>
-              <a:t>For the algorithm, we compared K-Means, GMM, and HDB-SCAN on the reduced space. K-Means and GMM gave nearly identical assignments, and when we checked the GMM soft probabilities, over 99% of items had more than 99% confidence in a single cluster. So probabilistic modeling added nothing. K-Means is simpler, more stable, fully interpretable, overall an easier choice.</a:t>
+              <a:t>For the algorithm, we compared K-Means, GMM, and HDB-SCAN on the reduced space. K-Means and GMM gave nearly identical assignments, and when we checked the GMM soft probabilities, over 99% of items had more than 99% confidence in a single cluster. So probabilistic modeling added nothing. K-Means is simpler, more stable, fully interpretable, thus, overall an easier choice.</a:t>
             </a:r>
           </a:p>
           <a:p>
@@ -6007,7 +6007,7 @@
           <a:p>
             <a:r>
               <a:rPr lang="en-US" dirty="0"/>
-              <a:t>For k, we ran a grid search across cluster counts and UMAP dimensions. You can see the heatmap here,  k=8 at 20 dimensions hits the global Silhouette peak, and it's stable across 100 random initializations with a mean ARI of 0.85. So that’s what we chose.</a:t>
+              <a:t>To find the best k, we ran a grid search across cluster counts and UMAP dimensions. You can see the heatmap here,  k=8 at 20 dimensions hits the global Silhouette peak, and it's stable across 100 random initializations with a mean ARI of 0.85. So that’s what we chose.</a:t>
             </a:r>
           </a:p>
           <a:p>
@@ -6139,7 +6139,7 @@
           <a:p>
             <a:r>
               <a:rPr lang="en-US" dirty="0"/>
-              <a:t>Up in the top left, you have two clusters sitting at high price points but low volume. Bags &amp; Accessories and Jackets &amp; Coats. These are your premium items. Bags have the highest revenue-per-item in the entire catalog, 10 thousands NOK,  and a utilization rate 71% above average. But only 421 items in stock. The demand is clearly there, supply isn't. And despite all that revenue, ROI is actually the lowest in the catalog at 1.98, because designer bags are expensive to acquire. So this is a growth lever, but a capital-intensive one. Jackets tell a slightly different story, with the highest median rental price at 1 thousand 800 hundred NOK, but 36.7% dead inventory. Procurement hasn't matched demand well there.</a:t>
+              <a:t>Up in the top left, you have two clusters sitting at high price points but low volume. Bags &amp; Accessories and Jackets &amp; Coats. These are your premium items. Bags have the highest revenue-per-item in the entire catalog, 10 thousands NOK,  and a utilization rate 71% above average. But only 421 items in stock. The demand is clearly there, supply isn't. And despite all that revenue, ROI is actually the lowest in the catalog at 1.98, because designer bags are expensive to acquire. So this is a growth lever, but a capital-intensive one.</a:t>
             </a:r>
           </a:p>
           <a:p>
@@ -6148,7 +6148,7 @@
           <a:p>
             <a:r>
               <a:rPr lang="en-US" dirty="0"/>
-              <a:t>Then the bottom-left cluster, that's where you find Tops, Sweaters, Trousers, Skirts and Jewelry. The workhorses and the underperformers live here together. Tops and Sweaters have the best ROI in the catalog, 3.79 and 3.59, low acquisition cost and high turnover, they recover their investment nearly four times over.</a:t>
+              <a:t>Jackets tell a slightly different story, with the highest median rental price at 1 thousand 800 hundred NOK, but 36.7% dead inventory. In this case procurement hasn't matched demand well.</a:t>
             </a:r>
           </a:p>
           <a:p>
@@ -6157,7 +6157,25 @@
           <a:p>
             <a:r>
               <a:rPr lang="en-US" dirty="0"/>
-              <a:t>Trousers and Skirts are the opposite, 16% of inventory, 11% of revenue, never-rented rates up to 35.8%.</a:t>
+              <a:t>Then the bottom-left cluster, that's where you find Tops, Sweaters, Trousers, Skirts and Jewelry. The workhorses and the underperformers live here together.</a:t>
+            </a:r>
+          </a:p>
+          <a:p>
+            <a:endParaRPr lang="en-US" dirty="0"/>
+          </a:p>
+          <a:p>
+            <a:r>
+              <a:rPr lang="en-US" dirty="0"/>
+              <a:t>Tops and Sweaters have the best ROI in the catalog, 3.79 and 3.59. Thanks to low acquisition cost and high turnover, they recover their investment nearly four times over.</a:t>
+            </a:r>
+          </a:p>
+          <a:p>
+            <a:endParaRPr lang="en-US" dirty="0"/>
+          </a:p>
+          <a:p>
+            <a:r>
+              <a:rPr lang="en-US" dirty="0"/>
+              <a:t>Finally, Trousers and Skirts are the opposite, they represent 16% of inventory and 11% of revenue but have a never-rented rate of 35.8%.</a:t>
             </a:r>
           </a:p>
           <a:p>
@@ -6271,7 +6289,7 @@
           <a:p>
             <a:r>
               <a:rPr lang="en-US" dirty="0"/>
-              <a:t>The last thing before Julius takes over is probably the most interesting finding of the whole project,  and it came from asking a simple question: do loyal customers and at-risk customers rent different </a:t>
+              <a:t>We then dove into the customer affinity analysis, and we asked ourselves: “do loyal customers (so customers which last rental was within 180 days) and at-risk customers (customers which last rental was more than 365 days) rent different </a:t>
             </a:r>
             <a:r>
               <a:rPr lang="en-US" i="1" dirty="0"/>
@@ -6279,7 +6297,7 @@
             </a:r>
             <a:r>
               <a:rPr lang="en-US" dirty="0"/>
-              <a:t> of things?</a:t>
+              <a:t> of things?”</a:t>
             </a:r>
           </a:p>
           <a:p>
@@ -6297,7 +6315,13 @@
           <a:p>
             <a:r>
               <a:rPr lang="en-US" dirty="0"/>
-              <a:t>Looking at the chart. Loyal customers and Dormant customers, the green bars, look almost identical. Both spread their spending broadly: about 39% on dresses, 16% jackets, 15% tops, 13% knitwear. Five or more categories.</a:t>
+              <a:t>Looking at the chart. Loyal customers and Dormant customers (customers which last rental was within 181 and 364 days), the green bars, look almost identical. Both spread their spending broadly: about 39% on dresses, 16% jackets, 15% tops, 13% knitwear. </a:t>
+            </a:r>
+          </a:p>
+          <a:p>
+            <a:r>
+              <a:rPr lang="en-US" dirty="0"/>
+              <a:t>Five or more categories.</a:t>
             </a:r>
           </a:p>
           <a:p>
@@ -6323,7 +6347,7 @@
             </a:r>
             <a:r>
               <a:rPr lang="en-US" dirty="0"/>
-              <a:t> for a specific occasion, a wedding, a gala, to they solve that need, and then they're gone. They were never really subscribers. They were one-time event renters.</a:t>
+              <a:t> for a specific occasion, a wedding, a gala, to solve their specific need, and then they're gone. They were never really subscribers. They were one-time event renters.</a:t>
             </a:r>
           </a:p>
           <a:p>
@@ -6367,9 +6391,6 @@
               <a:rPr lang="en-US" dirty="0"/>
               <a:t>We formalized this as Style Entropy, the Shannon entropy across a customer's cluster affinity shares. High entropy means broad engagement, low entropy means occasion-driven risk. And this turned out to be one of the best early-warning signals for churn.</a:t>
             </a:r>
-          </a:p>
-          <a:p>
-            <a:endParaRPr lang="en-US" dirty="0"/>
           </a:p>
         </p:txBody>
       </p:sp>
@@ -7805,7 +7826,7 @@
           <a:p>
             <a:fld id="{5ACA52AF-F19D-405C-AD5F-7D94B96A5CC3}" type="slidenum">
               <a:rPr lang="de-CH" noProof="0" smtClean="0"/>
-              <a:t>‹Nr.›</a:t>
+              <a:t>‹#›</a:t>
             </a:fld>
             <a:endParaRPr lang="de-CH" noProof="0"/>
           </a:p>
@@ -8000,7 +8021,7 @@
           <a:p>
             <a:fld id="{5ACA52AF-F19D-405C-AD5F-7D94B96A5CC3}" type="slidenum">
               <a:rPr lang="de-CH" noProof="0" smtClean="0"/>
-              <a:t>‹Nr.›</a:t>
+              <a:t>‹#›</a:t>
             </a:fld>
             <a:endParaRPr lang="de-CH" noProof="0"/>
           </a:p>
@@ -8287,7 +8308,7 @@
           <a:p>
             <a:fld id="{5ACA52AF-F19D-405C-AD5F-7D94B96A5CC3}" type="slidenum">
               <a:rPr lang="de-CH" noProof="0" smtClean="0"/>
-              <a:t>‹Nr.›</a:t>
+              <a:t>‹#›</a:t>
             </a:fld>
             <a:endParaRPr lang="de-CH" noProof="0"/>
           </a:p>
@@ -8585,7 +8606,7 @@
           <a:p>
             <a:fld id="{5ACA52AF-F19D-405C-AD5F-7D94B96A5CC3}" type="slidenum">
               <a:rPr lang="de-CH" noProof="0" smtClean="0"/>
-              <a:t>‹Nr.›</a:t>
+              <a:t>‹#›</a:t>
             </a:fld>
             <a:endParaRPr lang="de-CH" noProof="0"/>
           </a:p>
@@ -8985,7 +9006,7 @@
           <a:p>
             <a:fld id="{5ACA52AF-F19D-405C-AD5F-7D94B96A5CC3}" type="slidenum">
               <a:rPr lang="de-CH" noProof="0" smtClean="0"/>
-              <a:t>‹Nr.›</a:t>
+              <a:t>‹#›</a:t>
             </a:fld>
             <a:endParaRPr lang="de-CH" noProof="0"/>
           </a:p>
@@ -9353,7 +9374,7 @@
           <a:p>
             <a:fld id="{5ACA52AF-F19D-405C-AD5F-7D94B96A5CC3}" type="slidenum">
               <a:rPr lang="de-CH" noProof="0" smtClean="0"/>
-              <a:t>‹Nr.›</a:t>
+              <a:t>‹#›</a:t>
             </a:fld>
             <a:endParaRPr lang="de-CH" noProof="0"/>
           </a:p>
@@ -11382,7 +11403,7 @@
           <a:p>
             <a:fld id="{5ACA52AF-F19D-405C-AD5F-7D94B96A5CC3}" type="slidenum">
               <a:rPr lang="de-CH" noProof="0" smtClean="0"/>
-              <a:t>‹Nr.›</a:t>
+              <a:t>‹#›</a:t>
             </a:fld>
             <a:endParaRPr lang="de-CH" noProof="0"/>
           </a:p>
@@ -11625,7 +11646,7 @@
           <a:p>
             <a:fld id="{5ACA52AF-F19D-405C-AD5F-7D94B96A5CC3}" type="slidenum">
               <a:rPr lang="de-CH" noProof="0" smtClean="0"/>
-              <a:t>‹Nr.›</a:t>
+              <a:t>‹#›</a:t>
             </a:fld>
             <a:endParaRPr lang="de-CH" noProof="0"/>
           </a:p>
@@ -11873,7 +11894,7 @@
           <a:p>
             <a:fld id="{5ACA52AF-F19D-405C-AD5F-7D94B96A5CC3}" type="slidenum">
               <a:rPr lang="de-CH" noProof="0" smtClean="0"/>
-              <a:t>‹Nr.›</a:t>
+              <a:t>‹#›</a:t>
             </a:fld>
             <a:endParaRPr lang="de-CH" noProof="0"/>
           </a:p>
@@ -12166,7 +12187,7 @@
             <a:fld id="{5ACA52AF-F19D-405C-AD5F-7D94B96A5CC3}" type="slidenum">
               <a:rPr lang="de-CH" noProof="0" smtClean="0"/>
               <a:pPr/>
-              <a:t>‹Nr.›</a:t>
+              <a:t>‹#›</a:t>
             </a:fld>
             <a:endParaRPr lang="de-CH" noProof="0"/>
           </a:p>
@@ -14109,7 +14130,7 @@
             <a:fld id="{5ACA52AF-F19D-405C-AD5F-7D94B96A5CC3}" type="slidenum">
               <a:rPr lang="de-CH" noProof="0" smtClean="0"/>
               <a:pPr/>
-              <a:t>‹Nr.›</a:t>
+              <a:t>‹#›</a:t>
             </a:fld>
             <a:endParaRPr lang="de-CH" noProof="0"/>
           </a:p>
@@ -14480,7 +14501,7 @@
       </p:grpSpPr>
       <p:pic>
         <p:nvPicPr>
-          <p:cNvPr id="19" name="Bildplatzhalter 18" descr="Ein Bild, das Gebäude, Stadt, Schloss, Turm enthält.&#10;&#10;Automatisch generierte Beschreibung">
+          <p:cNvPr id="19" name="Bildplatzhalter 18">
             <a:extLst>
               <a:ext uri="{FF2B5EF4-FFF2-40B4-BE49-F238E27FC236}">
                 <a16:creationId xmlns:a16="http://schemas.microsoft.com/office/drawing/2014/main" id="{882FF669-564A-4497-A386-BA8B28F256B8}"/>
@@ -14502,10 +14523,8 @@
               </a:ext>
             </a:extLst>
           </a:blip>
-          <a:srcRect t="461" b="461"/>
-          <a:stretch>
-            <a:fillRect/>
-          </a:stretch>
+          <a:srcRect t="6452" b="6452"/>
+          <a:stretch/>
         </p:blipFill>
         <p:spPr/>
       </p:pic>
@@ -14525,7 +14544,32 @@
             <p:ph type="ctrTitle"/>
           </p:nvPr>
         </p:nvSpPr>
-        <p:spPr/>
+        <p:spPr>
+          <a:gradFill flip="none" rotWithShape="1">
+            <a:gsLst>
+              <a:gs pos="0">
+                <a:schemeClr val="accent1">
+                  <a:shade val="30000"/>
+                  <a:satMod val="115000"/>
+                </a:schemeClr>
+              </a:gs>
+              <a:gs pos="50000">
+                <a:schemeClr val="accent1">
+                  <a:shade val="67500"/>
+                  <a:satMod val="115000"/>
+                </a:schemeClr>
+              </a:gs>
+              <a:gs pos="100000">
+                <a:schemeClr val="accent1">
+                  <a:shade val="100000"/>
+                  <a:satMod val="115000"/>
+                </a:schemeClr>
+              </a:gs>
+            </a:gsLst>
+            <a:lin ang="8100000" scaled="1"/>
+            <a:tileRect/>
+          </a:gradFill>
+        </p:spPr>
         <p:txBody>
           <a:bodyPr/>
           <a:lstStyle/>
@@ -26513,39 +26557,6 @@
               <a:t>29.04.2026</a:t>
             </a:fld>
             <a:endParaRPr lang="de-CH" noProof="0"/>
-          </a:p>
-        </p:txBody>
-      </p:sp>
-      <p:sp>
-        <p:nvSpPr>
-          <p:cNvPr id="5" name="Fußzeilenplatzhalter 4">
-            <a:extLst>
-              <a:ext uri="{FF2B5EF4-FFF2-40B4-BE49-F238E27FC236}">
-                <a16:creationId xmlns:a16="http://schemas.microsoft.com/office/drawing/2014/main" id="{B0EB1B7D-4C4D-339B-E3C1-135A51F87D88}"/>
-              </a:ext>
-            </a:extLst>
-          </p:cNvPr>
-          <p:cNvSpPr>
-            <a:spLocks noGrp="1"/>
-          </p:cNvSpPr>
-          <p:nvPr>
-            <p:ph type="ftr" sz="quarter" idx="11"/>
-          </p:nvPr>
-        </p:nvSpPr>
-        <p:spPr>
-          <a:xfrm>
-            <a:off x="2106674" y="6522444"/>
-            <a:ext cx="5400000" cy="216000"/>
-          </a:xfrm>
-        </p:spPr>
-        <p:txBody>
-          <a:bodyPr/>
-          <a:lstStyle/>
-          <a:p>
-            <a:r>
-              <a:rPr lang="en-US" dirty="0"/>
-              <a:t>Marketing Analytics</a:t>
-            </a:r>
           </a:p>
         </p:txBody>
       </p:sp>
@@ -30319,6 +30330,39 @@
           </a:prstGeom>
         </p:spPr>
       </p:pic>
+      <p:sp>
+        <p:nvSpPr>
+          <p:cNvPr id="3" name="Fußzeilenplatzhalter 4">
+            <a:extLst>
+              <a:ext uri="{FF2B5EF4-FFF2-40B4-BE49-F238E27FC236}">
+                <a16:creationId xmlns:a16="http://schemas.microsoft.com/office/drawing/2014/main" id="{AE61F77C-A2D2-0537-8D08-92E16D4F36E6}"/>
+              </a:ext>
+            </a:extLst>
+          </p:cNvPr>
+          <p:cNvSpPr>
+            <a:spLocks noGrp="1"/>
+          </p:cNvSpPr>
+          <p:nvPr>
+            <p:ph type="ftr" sz="quarter" idx="11"/>
+          </p:nvPr>
+        </p:nvSpPr>
+        <p:spPr>
+          <a:xfrm>
+            <a:off x="2171700" y="6522444"/>
+            <a:ext cx="5400000" cy="216000"/>
+          </a:xfrm>
+        </p:spPr>
+        <p:txBody>
+          <a:bodyPr/>
+          <a:lstStyle/>
+          <a:p>
+            <a:r>
+              <a:rPr lang="en-US" dirty="0"/>
+              <a:t>Marketing Analytics</a:t>
+            </a:r>
+          </a:p>
+        </p:txBody>
+      </p:sp>
     </p:spTree>
     <p:extLst>
       <p:ext uri="{BB962C8B-B14F-4D97-AF65-F5344CB8AC3E}">
@@ -30982,6 +31026,21 @@
 </file>
 
 <file path=customXml/item1.xml><?xml version="1.0" encoding="utf-8"?>
+<?mso-contentType ?>
+<FormTemplates xmlns="http://schemas.microsoft.com/sharepoint/v3/contenttype/forms">
+  <Display>DocumentLibraryForm</Display>
+  <Edit>DocumentLibraryForm</Edit>
+  <New>DocumentLibraryForm</New>
+</FormTemplates>
+</file>
+
+<file path=customXml/item2.xml><?xml version="1.0" encoding="utf-8"?>
+<p:properties xmlns:p="http://schemas.microsoft.com/office/2006/metadata/properties" xmlns:xsi="http://www.w3.org/2001/XMLSchema-instance" xmlns:pc="http://schemas.microsoft.com/office/infopath/2007/PartnerControls">
+  <documentManagement/>
+</p:properties>
+</file>
+
+<file path=customXml/item3.xml><?xml version="1.0" encoding="utf-8"?>
 <ct:contentTypeSchema xmlns:ct="http://schemas.microsoft.com/office/2006/metadata/contentType" xmlns:ma="http://schemas.microsoft.com/office/2006/metadata/properties/metaAttributes" ct:_="" ma:_="" ma:contentTypeName="Dokument" ma:contentTypeID="0x010100D0F59E03F3A02E49BD70E31348545014" ma:contentTypeVersion="7" ma:contentTypeDescription="Ein neues Dokument erstellen." ma:contentTypeScope="" ma:versionID="907cdc0f808be0b4bc1373a5a8f6a492">
   <xsd:schema xmlns:xsd="http://www.w3.org/2001/XMLSchema" xmlns:xs="http://www.w3.org/2001/XMLSchema" xmlns:p="http://schemas.microsoft.com/office/2006/metadata/properties" xmlns:ns2="7fd05bba-d45d-467f-a5a8-3f2970e80e4a" targetNamespace="http://schemas.microsoft.com/office/2006/metadata/properties" ma:root="true" ma:fieldsID="6eaf8534fcc486a778b01aa1a7a62fa4" ns2:_="">
     <xsd:import namespace="7fd05bba-d45d-467f-a5a8-3f2970e80e4a"/>
@@ -31143,35 +31202,10 @@
 </ct:contentTypeSchema>
 </file>
 
-<file path=customXml/item2.xml><?xml version="1.0" encoding="utf-8"?>
-<p:properties xmlns:p="http://schemas.microsoft.com/office/2006/metadata/properties" xmlns:xsi="http://www.w3.org/2001/XMLSchema-instance" xmlns:pc="http://schemas.microsoft.com/office/infopath/2007/PartnerControls">
-  <documentManagement/>
-</p:properties>
-</file>
-
-<file path=customXml/item3.xml><?xml version="1.0" encoding="utf-8"?>
-<?mso-contentType ?>
-<FormTemplates xmlns="http://schemas.microsoft.com/sharepoint/v3/contenttype/forms">
-  <Display>DocumentLibraryForm</Display>
-  <Edit>DocumentLibraryForm</Edit>
-  <New>DocumentLibraryForm</New>
-</FormTemplates>
-</file>
-
 <file path=customXml/itemProps1.xml><?xml version="1.0" encoding="utf-8"?>
-<ds:datastoreItem xmlns:ds="http://schemas.openxmlformats.org/officeDocument/2006/customXml" ds:itemID="{6B7B52BC-33EF-4C54-820C-9984D5F8AFB1}">
+<ds:datastoreItem xmlns:ds="http://schemas.openxmlformats.org/officeDocument/2006/customXml" ds:itemID="{E0CFCB78-2973-46E2-963D-C72C98C43B41}">
   <ds:schemaRefs>
-    <ds:schemaRef ds:uri="7fd05bba-d45d-467f-a5a8-3f2970e80e4a"/>
-    <ds:schemaRef ds:uri="http://purl.org/dc/elements/1.1/"/>
-    <ds:schemaRef ds:uri="http://purl.org/dc/terms/"/>
-    <ds:schemaRef ds:uri="http://schemas.microsoft.com/internal/obd"/>
-    <ds:schemaRef ds:uri="http://schemas.microsoft.com/office/2006/documentManagement/types"/>
-    <ds:schemaRef ds:uri="http://schemas.microsoft.com/office/2006/metadata/contentType"/>
-    <ds:schemaRef ds:uri="http://schemas.microsoft.com/office/2006/metadata/properties"/>
-    <ds:schemaRef ds:uri="http://schemas.microsoft.com/office/2006/metadata/properties/metaAttributes"/>
-    <ds:schemaRef ds:uri="http://schemas.microsoft.com/office/infopath/2007/PartnerControls"/>
-    <ds:schemaRef ds:uri="http://schemas.openxmlformats.org/package/2006/metadata/core-properties"/>
-    <ds:schemaRef ds:uri="http://www.w3.org/2001/XMLSchema"/>
+    <ds:schemaRef ds:uri="http://schemas.microsoft.com/sharepoint/v3/contenttype/forms"/>
   </ds:schemaRefs>
 </ds:datastoreItem>
 </file>
@@ -31193,9 +31227,19 @@
 </file>
 
 <file path=customXml/itemProps3.xml><?xml version="1.0" encoding="utf-8"?>
-<ds:datastoreItem xmlns:ds="http://schemas.openxmlformats.org/officeDocument/2006/customXml" ds:itemID="{E0CFCB78-2973-46E2-963D-C72C98C43B41}">
+<ds:datastoreItem xmlns:ds="http://schemas.openxmlformats.org/officeDocument/2006/customXml" ds:itemID="{6B7B52BC-33EF-4C54-820C-9984D5F8AFB1}">
   <ds:schemaRefs>
-    <ds:schemaRef ds:uri="http://schemas.microsoft.com/sharepoint/v3/contenttype/forms"/>
+    <ds:schemaRef ds:uri="7fd05bba-d45d-467f-a5a8-3f2970e80e4a"/>
+    <ds:schemaRef ds:uri="http://purl.org/dc/elements/1.1/"/>
+    <ds:schemaRef ds:uri="http://purl.org/dc/terms/"/>
+    <ds:schemaRef ds:uri="http://schemas.microsoft.com/internal/obd"/>
+    <ds:schemaRef ds:uri="http://schemas.microsoft.com/office/2006/documentManagement/types"/>
+    <ds:schemaRef ds:uri="http://schemas.microsoft.com/office/2006/metadata/contentType"/>
+    <ds:schemaRef ds:uri="http://schemas.microsoft.com/office/2006/metadata/properties"/>
+    <ds:schemaRef ds:uri="http://schemas.microsoft.com/office/2006/metadata/properties/metaAttributes"/>
+    <ds:schemaRef ds:uri="http://schemas.microsoft.com/office/infopath/2007/PartnerControls"/>
+    <ds:schemaRef ds:uri="http://schemas.openxmlformats.org/package/2006/metadata/core-properties"/>
+    <ds:schemaRef ds:uri="http://www.w3.org/2001/XMLSchema"/>
   </ds:schemaRefs>
 </ds:datastoreItem>
 </file>
--- a/Presentations/MA_Final_Presentation.pptx
+++ b/Presentations/MA_Final_Presentation.pptx
@@ -6650,6 +6650,22 @@
               <a:rPr lang="en-US" dirty="0"/>
               <a:t>Different picture…</a:t>
             </a:r>
+            <a:r>
+              <a:rPr lang="en-US" dirty="0" err="1"/>
+              <a:t>LigthGBM</a:t>
+            </a:r>
+            <a:r>
+              <a:rPr lang="en-US" dirty="0"/>
+              <a:t> already better than </a:t>
+            </a:r>
+            <a:r>
+              <a:rPr lang="en-US" dirty="0" err="1"/>
+              <a:t>CLVTools</a:t>
+            </a:r>
+            <a:r>
+              <a:rPr lang="en-US" dirty="0"/>
+              <a:t> on just 3 features with MAE 2500NOK…and the storyline for the presentation changed a bit.</a:t>
+            </a:r>
           </a:p>
           <a:p>
             <a:endParaRPr lang="en-US" dirty="0"/>
@@ -6819,6 +6835,68 @@
           <a:lstStyle/>
           <a:p>
             <a:r>
+              <a:rPr lang="de-DE" dirty="0"/>
+              <a:t>Wanna </a:t>
+            </a:r>
+            <a:r>
+              <a:rPr lang="de-DE" dirty="0" err="1"/>
+              <a:t>give</a:t>
+            </a:r>
+            <a:r>
+              <a:rPr lang="de-DE" dirty="0"/>
+              <a:t> </a:t>
+            </a:r>
+            <a:r>
+              <a:rPr lang="de-DE" dirty="0" err="1"/>
+              <a:t>you</a:t>
+            </a:r>
+            <a:r>
+              <a:rPr lang="de-DE" dirty="0"/>
+              <a:t> </a:t>
+            </a:r>
+            <a:r>
+              <a:rPr lang="de-DE" dirty="0" err="1"/>
+              <a:t>some</a:t>
+            </a:r>
+            <a:r>
+              <a:rPr lang="de-DE" dirty="0"/>
+              <a:t> </a:t>
+            </a:r>
+            <a:r>
+              <a:rPr lang="de-DE" dirty="0" err="1"/>
+              <a:t>insights</a:t>
+            </a:r>
+            <a:r>
+              <a:rPr lang="de-DE" dirty="0"/>
+              <a:t> on </a:t>
+            </a:r>
+            <a:r>
+              <a:rPr lang="de-DE" dirty="0" err="1"/>
+              <a:t>our</a:t>
+            </a:r>
+            <a:r>
+              <a:rPr lang="de-DE" dirty="0"/>
+              <a:t> </a:t>
+            </a:r>
+            <a:r>
+              <a:rPr lang="de-DE" dirty="0" err="1"/>
+              <a:t>modeling</a:t>
+            </a:r>
+            <a:r>
+              <a:rPr lang="de-DE" dirty="0"/>
+              <a:t> </a:t>
+            </a:r>
+            <a:r>
+              <a:rPr lang="de-DE" dirty="0" err="1"/>
+              <a:t>journey</a:t>
+            </a:r>
+            <a:r>
+              <a:rPr lang="de-DE" dirty="0"/>
+              <a:t>.</a:t>
+            </a:r>
+          </a:p>
+          <a:p>
+            <a:r>
               <a:rPr lang="de-DE" dirty="0" err="1"/>
               <a:t>We</a:t>
             </a:r>
@@ -7262,13 +7340,8 @@
           <a:p>
             <a:r>
               <a:rPr lang="en-US" dirty="0"/>
-              <a:t>Third problem: even a well-calibrated model still over-predicts for customers who have quietly stopped renting. That's the latent attrition problem Constantin introduced earlier. </a:t>
-            </a:r>
-            <a:r>
-              <a:rPr lang="en-US"/>
-              <a:t>The hybrid architecture is our answer to that.</a:t>
-            </a:r>
-            <a:endParaRPr lang="en-US" dirty="0"/>
+              <a:t>Third problem: even a well-calibrated model still over-predicts for customers who have quietly stopped renting. That's the latent attrition problem Constantin introduced earlier. The hybrid architecture is our answer to that.</a:t>
+            </a:r>
           </a:p>
         </p:txBody>
       </p:sp>
@@ -22706,7 +22779,7 @@
         </p:nvSpPr>
         <p:spPr>
           <a:xfrm>
-            <a:off x="176456" y="158634"/>
+            <a:off x="274776" y="158634"/>
             <a:ext cx="10728325" cy="900000"/>
           </a:xfrm>
           <a:prstGeom prst="rect">
@@ -31026,21 +31099,6 @@
 </file>
 
 <file path=customXml/item1.xml><?xml version="1.0" encoding="utf-8"?>
-<?mso-contentType ?>
-<FormTemplates xmlns="http://schemas.microsoft.com/sharepoint/v3/contenttype/forms">
-  <Display>DocumentLibraryForm</Display>
-  <Edit>DocumentLibraryForm</Edit>
-  <New>DocumentLibraryForm</New>
-</FormTemplates>
-</file>
-
-<file path=customXml/item2.xml><?xml version="1.0" encoding="utf-8"?>
-<p:properties xmlns:p="http://schemas.microsoft.com/office/2006/metadata/properties" xmlns:xsi="http://www.w3.org/2001/XMLSchema-instance" xmlns:pc="http://schemas.microsoft.com/office/infopath/2007/PartnerControls">
-  <documentManagement/>
-</p:properties>
-</file>
-
-<file path=customXml/item3.xml><?xml version="1.0" encoding="utf-8"?>
 <ct:contentTypeSchema xmlns:ct="http://schemas.microsoft.com/office/2006/metadata/contentType" xmlns:ma="http://schemas.microsoft.com/office/2006/metadata/properties/metaAttributes" ct:_="" ma:_="" ma:contentTypeName="Dokument" ma:contentTypeID="0x010100D0F59E03F3A02E49BD70E31348545014" ma:contentTypeVersion="7" ma:contentTypeDescription="Ein neues Dokument erstellen." ma:contentTypeScope="" ma:versionID="907cdc0f808be0b4bc1373a5a8f6a492">
   <xsd:schema xmlns:xsd="http://www.w3.org/2001/XMLSchema" xmlns:xs="http://www.w3.org/2001/XMLSchema" xmlns:p="http://schemas.microsoft.com/office/2006/metadata/properties" xmlns:ns2="7fd05bba-d45d-467f-a5a8-3f2970e80e4a" targetNamespace="http://schemas.microsoft.com/office/2006/metadata/properties" ma:root="true" ma:fieldsID="6eaf8534fcc486a778b01aa1a7a62fa4" ns2:_="">
     <xsd:import namespace="7fd05bba-d45d-467f-a5a8-3f2970e80e4a"/>
@@ -31202,10 +31260,35 @@
 </ct:contentTypeSchema>
 </file>
 
+<file path=customXml/item2.xml><?xml version="1.0" encoding="utf-8"?>
+<p:properties xmlns:p="http://schemas.microsoft.com/office/2006/metadata/properties" xmlns:xsi="http://www.w3.org/2001/XMLSchema-instance" xmlns:pc="http://schemas.microsoft.com/office/infopath/2007/PartnerControls">
+  <documentManagement/>
+</p:properties>
+</file>
+
+<file path=customXml/item3.xml><?xml version="1.0" encoding="utf-8"?>
+<?mso-contentType ?>
+<FormTemplates xmlns="http://schemas.microsoft.com/sharepoint/v3/contenttype/forms">
+  <Display>DocumentLibraryForm</Display>
+  <Edit>DocumentLibraryForm</Edit>
+  <New>DocumentLibraryForm</New>
+</FormTemplates>
+</file>
+
 <file path=customXml/itemProps1.xml><?xml version="1.0" encoding="utf-8"?>
-<ds:datastoreItem xmlns:ds="http://schemas.openxmlformats.org/officeDocument/2006/customXml" ds:itemID="{E0CFCB78-2973-46E2-963D-C72C98C43B41}">
+<ds:datastoreItem xmlns:ds="http://schemas.openxmlformats.org/officeDocument/2006/customXml" ds:itemID="{6B7B52BC-33EF-4C54-820C-9984D5F8AFB1}">
   <ds:schemaRefs>
-    <ds:schemaRef ds:uri="http://schemas.microsoft.com/sharepoint/v3/contenttype/forms"/>
+    <ds:schemaRef ds:uri="7fd05bba-d45d-467f-a5a8-3f2970e80e4a"/>
+    <ds:schemaRef ds:uri="http://purl.org/dc/elements/1.1/"/>
+    <ds:schemaRef ds:uri="http://purl.org/dc/terms/"/>
+    <ds:schemaRef ds:uri="http://schemas.microsoft.com/internal/obd"/>
+    <ds:schemaRef ds:uri="http://schemas.microsoft.com/office/2006/documentManagement/types"/>
+    <ds:schemaRef ds:uri="http://schemas.microsoft.com/office/2006/metadata/contentType"/>
+    <ds:schemaRef ds:uri="http://schemas.microsoft.com/office/2006/metadata/properties"/>
+    <ds:schemaRef ds:uri="http://schemas.microsoft.com/office/2006/metadata/properties/metaAttributes"/>
+    <ds:schemaRef ds:uri="http://schemas.microsoft.com/office/infopath/2007/PartnerControls"/>
+    <ds:schemaRef ds:uri="http://schemas.openxmlformats.org/package/2006/metadata/core-properties"/>
+    <ds:schemaRef ds:uri="http://www.w3.org/2001/XMLSchema"/>
   </ds:schemaRefs>
 </ds:datastoreItem>
 </file>
@@ -31227,19 +31310,9 @@
 </file>
 
 <file path=customXml/itemProps3.xml><?xml version="1.0" encoding="utf-8"?>
-<ds:datastoreItem xmlns:ds="http://schemas.openxmlformats.org/officeDocument/2006/customXml" ds:itemID="{6B7B52BC-33EF-4C54-820C-9984D5F8AFB1}">
+<ds:datastoreItem xmlns:ds="http://schemas.openxmlformats.org/officeDocument/2006/customXml" ds:itemID="{E0CFCB78-2973-46E2-963D-C72C98C43B41}">
   <ds:schemaRefs>
-    <ds:schemaRef ds:uri="7fd05bba-d45d-467f-a5a8-3f2970e80e4a"/>
-    <ds:schemaRef ds:uri="http://purl.org/dc/elements/1.1/"/>
-    <ds:schemaRef ds:uri="http://purl.org/dc/terms/"/>
-    <ds:schemaRef ds:uri="http://schemas.microsoft.com/internal/obd"/>
-    <ds:schemaRef ds:uri="http://schemas.microsoft.com/office/2006/documentManagement/types"/>
-    <ds:schemaRef ds:uri="http://schemas.microsoft.com/office/2006/metadata/contentType"/>
-    <ds:schemaRef ds:uri="http://schemas.microsoft.com/office/2006/metadata/properties"/>
-    <ds:schemaRef ds:uri="http://schemas.microsoft.com/office/2006/metadata/properties/metaAttributes"/>
-    <ds:schemaRef ds:uri="http://schemas.microsoft.com/office/infopath/2007/PartnerControls"/>
-    <ds:schemaRef ds:uri="http://schemas.openxmlformats.org/package/2006/metadata/core-properties"/>
-    <ds:schemaRef ds:uri="http://www.w3.org/2001/XMLSchema"/>
+    <ds:schemaRef ds:uri="http://schemas.microsoft.com/sharepoint/v3/contenttype/forms"/>
   </ds:schemaRefs>
 </ds:datastoreItem>
 </file>
--- a/Presentations/MA_Final_Presentation.pptx
+++ b/Presentations/MA_Final_Presentation.pptx
@@ -5,10 +5,10 @@
     <p:sldMasterId id="2147483648" r:id="rId4"/>
   </p:sldMasterIdLst>
   <p:notesMasterIdLst>
-    <p:notesMasterId r:id="rId19"/>
+    <p:notesMasterId r:id="rId20"/>
   </p:notesMasterIdLst>
   <p:handoutMasterIdLst>
-    <p:handoutMasterId r:id="rId20"/>
+    <p:handoutMasterId r:id="rId21"/>
   </p:handoutMasterIdLst>
   <p:sldIdLst>
     <p:sldId id="256" r:id="rId5"/>
@@ -25,6 +25,7 @@
     <p:sldId id="1201" r:id="rId16"/>
     <p:sldId id="1203" r:id="rId17"/>
     <p:sldId id="1204" r:id="rId18"/>
+    <p:sldId id="1213" r:id="rId19"/>
   </p:sldIdLst>
   <p:sldSz cx="12192000" cy="6858000"/>
   <p:notesSz cx="6858000" cy="9144000"/>
@@ -5562,6 +5563,591 @@
 </p:notes>
 </file>
 
+<file path=ppt/notesSlides/notesSlide15.xml><?xml version="1.0" encoding="utf-8"?>
+<p:notes xmlns:a="http://schemas.openxmlformats.org/drawingml/2006/main" xmlns:r="http://schemas.openxmlformats.org/officeDocument/2006/relationships" xmlns:p="http://schemas.openxmlformats.org/presentationml/2006/main">
+  <p:cSld>
+    <p:spTree>
+      <p:nvGrpSpPr>
+        <p:cNvPr id="1" name="">
+          <a:extLst>
+            <a:ext uri="{FF2B5EF4-FFF2-40B4-BE49-F238E27FC236}">
+              <a16:creationId xmlns:a16="http://schemas.microsoft.com/office/drawing/2014/main" id="{42019AE2-CB22-C504-1B83-E4762C051527}"/>
+            </a:ext>
+          </a:extLst>
+        </p:cNvPr>
+        <p:cNvGrpSpPr/>
+        <p:nvPr/>
+      </p:nvGrpSpPr>
+      <p:grpSpPr>
+        <a:xfrm>
+          <a:off x="0" y="0"/>
+          <a:ext cx="0" cy="0"/>
+          <a:chOff x="0" y="0"/>
+          <a:chExt cx="0" cy="0"/>
+        </a:xfrm>
+      </p:grpSpPr>
+      <p:sp>
+        <p:nvSpPr>
+          <p:cNvPr id="2" name="Folienbildplatzhalter 1">
+            <a:extLst>
+              <a:ext uri="{FF2B5EF4-FFF2-40B4-BE49-F238E27FC236}">
+                <a16:creationId xmlns:a16="http://schemas.microsoft.com/office/drawing/2014/main" id="{7D4A8C3A-A0B0-2695-E0BC-1923F747FC4A}"/>
+              </a:ext>
+            </a:extLst>
+          </p:cNvPr>
+          <p:cNvSpPr>
+            <a:spLocks noGrp="1" noRot="1" noChangeAspect="1"/>
+          </p:cNvSpPr>
+          <p:nvPr>
+            <p:ph type="sldImg"/>
+          </p:nvPr>
+        </p:nvSpPr>
+        <p:spPr/>
+      </p:sp>
+      <p:sp>
+        <p:nvSpPr>
+          <p:cNvPr id="3" name="Notizenplatzhalter 2">
+            <a:extLst>
+              <a:ext uri="{FF2B5EF4-FFF2-40B4-BE49-F238E27FC236}">
+                <a16:creationId xmlns:a16="http://schemas.microsoft.com/office/drawing/2014/main" id="{D432932E-89F9-7FE1-BE1B-BCD7866645C0}"/>
+              </a:ext>
+            </a:extLst>
+          </p:cNvPr>
+          <p:cNvSpPr>
+            <a:spLocks noGrp="1"/>
+          </p:cNvSpPr>
+          <p:nvPr>
+            <p:ph type="body" idx="1"/>
+          </p:nvPr>
+        </p:nvSpPr>
+        <p:spPr/>
+        <p:txBody>
+          <a:bodyPr/>
+          <a:lstStyle/>
+          <a:p>
+            <a:r>
+              <a:rPr lang="de-DE" dirty="0"/>
+              <a:t>So </a:t>
+            </a:r>
+            <a:r>
+              <a:rPr lang="de-DE" dirty="0" err="1"/>
+              <a:t>would</a:t>
+            </a:r>
+            <a:r>
+              <a:rPr lang="de-DE" dirty="0"/>
+              <a:t> </a:t>
+            </a:r>
+            <a:r>
+              <a:rPr lang="de-DE" dirty="0" err="1"/>
+              <a:t>should</a:t>
+            </a:r>
+            <a:r>
+              <a:rPr lang="de-DE" dirty="0"/>
+              <a:t> </a:t>
+            </a:r>
+            <a:r>
+              <a:rPr lang="de-DE" dirty="0" err="1"/>
+              <a:t>Vibrent</a:t>
+            </a:r>
+            <a:r>
+              <a:rPr lang="de-DE" dirty="0"/>
+              <a:t> do with </a:t>
+            </a:r>
+            <a:r>
+              <a:rPr lang="de-DE" dirty="0" err="1"/>
+              <a:t>those</a:t>
+            </a:r>
+            <a:r>
+              <a:rPr lang="de-DE" dirty="0"/>
+              <a:t> </a:t>
+            </a:r>
+            <a:r>
+              <a:rPr lang="de-DE" dirty="0" err="1"/>
+              <a:t>information</a:t>
+            </a:r>
+            <a:endParaRPr lang="de-DE" dirty="0"/>
+          </a:p>
+          <a:p>
+            <a:endParaRPr lang="de-DE" dirty="0"/>
+          </a:p>
+          <a:p>
+            <a:r>
+              <a:rPr lang="de-DE" dirty="0"/>
+              <a:t>Bags: high </a:t>
+            </a:r>
+            <a:r>
+              <a:rPr lang="de-DE" dirty="0" err="1"/>
+              <a:t>utilization</a:t>
+            </a:r>
+            <a:r>
+              <a:rPr lang="de-DE" dirty="0"/>
+              <a:t> – </a:t>
+            </a:r>
+            <a:r>
+              <a:rPr lang="de-DE" dirty="0" err="1"/>
+              <a:t>maybe</a:t>
+            </a:r>
+            <a:r>
+              <a:rPr lang="de-DE" dirty="0"/>
+              <a:t> </a:t>
+            </a:r>
+            <a:r>
+              <a:rPr lang="de-DE" dirty="0" err="1"/>
+              <a:t>increase</a:t>
+            </a:r>
+            <a:r>
+              <a:rPr lang="de-DE" dirty="0"/>
+              <a:t> </a:t>
+            </a:r>
+            <a:r>
+              <a:rPr lang="de-DE" dirty="0" err="1"/>
+              <a:t>price</a:t>
+            </a:r>
+            <a:r>
+              <a:rPr lang="de-DE" dirty="0"/>
+              <a:t> </a:t>
+            </a:r>
+            <a:r>
+              <a:rPr lang="de-DE" dirty="0" err="1"/>
+              <a:t>sligthly</a:t>
+            </a:r>
+            <a:r>
+              <a:rPr lang="de-DE" dirty="0"/>
+              <a:t>, </a:t>
+            </a:r>
+            <a:r>
+              <a:rPr lang="de-DE" dirty="0" err="1"/>
+              <a:t>buy</a:t>
+            </a:r>
+            <a:r>
+              <a:rPr lang="de-DE" dirty="0"/>
+              <a:t> </a:t>
+            </a:r>
+            <a:r>
+              <a:rPr lang="de-DE" dirty="0" err="1"/>
+              <a:t>similar</a:t>
+            </a:r>
+            <a:r>
+              <a:rPr lang="de-DE" dirty="0"/>
+              <a:t> </a:t>
+            </a:r>
+            <a:r>
+              <a:rPr lang="de-DE" dirty="0" err="1"/>
+              <a:t>bags</a:t>
+            </a:r>
+            <a:r>
+              <a:rPr lang="de-DE" dirty="0"/>
+              <a:t> to </a:t>
+            </a:r>
+            <a:r>
+              <a:rPr lang="de-DE" dirty="0" err="1"/>
+              <a:t>does</a:t>
+            </a:r>
+            <a:r>
+              <a:rPr lang="de-DE" dirty="0"/>
+              <a:t> </a:t>
+            </a:r>
+            <a:r>
+              <a:rPr lang="de-DE" dirty="0" err="1"/>
+              <a:t>rented</a:t>
+            </a:r>
+            <a:r>
+              <a:rPr lang="de-DE" dirty="0"/>
+              <a:t> </a:t>
+            </a:r>
+            <a:r>
+              <a:rPr lang="de-DE" dirty="0" err="1"/>
+              <a:t>often</a:t>
+            </a:r>
+            <a:r>
+              <a:rPr lang="de-DE" dirty="0"/>
+              <a:t> – they have </a:t>
+            </a:r>
+            <a:r>
+              <a:rPr lang="de-DE" dirty="0" err="1"/>
+              <a:t>higher</a:t>
+            </a:r>
+            <a:r>
+              <a:rPr lang="de-DE" dirty="0"/>
+              <a:t> </a:t>
+            </a:r>
+            <a:r>
+              <a:rPr lang="de-DE" dirty="0" err="1"/>
+              <a:t>utiliasation</a:t>
+            </a:r>
+            <a:r>
+              <a:rPr lang="de-DE" dirty="0"/>
+              <a:t> and </a:t>
+            </a:r>
+            <a:r>
+              <a:rPr lang="de-DE" dirty="0" err="1"/>
+              <a:t>better</a:t>
+            </a:r>
+            <a:r>
+              <a:rPr lang="de-DE" dirty="0"/>
+              <a:t> ROI</a:t>
+            </a:r>
+          </a:p>
+          <a:p>
+            <a:endParaRPr lang="de-DE" dirty="0"/>
+          </a:p>
+          <a:p>
+            <a:r>
+              <a:rPr lang="de-DE" dirty="0"/>
+              <a:t>Shift </a:t>
+            </a:r>
+            <a:r>
+              <a:rPr lang="de-DE" dirty="0" err="1"/>
+              <a:t>away</a:t>
+            </a:r>
+            <a:r>
+              <a:rPr lang="de-DE" dirty="0"/>
+              <a:t> </a:t>
+            </a:r>
+            <a:r>
+              <a:rPr lang="de-DE" dirty="0" err="1"/>
+              <a:t>from</a:t>
+            </a:r>
+            <a:r>
+              <a:rPr lang="de-DE" dirty="0"/>
+              <a:t> </a:t>
+            </a:r>
+            <a:r>
+              <a:rPr lang="de-DE" dirty="0" err="1"/>
+              <a:t>trousers</a:t>
+            </a:r>
+            <a:r>
+              <a:rPr lang="de-DE" dirty="0"/>
+              <a:t> and </a:t>
+            </a:r>
+            <a:r>
+              <a:rPr lang="de-DE" dirty="0" err="1"/>
+              <a:t>skirts</a:t>
+            </a:r>
+            <a:r>
+              <a:rPr lang="de-DE" dirty="0"/>
+              <a:t> – </a:t>
+            </a:r>
+            <a:r>
+              <a:rPr lang="de-DE" dirty="0" err="1"/>
+              <a:t>since</a:t>
+            </a:r>
+            <a:r>
+              <a:rPr lang="de-DE" dirty="0"/>
+              <a:t> high </a:t>
+            </a:r>
+            <a:r>
+              <a:rPr lang="de-DE" dirty="0" err="1"/>
+              <a:t>share</a:t>
+            </a:r>
+            <a:r>
+              <a:rPr lang="de-DE" dirty="0"/>
+              <a:t> </a:t>
+            </a:r>
+            <a:r>
+              <a:rPr lang="de-DE" dirty="0" err="1"/>
+              <a:t>of</a:t>
+            </a:r>
+            <a:r>
+              <a:rPr lang="de-DE" dirty="0"/>
+              <a:t> </a:t>
+            </a:r>
+            <a:r>
+              <a:rPr lang="de-DE" dirty="0" err="1"/>
+              <a:t>never</a:t>
+            </a:r>
+            <a:r>
+              <a:rPr lang="de-DE" dirty="0"/>
+              <a:t> </a:t>
+            </a:r>
+            <a:r>
+              <a:rPr lang="de-DE" dirty="0" err="1"/>
+              <a:t>rented</a:t>
+            </a:r>
+            <a:r>
+              <a:rPr lang="de-DE" dirty="0"/>
+              <a:t> </a:t>
+            </a:r>
+            <a:r>
+              <a:rPr lang="de-DE" dirty="0" err="1"/>
+              <a:t>items</a:t>
+            </a:r>
+            <a:r>
+              <a:rPr lang="de-DE" dirty="0"/>
+              <a:t> – shift </a:t>
+            </a:r>
+            <a:r>
+              <a:rPr lang="de-DE" dirty="0" err="1"/>
+              <a:t>towards</a:t>
+            </a:r>
+            <a:r>
+              <a:rPr lang="de-DE" dirty="0"/>
+              <a:t> </a:t>
+            </a:r>
+            <a:r>
+              <a:rPr lang="de-DE" dirty="0" err="1"/>
+              <a:t>tops</a:t>
+            </a:r>
+            <a:r>
+              <a:rPr lang="de-DE" dirty="0"/>
+              <a:t> and </a:t>
+            </a:r>
+            <a:r>
+              <a:rPr lang="de-DE" dirty="0" err="1"/>
+              <a:t>sweaters</a:t>
+            </a:r>
+            <a:r>
+              <a:rPr lang="de-DE" dirty="0"/>
+              <a:t> with </a:t>
+            </a:r>
+            <a:r>
+              <a:rPr lang="de-DE" dirty="0" err="1"/>
+              <a:t>higher</a:t>
+            </a:r>
+            <a:r>
+              <a:rPr lang="de-DE" dirty="0"/>
+              <a:t> </a:t>
+            </a:r>
+            <a:r>
+              <a:rPr lang="de-DE" dirty="0" err="1"/>
+              <a:t>roi</a:t>
+            </a:r>
+            <a:endParaRPr lang="de-DE" dirty="0"/>
+          </a:p>
+          <a:p>
+            <a:endParaRPr lang="de-DE" dirty="0"/>
+          </a:p>
+          <a:p>
+            <a:r>
+              <a:rPr lang="de-DE" dirty="0"/>
+              <a:t>Dress </a:t>
+            </a:r>
+            <a:r>
+              <a:rPr lang="de-DE" dirty="0" err="1"/>
+              <a:t>rental</a:t>
+            </a:r>
+            <a:r>
+              <a:rPr lang="de-DE" dirty="0"/>
+              <a:t> </a:t>
+            </a:r>
+            <a:r>
+              <a:rPr lang="de-DE" dirty="0" err="1"/>
+              <a:t>seems</a:t>
+            </a:r>
+            <a:r>
+              <a:rPr lang="de-DE" dirty="0"/>
+              <a:t> to </a:t>
+            </a:r>
+            <a:r>
+              <a:rPr lang="de-DE" dirty="0" err="1"/>
+              <a:t>be</a:t>
+            </a:r>
+            <a:r>
+              <a:rPr lang="de-DE" dirty="0"/>
+              <a:t> a good </a:t>
+            </a:r>
+            <a:r>
+              <a:rPr lang="de-DE" dirty="0" err="1"/>
+              <a:t>churn</a:t>
+            </a:r>
+            <a:r>
+              <a:rPr lang="de-DE" dirty="0"/>
+              <a:t> </a:t>
+            </a:r>
+            <a:r>
+              <a:rPr lang="de-DE" dirty="0" err="1"/>
+              <a:t>predictor</a:t>
+            </a:r>
+            <a:r>
+              <a:rPr lang="de-DE" dirty="0"/>
+              <a:t> – so </a:t>
+            </a:r>
+            <a:r>
+              <a:rPr lang="de-DE" dirty="0" err="1"/>
+              <a:t>goal</a:t>
+            </a:r>
+            <a:r>
+              <a:rPr lang="de-DE" dirty="0"/>
+              <a:t> </a:t>
+            </a:r>
+            <a:r>
+              <a:rPr lang="de-DE" dirty="0" err="1"/>
+              <a:t>should</a:t>
+            </a:r>
+            <a:r>
+              <a:rPr lang="de-DE" dirty="0"/>
+              <a:t> </a:t>
+            </a:r>
+            <a:r>
+              <a:rPr lang="de-DE" dirty="0" err="1"/>
+              <a:t>be</a:t>
+            </a:r>
+            <a:r>
+              <a:rPr lang="de-DE" dirty="0"/>
+              <a:t> to </a:t>
+            </a:r>
+            <a:r>
+              <a:rPr lang="de-DE" dirty="0" err="1"/>
+              <a:t>get</a:t>
+            </a:r>
+            <a:r>
+              <a:rPr lang="de-DE" dirty="0"/>
+              <a:t> </a:t>
+            </a:r>
+            <a:r>
+              <a:rPr lang="de-DE" dirty="0" err="1"/>
+              <a:t>customers</a:t>
+            </a:r>
+            <a:r>
+              <a:rPr lang="de-DE" dirty="0"/>
+              <a:t> to </a:t>
+            </a:r>
+            <a:r>
+              <a:rPr lang="de-DE" dirty="0" err="1"/>
+              <a:t>rent</a:t>
+            </a:r>
+            <a:r>
+              <a:rPr lang="de-DE" dirty="0"/>
+              <a:t> </a:t>
+            </a:r>
+            <a:r>
+              <a:rPr lang="de-DE" dirty="0" err="1"/>
+              <a:t>from</a:t>
+            </a:r>
+            <a:r>
+              <a:rPr lang="de-DE" dirty="0"/>
+              <a:t> </a:t>
+            </a:r>
+            <a:r>
+              <a:rPr lang="de-DE" dirty="0" err="1"/>
+              <a:t>everyday</a:t>
+            </a:r>
+            <a:r>
+              <a:rPr lang="de-DE" dirty="0"/>
+              <a:t> </a:t>
+            </a:r>
+            <a:r>
+              <a:rPr lang="de-DE" dirty="0" err="1"/>
+              <a:t>clothes</a:t>
+            </a:r>
+            <a:r>
+              <a:rPr lang="de-DE" dirty="0"/>
+              <a:t> </a:t>
+            </a:r>
+            <a:r>
+              <a:rPr lang="de-DE" dirty="0" err="1"/>
+              <a:t>categories</a:t>
+            </a:r>
+            <a:r>
+              <a:rPr lang="de-DE" dirty="0"/>
+              <a:t> to </a:t>
+            </a:r>
+            <a:r>
+              <a:rPr lang="de-DE" dirty="0" err="1"/>
+              <a:t>get</a:t>
+            </a:r>
+            <a:r>
+              <a:rPr lang="de-DE" dirty="0"/>
+              <a:t> </a:t>
+            </a:r>
+            <a:r>
+              <a:rPr lang="de-DE" dirty="0" err="1"/>
+              <a:t>them</a:t>
+            </a:r>
+            <a:r>
+              <a:rPr lang="de-DE" dirty="0"/>
+              <a:t> </a:t>
+            </a:r>
+            <a:r>
+              <a:rPr lang="de-DE" dirty="0" err="1"/>
+              <a:t>away</a:t>
+            </a:r>
+            <a:r>
+              <a:rPr lang="de-DE" dirty="0"/>
+              <a:t> </a:t>
+            </a:r>
+            <a:r>
+              <a:rPr lang="de-DE" dirty="0" err="1"/>
+              <a:t>from</a:t>
+            </a:r>
+            <a:r>
+              <a:rPr lang="de-DE" dirty="0"/>
+              <a:t> </a:t>
+            </a:r>
+            <a:r>
+              <a:rPr lang="de-DE" dirty="0" err="1"/>
+              <a:t>the</a:t>
+            </a:r>
+            <a:r>
+              <a:rPr lang="de-DE" dirty="0"/>
+              <a:t> </a:t>
+            </a:r>
+            <a:r>
+              <a:rPr lang="de-DE" dirty="0" err="1"/>
+              <a:t>special</a:t>
+            </a:r>
+            <a:r>
+              <a:rPr lang="de-DE" dirty="0"/>
+              <a:t> </a:t>
+            </a:r>
+            <a:r>
+              <a:rPr lang="de-DE" dirty="0" err="1"/>
+              <a:t>occasion</a:t>
+            </a:r>
+            <a:r>
+              <a:rPr lang="de-DE" dirty="0"/>
+              <a:t> </a:t>
+            </a:r>
+            <a:r>
+              <a:rPr lang="de-DE" dirty="0" err="1"/>
+              <a:t>rents</a:t>
+            </a:r>
+            <a:endParaRPr lang="en-US" dirty="0"/>
+          </a:p>
+        </p:txBody>
+      </p:sp>
+      <p:sp>
+        <p:nvSpPr>
+          <p:cNvPr id="4" name="Foliennummernplatzhalter 3">
+            <a:extLst>
+              <a:ext uri="{FF2B5EF4-FFF2-40B4-BE49-F238E27FC236}">
+                <a16:creationId xmlns:a16="http://schemas.microsoft.com/office/drawing/2014/main" id="{3E35E2A0-8E24-5057-1FCD-DB9E46F4FD47}"/>
+              </a:ext>
+            </a:extLst>
+          </p:cNvPr>
+          <p:cNvSpPr>
+            <a:spLocks noGrp="1"/>
+          </p:cNvSpPr>
+          <p:nvPr>
+            <p:ph type="sldNum" sz="quarter" idx="5"/>
+          </p:nvPr>
+        </p:nvSpPr>
+        <p:spPr/>
+        <p:txBody>
+          <a:bodyPr/>
+          <a:lstStyle/>
+          <a:p>
+            <a:fld id="{F615DDFD-030C-4D5A-B33E-3A7E7538D2BE}" type="slidenum">
+              <a:rPr lang="de-CH" smtClean="0"/>
+              <a:t>15</a:t>
+            </a:fld>
+            <a:endParaRPr lang="de-CH"/>
+          </a:p>
+        </p:txBody>
+      </p:sp>
+    </p:spTree>
+    <p:extLst>
+      <p:ext uri="{BB962C8B-B14F-4D97-AF65-F5344CB8AC3E}">
+        <p14:creationId xmlns:p14="http://schemas.microsoft.com/office/powerpoint/2010/main" val="3575679056"/>
+      </p:ext>
+    </p:extLst>
+  </p:cSld>
+  <p:clrMapOvr>
+    <a:masterClrMapping/>
+  </p:clrMapOvr>
+</p:notes>
+</file>
+
 <file path=ppt/notesSlides/notesSlide2.xml><?xml version="1.0" encoding="utf-8"?>
 <p:notes xmlns:a="http://schemas.openxmlformats.org/drawingml/2006/main" xmlns:r="http://schemas.openxmlformats.org/officeDocument/2006/relationships" xmlns:p="http://schemas.openxmlformats.org/presentationml/2006/main">
   <p:cSld>
@@ -21120,6 +21706,183 @@
 </p:sld>
 </file>
 
+<file path=ppt/slides/slide15.xml><?xml version="1.0" encoding="utf-8"?>
+<p:sld xmlns:a="http://schemas.openxmlformats.org/drawingml/2006/main" xmlns:r="http://schemas.openxmlformats.org/officeDocument/2006/relationships" xmlns:p="http://schemas.openxmlformats.org/presentationml/2006/main">
+  <p:cSld>
+    <p:spTree>
+      <p:nvGrpSpPr>
+        <p:cNvPr id="1" name="">
+          <a:extLst>
+            <a:ext uri="{FF2B5EF4-FFF2-40B4-BE49-F238E27FC236}">
+              <a16:creationId xmlns:a16="http://schemas.microsoft.com/office/drawing/2014/main" id="{810A7920-004A-04BF-F6AF-4C834A8B6633}"/>
+            </a:ext>
+          </a:extLst>
+        </p:cNvPr>
+        <p:cNvGrpSpPr/>
+        <p:nvPr/>
+      </p:nvGrpSpPr>
+      <p:grpSpPr>
+        <a:xfrm>
+          <a:off x="0" y="0"/>
+          <a:ext cx="0" cy="0"/>
+          <a:chOff x="0" y="0"/>
+          <a:chExt cx="0" cy="0"/>
+        </a:xfrm>
+      </p:grpSpPr>
+      <p:sp>
+        <p:nvSpPr>
+          <p:cNvPr id="4" name="Datumsplatzhalter 3">
+            <a:extLst>
+              <a:ext uri="{FF2B5EF4-FFF2-40B4-BE49-F238E27FC236}">
+                <a16:creationId xmlns:a16="http://schemas.microsoft.com/office/drawing/2014/main" id="{7E59F031-395B-CFFA-0DD9-BA45A028C8E6}"/>
+              </a:ext>
+            </a:extLst>
+          </p:cNvPr>
+          <p:cNvSpPr>
+            <a:spLocks noGrp="1"/>
+          </p:cNvSpPr>
+          <p:nvPr>
+            <p:ph type="dt" sz="half" idx="10"/>
+          </p:nvPr>
+        </p:nvSpPr>
+        <p:spPr/>
+        <p:txBody>
+          <a:bodyPr/>
+          <a:lstStyle/>
+          <a:p>
+            <a:fld id="{11B96697-4585-4368-989A-16003D150648}" type="datetime1">
+              <a:rPr lang="de-CH" noProof="0" smtClean="0"/>
+              <a:t>29.04.2026</a:t>
+            </a:fld>
+            <a:endParaRPr lang="de-CH" noProof="0"/>
+          </a:p>
+        </p:txBody>
+      </p:sp>
+      <p:sp>
+        <p:nvSpPr>
+          <p:cNvPr id="5" name="Fußzeilenplatzhalter 4">
+            <a:extLst>
+              <a:ext uri="{FF2B5EF4-FFF2-40B4-BE49-F238E27FC236}">
+                <a16:creationId xmlns:a16="http://schemas.microsoft.com/office/drawing/2014/main" id="{8E18EB06-0D0A-3BB4-22AC-CBF7E7C24558}"/>
+              </a:ext>
+            </a:extLst>
+          </p:cNvPr>
+          <p:cNvSpPr>
+            <a:spLocks noGrp="1"/>
+          </p:cNvSpPr>
+          <p:nvPr>
+            <p:ph type="ftr" sz="quarter" idx="11"/>
+          </p:nvPr>
+        </p:nvSpPr>
+        <p:spPr/>
+        <p:txBody>
+          <a:bodyPr/>
+          <a:lstStyle/>
+          <a:p>
+            <a:r>
+              <a:rPr lang="en-US" dirty="0"/>
+              <a:t>Marketing Analytics</a:t>
+            </a:r>
+          </a:p>
+        </p:txBody>
+      </p:sp>
+      <p:sp>
+        <p:nvSpPr>
+          <p:cNvPr id="6" name="Foliennummernplatzhalter 5">
+            <a:extLst>
+              <a:ext uri="{FF2B5EF4-FFF2-40B4-BE49-F238E27FC236}">
+                <a16:creationId xmlns:a16="http://schemas.microsoft.com/office/drawing/2014/main" id="{A1875842-BDE0-1422-78D5-06A82BA2B59B}"/>
+              </a:ext>
+            </a:extLst>
+          </p:cNvPr>
+          <p:cNvSpPr>
+            <a:spLocks noGrp="1"/>
+          </p:cNvSpPr>
+          <p:nvPr>
+            <p:ph type="sldNum" sz="quarter" idx="12"/>
+          </p:nvPr>
+        </p:nvSpPr>
+        <p:spPr/>
+        <p:txBody>
+          <a:bodyPr/>
+          <a:lstStyle/>
+          <a:p>
+            <a:fld id="{5ACA52AF-F19D-405C-AD5F-7D94B96A5CC3}" type="slidenum">
+              <a:rPr lang="de-CH" noProof="0" smtClean="0"/>
+              <a:t>15</a:t>
+            </a:fld>
+            <a:endParaRPr lang="de-CH" noProof="0"/>
+          </a:p>
+        </p:txBody>
+      </p:sp>
+      <p:sp>
+        <p:nvSpPr>
+          <p:cNvPr id="8" name="Title 7">
+            <a:extLst>
+              <a:ext uri="{FF2B5EF4-FFF2-40B4-BE49-F238E27FC236}">
+                <a16:creationId xmlns:a16="http://schemas.microsoft.com/office/drawing/2014/main" id="{A8419249-11D8-5701-A86E-CD398A5C69E3}"/>
+              </a:ext>
+            </a:extLst>
+          </p:cNvPr>
+          <p:cNvSpPr>
+            <a:spLocks noGrp="1"/>
+          </p:cNvSpPr>
+          <p:nvPr>
+            <p:ph type="title"/>
+          </p:nvPr>
+        </p:nvSpPr>
+        <p:spPr>
+          <a:xfrm>
+            <a:off x="721677" y="1845311"/>
+            <a:ext cx="10728325" cy="900000"/>
+          </a:xfrm>
+        </p:spPr>
+        <p:txBody>
+          <a:bodyPr/>
+          <a:lstStyle/>
+          <a:p>
+            <a:pPr algn="ctr"/>
+            <a:r>
+              <a:rPr lang="it-IT" sz="4800" b="1" i="1" dirty="0"/>
+              <a:t>Thank You!</a:t>
+            </a:r>
+            <a:br>
+              <a:rPr lang="it-IT" sz="4800" b="1" i="1" dirty="0"/>
+            </a:br>
+            <a:br>
+              <a:rPr lang="it-IT" sz="2800" b="1" i="1" dirty="0"/>
+            </a:br>
+            <a:r>
+              <a:rPr lang="it-IT" sz="2000" b="1" i="1" dirty="0"/>
+              <a:t>Group 2</a:t>
+            </a:r>
+            <a:br>
+              <a:rPr lang="it-IT" sz="1800" b="1" i="1" dirty="0"/>
+            </a:br>
+            <a:br>
+              <a:rPr lang="it-IT" sz="1800" b="1" i="1" dirty="0"/>
+            </a:br>
+            <a:r>
+              <a:rPr lang="it-IT" sz="1800" i="1" dirty="0"/>
+              <a:t>Constantin Cimpoes • Julius Voss</a:t>
+            </a:r>
+            <a:endParaRPr lang="en-US" sz="4800" i="1" dirty="0"/>
+          </a:p>
+        </p:txBody>
+      </p:sp>
+    </p:spTree>
+    <p:extLst>
+      <p:ext uri="{BB962C8B-B14F-4D97-AF65-F5344CB8AC3E}">
+        <p14:creationId xmlns:p14="http://schemas.microsoft.com/office/powerpoint/2010/main" val="2210950879"/>
+      </p:ext>
+    </p:extLst>
+  </p:cSld>
+  <p:clrMapOvr>
+    <a:masterClrMapping/>
+  </p:clrMapOvr>
+</p:sld>
+</file>
+
 <file path=ppt/slides/slide2.xml><?xml version="1.0" encoding="utf-8"?>
 <p:sld xmlns:a="http://schemas.openxmlformats.org/drawingml/2006/main" xmlns:r="http://schemas.openxmlformats.org/officeDocument/2006/relationships" xmlns:p="http://schemas.openxmlformats.org/presentationml/2006/main">
   <p:cSld>
@@ -31099,6 +31862,21 @@
 </file>
 
 <file path=customXml/item1.xml><?xml version="1.0" encoding="utf-8"?>
+<?mso-contentType ?>
+<FormTemplates xmlns="http://schemas.microsoft.com/sharepoint/v3/contenttype/forms">
+  <Display>DocumentLibraryForm</Display>
+  <Edit>DocumentLibraryForm</Edit>
+  <New>DocumentLibraryForm</New>
+</FormTemplates>
+</file>
+
+<file path=customXml/item2.xml><?xml version="1.0" encoding="utf-8"?>
+<p:properties xmlns:p="http://schemas.microsoft.com/office/2006/metadata/properties" xmlns:xsi="http://www.w3.org/2001/XMLSchema-instance" xmlns:pc="http://schemas.microsoft.com/office/infopath/2007/PartnerControls">
+  <documentManagement/>
+</p:properties>
+</file>
+
+<file path=customXml/item3.xml><?xml version="1.0" encoding="utf-8"?>
 <ct:contentTypeSchema xmlns:ct="http://schemas.microsoft.com/office/2006/metadata/contentType" xmlns:ma="http://schemas.microsoft.com/office/2006/metadata/properties/metaAttributes" ct:_="" ma:_="" ma:contentTypeName="Dokument" ma:contentTypeID="0x010100D0F59E03F3A02E49BD70E31348545014" ma:contentTypeVersion="7" ma:contentTypeDescription="Ein neues Dokument erstellen." ma:contentTypeScope="" ma:versionID="907cdc0f808be0b4bc1373a5a8f6a492">
   <xsd:schema xmlns:xsd="http://www.w3.org/2001/XMLSchema" xmlns:xs="http://www.w3.org/2001/XMLSchema" xmlns:p="http://schemas.microsoft.com/office/2006/metadata/properties" xmlns:ns2="7fd05bba-d45d-467f-a5a8-3f2970e80e4a" targetNamespace="http://schemas.microsoft.com/office/2006/metadata/properties" ma:root="true" ma:fieldsID="6eaf8534fcc486a778b01aa1a7a62fa4" ns2:_="">
     <xsd:import namespace="7fd05bba-d45d-467f-a5a8-3f2970e80e4a"/>
@@ -31260,35 +32038,10 @@
 </ct:contentTypeSchema>
 </file>
 
-<file path=customXml/item2.xml><?xml version="1.0" encoding="utf-8"?>
-<p:properties xmlns:p="http://schemas.microsoft.com/office/2006/metadata/properties" xmlns:xsi="http://www.w3.org/2001/XMLSchema-instance" xmlns:pc="http://schemas.microsoft.com/office/infopath/2007/PartnerControls">
-  <documentManagement/>
-</p:properties>
-</file>
-
-<file path=customXml/item3.xml><?xml version="1.0" encoding="utf-8"?>
-<?mso-contentType ?>
-<FormTemplates xmlns="http://schemas.microsoft.com/sharepoint/v3/contenttype/forms">
-  <Display>DocumentLibraryForm</Display>
-  <Edit>DocumentLibraryForm</Edit>
-  <New>DocumentLibraryForm</New>
-</FormTemplates>
-</file>
-
 <file path=customXml/itemProps1.xml><?xml version="1.0" encoding="utf-8"?>
-<ds:datastoreItem xmlns:ds="http://schemas.openxmlformats.org/officeDocument/2006/customXml" ds:itemID="{6B7B52BC-33EF-4C54-820C-9984D5F8AFB1}">
+<ds:datastoreItem xmlns:ds="http://schemas.openxmlformats.org/officeDocument/2006/customXml" ds:itemID="{E0CFCB78-2973-46E2-963D-C72C98C43B41}">
   <ds:schemaRefs>
-    <ds:schemaRef ds:uri="7fd05bba-d45d-467f-a5a8-3f2970e80e4a"/>
-    <ds:schemaRef ds:uri="http://purl.org/dc/elements/1.1/"/>
-    <ds:schemaRef ds:uri="http://purl.org/dc/terms/"/>
-    <ds:schemaRef ds:uri="http://schemas.microsoft.com/internal/obd"/>
-    <ds:schemaRef ds:uri="http://schemas.microsoft.com/office/2006/documentManagement/types"/>
-    <ds:schemaRef ds:uri="http://schemas.microsoft.com/office/2006/metadata/contentType"/>
-    <ds:schemaRef ds:uri="http://schemas.microsoft.com/office/2006/metadata/properties"/>
-    <ds:schemaRef ds:uri="http://schemas.microsoft.com/office/2006/metadata/properties/metaAttributes"/>
-    <ds:schemaRef ds:uri="http://schemas.microsoft.com/office/infopath/2007/PartnerControls"/>
-    <ds:schemaRef ds:uri="http://schemas.openxmlformats.org/package/2006/metadata/core-properties"/>
-    <ds:schemaRef ds:uri="http://www.w3.org/2001/XMLSchema"/>
+    <ds:schemaRef ds:uri="http://schemas.microsoft.com/sharepoint/v3/contenttype/forms"/>
   </ds:schemaRefs>
 </ds:datastoreItem>
 </file>
@@ -31310,9 +32063,19 @@
 </file>
 
 <file path=customXml/itemProps3.xml><?xml version="1.0" encoding="utf-8"?>
-<ds:datastoreItem xmlns:ds="http://schemas.openxmlformats.org/officeDocument/2006/customXml" ds:itemID="{E0CFCB78-2973-46E2-963D-C72C98C43B41}">
+<ds:datastoreItem xmlns:ds="http://schemas.openxmlformats.org/officeDocument/2006/customXml" ds:itemID="{6B7B52BC-33EF-4C54-820C-9984D5F8AFB1}">
   <ds:schemaRefs>
-    <ds:schemaRef ds:uri="http://schemas.microsoft.com/sharepoint/v3/contenttype/forms"/>
+    <ds:schemaRef ds:uri="7fd05bba-d45d-467f-a5a8-3f2970e80e4a"/>
+    <ds:schemaRef ds:uri="http://purl.org/dc/elements/1.1/"/>
+    <ds:schemaRef ds:uri="http://purl.org/dc/terms/"/>
+    <ds:schemaRef ds:uri="http://schemas.microsoft.com/internal/obd"/>
+    <ds:schemaRef ds:uri="http://schemas.microsoft.com/office/2006/documentManagement/types"/>
+    <ds:schemaRef ds:uri="http://schemas.microsoft.com/office/2006/metadata/contentType"/>
+    <ds:schemaRef ds:uri="http://schemas.microsoft.com/office/2006/metadata/properties"/>
+    <ds:schemaRef ds:uri="http://schemas.microsoft.com/office/2006/metadata/properties/metaAttributes"/>
+    <ds:schemaRef ds:uri="http://schemas.microsoft.com/office/infopath/2007/PartnerControls"/>
+    <ds:schemaRef ds:uri="http://schemas.openxmlformats.org/package/2006/metadata/core-properties"/>
+    <ds:schemaRef ds:uri="http://www.w3.org/2001/XMLSchema"/>
   </ds:schemaRefs>
 </ds:datastoreItem>
 </file>
--- a/Presentations/MA_Final_Presentation.pptx
+++ b/Presentations/MA_Final_Presentation.pptx
@@ -1504,7 +1504,7 @@
           </a:r>
           <a:r>
             <a:rPr lang="en-US" dirty="0"/>
-            <a:t>? Grid search across k=5/13 and UMAP dims 2/50. k=8 achieved the global Silhouette peak and mean ARI of 0.85 across 100 random initializations</a:t>
+            <a:t>? Grid search across k=5/13 and UMAP dims 2/50. k=8 achieved the global Silhouette peak of 0.645 and mean ARI of 0.85 across 100 random initializations</a:t>
           </a:r>
         </a:p>
       </dgm:t>
@@ -2567,7 +2567,7 @@
           </a:r>
           <a:r>
             <a:rPr lang="en-US" sz="1200" kern="1200" dirty="0"/>
-            <a:t>? Grid search across k=5/13 and UMAP dims 2/50. k=8 achieved the global Silhouette peak and mean ARI of 0.85 across 100 random initializations</a:t>
+            <a:t>? Grid search across k=5/13 and UMAP dims 2/50. k=8 achieved the global Silhouette peak of 0.645 and mean ARI of 0.85 across 100 random initializations</a:t>
           </a:r>
         </a:p>
       </dsp:txBody>
@@ -23593,7 +23593,7 @@
           <p:nvPr>
             <p:extLst>
               <p:ext uri="{D42A27DB-BD31-4B8C-83A1-F6EECF244321}">
-                <p14:modId xmlns:p14="http://schemas.microsoft.com/office/powerpoint/2010/main" val="3033101486"/>
+                <p14:modId xmlns:p14="http://schemas.microsoft.com/office/powerpoint/2010/main" val="1109181970"/>
               </p:ext>
             </p:extLst>
           </p:nvPr>
@@ -31862,21 +31862,6 @@
 </file>
 
 <file path=customXml/item1.xml><?xml version="1.0" encoding="utf-8"?>
-<?mso-contentType ?>
-<FormTemplates xmlns="http://schemas.microsoft.com/sharepoint/v3/contenttype/forms">
-  <Display>DocumentLibraryForm</Display>
-  <Edit>DocumentLibraryForm</Edit>
-  <New>DocumentLibraryForm</New>
-</FormTemplates>
-</file>
-
-<file path=customXml/item2.xml><?xml version="1.0" encoding="utf-8"?>
-<p:properties xmlns:p="http://schemas.microsoft.com/office/2006/metadata/properties" xmlns:xsi="http://www.w3.org/2001/XMLSchema-instance" xmlns:pc="http://schemas.microsoft.com/office/infopath/2007/PartnerControls">
-  <documentManagement/>
-</p:properties>
-</file>
-
-<file path=customXml/item3.xml><?xml version="1.0" encoding="utf-8"?>
 <ct:contentTypeSchema xmlns:ct="http://schemas.microsoft.com/office/2006/metadata/contentType" xmlns:ma="http://schemas.microsoft.com/office/2006/metadata/properties/metaAttributes" ct:_="" ma:_="" ma:contentTypeName="Dokument" ma:contentTypeID="0x010100D0F59E03F3A02E49BD70E31348545014" ma:contentTypeVersion="7" ma:contentTypeDescription="Ein neues Dokument erstellen." ma:contentTypeScope="" ma:versionID="907cdc0f808be0b4bc1373a5a8f6a492">
   <xsd:schema xmlns:xsd="http://www.w3.org/2001/XMLSchema" xmlns:xs="http://www.w3.org/2001/XMLSchema" xmlns:p="http://schemas.microsoft.com/office/2006/metadata/properties" xmlns:ns2="7fd05bba-d45d-467f-a5a8-3f2970e80e4a" targetNamespace="http://schemas.microsoft.com/office/2006/metadata/properties" ma:root="true" ma:fieldsID="6eaf8534fcc486a778b01aa1a7a62fa4" ns2:_="">
     <xsd:import namespace="7fd05bba-d45d-467f-a5a8-3f2970e80e4a"/>
@@ -32038,10 +32023,35 @@
 </ct:contentTypeSchema>
 </file>
 
+<file path=customXml/item2.xml><?xml version="1.0" encoding="utf-8"?>
+<p:properties xmlns:p="http://schemas.microsoft.com/office/2006/metadata/properties" xmlns:xsi="http://www.w3.org/2001/XMLSchema-instance" xmlns:pc="http://schemas.microsoft.com/office/infopath/2007/PartnerControls">
+  <documentManagement/>
+</p:properties>
+</file>
+
+<file path=customXml/item3.xml><?xml version="1.0" encoding="utf-8"?>
+<?mso-contentType ?>
+<FormTemplates xmlns="http://schemas.microsoft.com/sharepoint/v3/contenttype/forms">
+  <Display>DocumentLibraryForm</Display>
+  <Edit>DocumentLibraryForm</Edit>
+  <New>DocumentLibraryForm</New>
+</FormTemplates>
+</file>
+
 <file path=customXml/itemProps1.xml><?xml version="1.0" encoding="utf-8"?>
-<ds:datastoreItem xmlns:ds="http://schemas.openxmlformats.org/officeDocument/2006/customXml" ds:itemID="{E0CFCB78-2973-46E2-963D-C72C98C43B41}">
+<ds:datastoreItem xmlns:ds="http://schemas.openxmlformats.org/officeDocument/2006/customXml" ds:itemID="{6B7B52BC-33EF-4C54-820C-9984D5F8AFB1}">
   <ds:schemaRefs>
-    <ds:schemaRef ds:uri="http://schemas.microsoft.com/sharepoint/v3/contenttype/forms"/>
+    <ds:schemaRef ds:uri="7fd05bba-d45d-467f-a5a8-3f2970e80e4a"/>
+    <ds:schemaRef ds:uri="http://purl.org/dc/elements/1.1/"/>
+    <ds:schemaRef ds:uri="http://purl.org/dc/terms/"/>
+    <ds:schemaRef ds:uri="http://schemas.microsoft.com/internal/obd"/>
+    <ds:schemaRef ds:uri="http://schemas.microsoft.com/office/2006/documentManagement/types"/>
+    <ds:schemaRef ds:uri="http://schemas.microsoft.com/office/2006/metadata/contentType"/>
+    <ds:schemaRef ds:uri="http://schemas.microsoft.com/office/2006/metadata/properties"/>
+    <ds:schemaRef ds:uri="http://schemas.microsoft.com/office/2006/metadata/properties/metaAttributes"/>
+    <ds:schemaRef ds:uri="http://schemas.microsoft.com/office/infopath/2007/PartnerControls"/>
+    <ds:schemaRef ds:uri="http://schemas.openxmlformats.org/package/2006/metadata/core-properties"/>
+    <ds:schemaRef ds:uri="http://www.w3.org/2001/XMLSchema"/>
   </ds:schemaRefs>
 </ds:datastoreItem>
 </file>
@@ -32063,19 +32073,9 @@
 </file>
 
 <file path=customXml/itemProps3.xml><?xml version="1.0" encoding="utf-8"?>
-<ds:datastoreItem xmlns:ds="http://schemas.openxmlformats.org/officeDocument/2006/customXml" ds:itemID="{6B7B52BC-33EF-4C54-820C-9984D5F8AFB1}">
+<ds:datastoreItem xmlns:ds="http://schemas.openxmlformats.org/officeDocument/2006/customXml" ds:itemID="{E0CFCB78-2973-46E2-963D-C72C98C43B41}">
   <ds:schemaRefs>
-    <ds:schemaRef ds:uri="7fd05bba-d45d-467f-a5a8-3f2970e80e4a"/>
-    <ds:schemaRef ds:uri="http://purl.org/dc/elements/1.1/"/>
-    <ds:schemaRef ds:uri="http://purl.org/dc/terms/"/>
-    <ds:schemaRef ds:uri="http://schemas.microsoft.com/internal/obd"/>
-    <ds:schemaRef ds:uri="http://schemas.microsoft.com/office/2006/documentManagement/types"/>
-    <ds:schemaRef ds:uri="http://schemas.microsoft.com/office/2006/metadata/contentType"/>
-    <ds:schemaRef ds:uri="http://schemas.microsoft.com/office/2006/metadata/properties"/>
-    <ds:schemaRef ds:uri="http://schemas.microsoft.com/office/2006/metadata/properties/metaAttributes"/>
-    <ds:schemaRef ds:uri="http://schemas.microsoft.com/office/infopath/2007/PartnerControls"/>
-    <ds:schemaRef ds:uri="http://schemas.openxmlformats.org/package/2006/metadata/core-properties"/>
-    <ds:schemaRef ds:uri="http://www.w3.org/2001/XMLSchema"/>
+    <ds:schemaRef ds:uri="http://schemas.microsoft.com/sharepoint/v3/contenttype/forms"/>
   </ds:schemaRefs>
 </ds:datastoreItem>
 </file>
--- a/Presentations/MA_Final_Presentation.pptx
+++ b/Presentations/MA_Final_Presentation.pptx
@@ -20,7 +20,7 @@
     <p:sldId id="1193" r:id="rId11"/>
     <p:sldId id="1195" r:id="rId12"/>
     <p:sldId id="1196" r:id="rId13"/>
-    <p:sldId id="1199" r:id="rId14"/>
+    <p:sldId id="1214" r:id="rId14"/>
     <p:sldId id="1200" r:id="rId15"/>
     <p:sldId id="1201" r:id="rId16"/>
     <p:sldId id="1203" r:id="rId17"/>
@@ -3964,7 +3964,7 @@
           <a:p>
             <a:fld id="{F68ABEA4-9216-4FDF-AAE1-D8632908A8EC}" type="datetimeFigureOut">
               <a:rPr lang="de-CH" smtClean="0"/>
-              <a:t>29.04.2026</a:t>
+              <a:t>30.04.2026</a:t>
             </a:fld>
             <a:endParaRPr lang="de-CH"/>
           </a:p>
@@ -4042,7 +4042,7 @@
           <a:p>
             <a:fld id="{2B685DCD-866D-47AE-A236-118539F53379}" type="slidenum">
               <a:rPr lang="de-CH" smtClean="0"/>
-              <a:t>‹#›</a:t>
+              <a:t>‹Nr.›</a:t>
             </a:fld>
             <a:endParaRPr lang="de-CH"/>
           </a:p>
@@ -4141,7 +4141,7 @@
           <a:p>
             <a:fld id="{4B78A90D-FE7E-41AF-B03D-808D82937CB9}" type="datetimeFigureOut">
               <a:rPr lang="de-CH" smtClean="0"/>
-              <a:t>29.04.2026</a:t>
+              <a:t>30.04.2026</a:t>
             </a:fld>
             <a:endParaRPr lang="de-CH"/>
           </a:p>
@@ -4300,7 +4300,7 @@
           <a:p>
             <a:fld id="{F615DDFD-030C-4D5A-B33E-3A7E7538D2BE}" type="slidenum">
               <a:rPr lang="de-CH" smtClean="0"/>
-              <a:t>‹#›</a:t>
+              <a:t>‹Nr.›</a:t>
             </a:fld>
             <a:endParaRPr lang="de-CH"/>
           </a:p>
@@ -4501,7 +4501,7 @@
         <p:cNvPr id="1" name="">
           <a:extLst>
             <a:ext uri="{FF2B5EF4-FFF2-40B4-BE49-F238E27FC236}">
-              <a16:creationId xmlns:a16="http://schemas.microsoft.com/office/drawing/2014/main" id="{A61EA176-0DC8-987C-C818-6D746DC6FC1B}"/>
+              <a16:creationId xmlns:a16="http://schemas.microsoft.com/office/drawing/2014/main" id="{35D5F5E2-DA88-2E9F-35F1-788C71BDAD93}"/>
             </a:ext>
           </a:extLst>
         </p:cNvPr>
@@ -4521,7 +4521,7 @@
           <p:cNvPr id="2" name="Folienbildplatzhalter 1">
             <a:extLst>
               <a:ext uri="{FF2B5EF4-FFF2-40B4-BE49-F238E27FC236}">
-                <a16:creationId xmlns:a16="http://schemas.microsoft.com/office/drawing/2014/main" id="{7E4FD48A-6CB9-F4BE-5710-C1CA7B776297}"/>
+                <a16:creationId xmlns:a16="http://schemas.microsoft.com/office/drawing/2014/main" id="{1AFF42CE-C5F1-C521-FE61-2491E6F7D61E}"/>
               </a:ext>
             </a:extLst>
           </p:cNvPr>
@@ -4539,7 +4539,7 @@
           <p:cNvPr id="3" name="Notizenplatzhalter 2">
             <a:extLst>
               <a:ext uri="{FF2B5EF4-FFF2-40B4-BE49-F238E27FC236}">
-                <a16:creationId xmlns:a16="http://schemas.microsoft.com/office/drawing/2014/main" id="{857F428B-0EA1-7DF3-A329-4C16574BA944}"/>
+                <a16:creationId xmlns:a16="http://schemas.microsoft.com/office/drawing/2014/main" id="{7A91F7B4-CABA-A731-4F50-F3A01261BB2C}"/>
               </a:ext>
             </a:extLst>
           </p:cNvPr>
@@ -4572,58 +4572,6 @@
               <a:tabLst/>
               <a:defRPr/>
             </a:pPr>
-            <a:r>
-              <a:rPr lang="de-DE" dirty="0"/>
-              <a:t>MAE </a:t>
-            </a:r>
-            <a:r>
-              <a:rPr lang="de-DE" dirty="0" err="1"/>
-              <a:t>of</a:t>
-            </a:r>
-            <a:r>
-              <a:rPr lang="de-DE" dirty="0"/>
-              <a:t> hybrid two-stage </a:t>
-            </a:r>
-            <a:r>
-              <a:rPr lang="de-DE" dirty="0" err="1"/>
-              <a:t>model</a:t>
-            </a:r>
-            <a:r>
-              <a:rPr lang="de-DE" dirty="0"/>
-              <a:t> </a:t>
-            </a:r>
-            <a:r>
-              <a:rPr lang="de-DE" dirty="0" err="1"/>
-              <a:t>is</a:t>
-            </a:r>
-            <a:r>
-              <a:rPr lang="de-DE" dirty="0"/>
-              <a:t> at 9817.49NOK </a:t>
-            </a:r>
-            <a:r>
-              <a:rPr lang="de-DE" dirty="0" err="1"/>
-              <a:t>when</a:t>
-            </a:r>
-            <a:r>
-              <a:rPr lang="de-DE" dirty="0"/>
-              <a:t> </a:t>
-            </a:r>
-            <a:r>
-              <a:rPr lang="de-DE" dirty="0" err="1"/>
-              <a:t>using</a:t>
-            </a:r>
-            <a:r>
-              <a:rPr lang="de-DE" dirty="0"/>
-              <a:t> </a:t>
-            </a:r>
-            <a:r>
-              <a:rPr lang="de-DE" dirty="0" err="1"/>
-              <a:t>data</a:t>
-            </a:r>
-            <a:r>
-              <a:rPr lang="de-DE" dirty="0"/>
-              <a:t> post-2020 break</a:t>
-            </a:r>
             <a:endParaRPr lang="en-US" dirty="0"/>
           </a:p>
         </p:txBody>
@@ -4633,7 +4581,7 @@
           <p:cNvPr id="4" name="Foliennummernplatzhalter 3">
             <a:extLst>
               <a:ext uri="{FF2B5EF4-FFF2-40B4-BE49-F238E27FC236}">
-                <a16:creationId xmlns:a16="http://schemas.microsoft.com/office/drawing/2014/main" id="{2414D054-57F6-1BA8-16D5-EFE4801D21F4}"/>
+                <a16:creationId xmlns:a16="http://schemas.microsoft.com/office/drawing/2014/main" id="{30B20E9F-D742-40E1-0F53-597202FF98F4}"/>
               </a:ext>
             </a:extLst>
           </p:cNvPr>
@@ -4660,7 +4608,7 @@
     </p:spTree>
     <p:extLst>
       <p:ext uri="{BB962C8B-B14F-4D97-AF65-F5344CB8AC3E}">
-        <p14:creationId xmlns:p14="http://schemas.microsoft.com/office/powerpoint/2010/main" val="162326784"/>
+        <p14:creationId xmlns:p14="http://schemas.microsoft.com/office/powerpoint/2010/main" val="1602486031"/>
       </p:ext>
     </p:extLst>
   </p:cSld>
@@ -6210,82 +6158,7 @@
           <a:bodyPr/>
           <a:lstStyle/>
           <a:p>
-            <a:r>
-              <a:rPr lang="en-US" dirty="0"/>
-              <a:t>So, let's start with the company.</a:t>
-            </a:r>
-          </a:p>
-          <a:p>
             <a:endParaRPr lang="en-US" dirty="0"/>
-          </a:p>
-          <a:p>
-            <a:r>
-              <a:rPr lang="en-US" dirty="0" err="1"/>
-              <a:t>Vibrent</a:t>
-            </a:r>
-            <a:r>
-              <a:rPr lang="en-US" dirty="0"/>
-              <a:t> is a Norwegian fashion rental platform with 7,400 customers, almost 16,000 garments. And it’s not a standard e-commerce business. Because in retail, a customer buys something, and you know exactly what that transaction is worth. In rental, there's no guaranteed repeat. A customer might rent once for a wedding and disappear. Or they might rent every month for three years. The same transaction history can mean completely different things depending on the person.</a:t>
-            </a:r>
-          </a:p>
-          <a:p>
-            <a:endParaRPr lang="en-US" dirty="0"/>
-          </a:p>
-          <a:p>
-            <a:r>
-              <a:rPr lang="en-US" dirty="0"/>
-              <a:t>So predicting Customer Lifetime Value here is genuinely harder, </a:t>
-            </a:r>
-            <a:r>
-              <a:rPr lang="en-US" dirty="0" err="1"/>
-              <a:t>beacuse</a:t>
-            </a:r>
-            <a:r>
-              <a:rPr lang="en-US" dirty="0"/>
-              <a:t> it's driven by rental frequency, category preference and duration, and all of these things shift over time.</a:t>
-            </a:r>
-          </a:p>
-          <a:p>
-            <a:endParaRPr lang="en-US" dirty="0"/>
-          </a:p>
-          <a:p>
-            <a:r>
-              <a:rPr lang="en-US" dirty="0"/>
-              <a:t>Now, the models the industry typically uses, like Pareto and NBD, they only look at </a:t>
-            </a:r>
-            <a:r>
-              <a:rPr lang="en-US" i="1" dirty="0"/>
-              <a:t>when</a:t>
-            </a:r>
-            <a:r>
-              <a:rPr lang="en-US" dirty="0"/>
-              <a:t> and </a:t>
-            </a:r>
-            <a:r>
-              <a:rPr lang="en-US" i="1" dirty="0"/>
-              <a:t>how often</a:t>
-            </a:r>
-            <a:r>
-              <a:rPr lang="en-US" dirty="0"/>
-              <a:t> a customer transacts. They completely ignore </a:t>
-            </a:r>
-            <a:r>
-              <a:rPr lang="en-US" i="1" dirty="0"/>
-              <a:t>what</a:t>
-            </a:r>
-            <a:r>
-              <a:rPr lang="en-US" dirty="0"/>
-              <a:t> that customer actually rents. And that feels like a gap worth exploring. Does knowing that a customer only rents dresses, versus one who rents dresses, jackets, tops, and accessories actually help you predict who stays?</a:t>
-            </a:r>
-          </a:p>
-          <a:p>
-            <a:endParaRPr lang="en-US" dirty="0"/>
-          </a:p>
-          <a:p>
-            <a:r>
-              <a:rPr lang="en-US" dirty="0"/>
-              <a:t>That's the core question. And to answer it, we had three objectives: first, build a meaningful product segmentation. Second, use it to predict 12-month revenue. Third, identify churners before they go silent.</a:t>
-            </a:r>
           </a:p>
         </p:txBody>
       </p:sp>
@@ -6393,45 +6266,7 @@
           <a:bodyPr/>
           <a:lstStyle/>
           <a:p>
-            <a:r>
-              <a:rPr lang="en-US" dirty="0"/>
-              <a:t>Before we get into any modeling, there's something important about this dataset that shapes every decision we made.</a:t>
-            </a:r>
-          </a:p>
-          <a:p>
             <a:endParaRPr lang="en-US" dirty="0"/>
-          </a:p>
-          <a:p>
-            <a:r>
-              <a:rPr lang="en-US" dirty="0"/>
-              <a:t>We have data from March 2016 to September 2023. 77,000 rental events, 7,400 customers. But if you plot transaction volume over time, something jumps out immediately, and you can see it right here in the chart. Around April 2020, everything changes. Median rental duration goes from 4 days to 30 days. Monthly transactions go from roughly 100 to over 2,000. </a:t>
-            </a:r>
-            <a:r>
-              <a:rPr lang="en-US" dirty="0" err="1"/>
-              <a:t>Vibrent</a:t>
-            </a:r>
-            <a:r>
-              <a:rPr lang="en-US" dirty="0"/>
-              <a:t> pivoted from a spot-rental model to a subscription model, and it's basically a different business after that point.</a:t>
-            </a:r>
-          </a:p>
-          <a:p>
-            <a:endParaRPr lang="en-US" dirty="0"/>
-          </a:p>
-          <a:p>
-            <a:r>
-              <a:rPr lang="en-US" dirty="0"/>
-              <a:t>So the question is: what do you do with the pre-2020 data? The naive answer is to throw it away, train only on the subscription era. But that turns out to be a mistake, because customers who joined in 2017 carry behavioral signals that are still meaningful, like how long they've been on the platform, their early loyalty patterns and so on. When we used the full history for feature engineering but kept labels strictly post-2020, MAE dropped by 74% compared to using post-2020 data alone.</a:t>
-            </a:r>
-          </a:p>
-          <a:p>
-            <a:endParaRPr lang="en-US" dirty="0"/>
-          </a:p>
-          <a:p>
-            <a:r>
-              <a:rPr lang="en-US" dirty="0"/>
-              <a:t>And then for validation, we used an expanding window split. Train on features up to September 2021, predict the following year. Then expand the window to 2022, predict 2023. The model never sees the future it's predicting. This is important because random splits would leak future transactions into past predictions</a:t>
-            </a:r>
           </a:p>
         </p:txBody>
       </p:sp>
@@ -6539,64 +6374,6 @@
           <a:bodyPr/>
           <a:lstStyle/>
           <a:p>
-            <a:r>
-              <a:rPr lang="en-US" dirty="0"/>
-              <a:t>Now, to build product-level features, we first needed a meaningful segmentation of the catalog. And the question was: how do you cluster 15,000 garments in a way that actually captures style?</a:t>
-            </a:r>
-          </a:p>
-          <a:p>
-            <a:endParaRPr lang="en-US" dirty="0"/>
-          </a:p>
-          <a:p>
-            <a:r>
-              <a:rPr lang="en-US" dirty="0"/>
-              <a:t>Metadata tags don't cut it. A tag says "dress.“, but an embedding captures what </a:t>
-            </a:r>
-            <a:r>
-              <a:rPr lang="en-US" i="1" dirty="0"/>
-              <a:t>kind</a:t>
-            </a:r>
-            <a:r>
-              <a:rPr lang="en-US" dirty="0"/>
-              <a:t> of dress, the silhouette, the occasion, the color palette and so on. So we used Voyage Multimodal 3.5, which integrates both the product image and the text description into a single vector. One representation per garment, no modality mismatch.</a:t>
-            </a:r>
-          </a:p>
-          <a:p>
-            <a:endParaRPr lang="en-US" dirty="0"/>
-          </a:p>
-          <a:p>
-            <a:r>
-              <a:rPr lang="en-US" dirty="0"/>
-              <a:t>But you can't cluster directly on 2,048-dimensional embeddings. We tried, but HDB-SCAN put 84% of items into a single cluster. K-Means Silhouette scores were near zero. Distance metrics simply break down in that many dimensions. So we ran UMAP first to reduce to 20 dimensions, preserving both local and global structure, and </a:t>
-            </a:r>
-            <a:r>
-              <a:rPr lang="en-US" i="1" dirty="0"/>
-              <a:t>then</a:t>
-            </a:r>
-            <a:r>
-              <a:rPr lang="en-US" dirty="0"/>
-              <a:t> clustered.</a:t>
-            </a:r>
-          </a:p>
-          <a:p>
-            <a:endParaRPr lang="en-US" dirty="0"/>
-          </a:p>
-          <a:p>
-            <a:r>
-              <a:rPr lang="en-US" dirty="0"/>
-              <a:t>For the algorithm, we compared K-Means, GMM, and HDB-SCAN on the reduced space. K-Means and GMM gave nearly identical assignments, and when we checked the GMM soft probabilities, over 99% of items had more than 99% confidence in a single cluster. So probabilistic modeling added nothing. K-Means is simpler, more stable, fully interpretable, thus, overall an easier choice.</a:t>
-            </a:r>
-          </a:p>
-          <a:p>
-            <a:endParaRPr lang="en-US" dirty="0"/>
-          </a:p>
-          <a:p>
-            <a:r>
-              <a:rPr lang="en-US" dirty="0"/>
-              <a:t>To find the best k, we ran a grid search across cluster counts and UMAP dimensions. You can see the heatmap here,  k=8 at 20 dimensions hits the global Silhouette peak, and it's stable across 100 random initializations with a mean ARI of 0.85. So that’s what we chose.</a:t>
-            </a:r>
-          </a:p>
-          <a:p>
             <a:endParaRPr lang="en-US" dirty="0"/>
           </a:p>
         </p:txBody>
@@ -6705,66 +6482,6 @@
           <a:bodyPr/>
           <a:lstStyle/>
           <a:p>
-            <a:r>
-              <a:rPr lang="en-US" dirty="0"/>
-              <a:t>So what do those 8 clusters actually tell us about the business? We profiled each one on revenue share, inventory share, utilization, and ROI, and four distinct strategic roles emerged.</a:t>
-            </a:r>
-          </a:p>
-          <a:p>
-            <a:endParaRPr lang="en-US" dirty="0"/>
-          </a:p>
-          <a:p>
-            <a:r>
-              <a:rPr lang="en-US" dirty="0"/>
-              <a:t>Looking at the chart, that large orange bubble sitting far to the right is Dresses &amp; Jumpsuits. 27,000 rentals, 41.9% of revenue, 42.3% of inventory. Revenue and inventory are almost perfectly matched. This is the platform's engine, it's doing exactly what it should be doing.</a:t>
-            </a:r>
-          </a:p>
-          <a:p>
-            <a:endParaRPr lang="en-US" dirty="0"/>
-          </a:p>
-          <a:p>
-            <a:r>
-              <a:rPr lang="en-US" dirty="0"/>
-              <a:t>Up in the top left, you have two clusters sitting at high price points but low volume. Bags &amp; Accessories and Jackets &amp; Coats. These are your premium items. Bags have the highest revenue-per-item in the entire catalog, 10 thousands NOK,  and a utilization rate 71% above average. But only 421 items in stock. The demand is clearly there, supply isn't. And despite all that revenue, ROI is actually the lowest in the catalog at 1.98, because designer bags are expensive to acquire. So this is a growth lever, but a capital-intensive one.</a:t>
-            </a:r>
-          </a:p>
-          <a:p>
-            <a:endParaRPr lang="en-US" dirty="0"/>
-          </a:p>
-          <a:p>
-            <a:r>
-              <a:rPr lang="en-US" dirty="0"/>
-              <a:t>Jackets tell a slightly different story, with the highest median rental price at 1 thousand 800 hundred NOK, but 36.7% dead inventory. In this case procurement hasn't matched demand well.</a:t>
-            </a:r>
-          </a:p>
-          <a:p>
-            <a:endParaRPr lang="en-US" dirty="0"/>
-          </a:p>
-          <a:p>
-            <a:r>
-              <a:rPr lang="en-US" dirty="0"/>
-              <a:t>Then the bottom-left cluster, that's where you find Tops, Sweaters, Trousers, Skirts and Jewelry. The workhorses and the underperformers live here together.</a:t>
-            </a:r>
-          </a:p>
-          <a:p>
-            <a:endParaRPr lang="en-US" dirty="0"/>
-          </a:p>
-          <a:p>
-            <a:r>
-              <a:rPr lang="en-US" dirty="0"/>
-              <a:t>Tops and Sweaters have the best ROI in the catalog, 3.79 and 3.59. Thanks to low acquisition cost and high turnover, they recover their investment nearly four times over.</a:t>
-            </a:r>
-          </a:p>
-          <a:p>
-            <a:endParaRPr lang="en-US" dirty="0"/>
-          </a:p>
-          <a:p>
-            <a:r>
-              <a:rPr lang="en-US" dirty="0"/>
-              <a:t>Finally, Trousers and Skirts are the opposite, they represent 16% of inventory and 11% of revenue but have a never-rented rate of 35.8%.</a:t>
-            </a:r>
-          </a:p>
-          <a:p>
             <a:endParaRPr lang="en-US" dirty="0"/>
           </a:p>
         </p:txBody>
@@ -6873,110 +6590,7 @@
           <a:bodyPr/>
           <a:lstStyle/>
           <a:p>
-            <a:r>
-              <a:rPr lang="en-US" dirty="0"/>
-              <a:t>We then dove into the customer affinity analysis, and we asked ourselves: “do loyal customers (so customers which last rental was within 180 days) and at-risk customers (customers which last rental was more than 365 days) rent different </a:t>
-            </a:r>
-            <a:r>
-              <a:rPr lang="en-US" i="1" dirty="0"/>
-              <a:t>types</a:t>
-            </a:r>
-            <a:r>
-              <a:rPr lang="en-US" dirty="0"/>
-              <a:t> of things?”</a:t>
-            </a:r>
-          </a:p>
-          <a:p>
             <a:endParaRPr lang="en-US" dirty="0"/>
-          </a:p>
-          <a:p>
-            <a:r>
-              <a:rPr lang="en-US" dirty="0"/>
-              <a:t>The answer is yes, but not in the way we’d expect.</a:t>
-            </a:r>
-          </a:p>
-          <a:p>
-            <a:endParaRPr lang="en-US" dirty="0"/>
-          </a:p>
-          <a:p>
-            <a:r>
-              <a:rPr lang="en-US" dirty="0"/>
-              <a:t>Looking at the chart. Loyal customers and Dormant customers (customers which last rental was within 181 and 364 days), the green bars, look almost identical. Both spread their spending broadly: about 39% on dresses, 16% jackets, 15% tops, 13% knitwear. </a:t>
-            </a:r>
-          </a:p>
-          <a:p>
-            <a:r>
-              <a:rPr lang="en-US" dirty="0"/>
-              <a:t>Five or more categories.</a:t>
-            </a:r>
-          </a:p>
-          <a:p>
-            <a:endParaRPr lang="en-US" dirty="0"/>
-          </a:p>
-          <a:p>
-            <a:r>
-              <a:rPr lang="en-US" dirty="0"/>
-              <a:t>Now look at the grey bars, At-Risk customers. 79% of their spending goes to a single category. Dresses. Everything else barely registers.</a:t>
-            </a:r>
-          </a:p>
-          <a:p>
-            <a:endParaRPr lang="en-US" dirty="0"/>
-          </a:p>
-          <a:p>
-            <a:r>
-              <a:rPr lang="en-US" dirty="0"/>
-              <a:t>What this tells you is that At-Risk users come to </a:t>
-            </a:r>
-            <a:r>
-              <a:rPr lang="en-US" dirty="0" err="1"/>
-              <a:t>Vibrent</a:t>
-            </a:r>
-            <a:r>
-              <a:rPr lang="en-US" dirty="0"/>
-              <a:t> for a specific occasion, a wedding, a gala, to solve their specific need, and then they're gone. They were never really subscribers. They were one-time event renters.</a:t>
-            </a:r>
-          </a:p>
-          <a:p>
-            <a:endParaRPr lang="en-US" dirty="0"/>
-          </a:p>
-          <a:p>
-            <a:r>
-              <a:rPr lang="en-US" dirty="0"/>
-              <a:t>So loyalty isn't about </a:t>
-            </a:r>
-            <a:r>
-              <a:rPr lang="en-US" i="1" dirty="0"/>
-              <a:t>what</a:t>
-            </a:r>
-            <a:r>
-              <a:rPr lang="en-US" dirty="0"/>
-              <a:t> you rent. It's about </a:t>
-            </a:r>
-            <a:r>
-              <a:rPr lang="en-US" i="1" dirty="0"/>
-              <a:t>how broadly</a:t>
-            </a:r>
-            <a:r>
-              <a:rPr lang="en-US" dirty="0"/>
-              <a:t> you rent. A customer who engages across multiple categories has integrated </a:t>
-            </a:r>
-            <a:r>
-              <a:rPr lang="en-US" dirty="0" err="1"/>
-              <a:t>Vibrent</a:t>
-            </a:r>
-            <a:r>
-              <a:rPr lang="en-US" dirty="0"/>
-              <a:t> into their regular wardrobe. A customer stuck in one category hasn’t.</a:t>
-            </a:r>
-          </a:p>
-          <a:p>
-            <a:endParaRPr lang="en-US" dirty="0"/>
-          </a:p>
-          <a:p>
-            <a:r>
-              <a:rPr lang="en-US" dirty="0"/>
-              <a:t>We formalized this as Style Entropy, the Shannon entropy across a customer's cluster affinity shares. High entropy means broad engagement, low entropy means occasion-driven risk. And this turned out to be one of the best early-warning signals for churn.</a:t>
-            </a:r>
           </a:p>
         </p:txBody>
       </p:sp>
@@ -7084,46 +6698,6 @@
           <a:bodyPr/>
           <a:lstStyle/>
           <a:p>
-            <a:r>
-              <a:rPr lang="de-DE" dirty="0"/>
-              <a:t>Start with a </a:t>
-            </a:r>
-            <a:r>
-              <a:rPr lang="de-DE" dirty="0" err="1"/>
-              <a:t>baseline</a:t>
-            </a:r>
-            <a:endParaRPr lang="de-DE" dirty="0"/>
-          </a:p>
-          <a:p>
-            <a:r>
-              <a:rPr lang="en-US" dirty="0"/>
-              <a:t>We tried RFM with Ridge Regression and </a:t>
-            </a:r>
-            <a:r>
-              <a:rPr lang="en-US" dirty="0" err="1"/>
-              <a:t>LightGBM</a:t>
-            </a:r>
-            <a:r>
-              <a:rPr lang="en-US" dirty="0"/>
-              <a:t> afterwards and compared with </a:t>
-            </a:r>
-            <a:r>
-              <a:rPr lang="en-US" dirty="0" err="1"/>
-              <a:t>CLVTools</a:t>
-            </a:r>
-            <a:r>
-              <a:rPr lang="en-US" dirty="0"/>
-              <a:t> outcome. And it appears that the Pareto NBD model is a good baseline and the other two can simply handle churn.</a:t>
-            </a:r>
-          </a:p>
-          <a:p>
-            <a:endParaRPr lang="en-US" dirty="0"/>
-          </a:p>
-          <a:p>
-            <a:r>
-              <a:rPr lang="en-US" dirty="0"/>
-              <a:t>But I realized a problem yesterday….not trained on same dataset</a:t>
-            </a:r>
             <a:endParaRPr lang="de-DE" dirty="0"/>
           </a:p>
         </p:txBody>
@@ -7232,105 +6806,7 @@
           <a:bodyPr/>
           <a:lstStyle/>
           <a:p>
-            <a:r>
-              <a:rPr lang="en-US" dirty="0"/>
-              <a:t>Different picture…</a:t>
-            </a:r>
-            <a:r>
-              <a:rPr lang="en-US" dirty="0" err="1"/>
-              <a:t>LigthGBM</a:t>
-            </a:r>
-            <a:r>
-              <a:rPr lang="en-US" dirty="0"/>
-              <a:t> already better than </a:t>
-            </a:r>
-            <a:r>
-              <a:rPr lang="en-US" dirty="0" err="1"/>
-              <a:t>CLVTools</a:t>
-            </a:r>
-            <a:r>
-              <a:rPr lang="en-US" dirty="0"/>
-              <a:t> on just 3 features with MAE 2500NOK…and the storyline for the presentation changed a bit.</a:t>
-            </a:r>
-          </a:p>
-          <a:p>
             <a:endParaRPr lang="en-US" dirty="0"/>
-          </a:p>
-          <a:p>
-            <a:r>
-              <a:rPr lang="en-US" dirty="0"/>
-              <a:t>Ridge Regression comes in last again. It assumes a linear relationship between past spending and future revenue — which means it sees a high-spending customer and simply projects that forward, with no concept that they might have already left. It's the wrong tool for this problem structurally.</a:t>
-            </a:r>
-          </a:p>
-          <a:p>
-            <a:endParaRPr lang="en-US" dirty="0"/>
-          </a:p>
-          <a:p>
-            <a:r>
-              <a:rPr lang="en-US" dirty="0"/>
-              <a:t>The Pareto/NBD is more interesting. It was specifically designed for subscription-style businesses — it jointly models whether a customer is still active and how often they buy. It's the industry standard for a reason. And yet, a general-purpose </a:t>
-            </a:r>
-            <a:r>
-              <a:rPr lang="en-US" dirty="0" err="1"/>
-              <a:t>LightGBM</a:t>
-            </a:r>
-            <a:r>
-              <a:rPr lang="en-US" dirty="0"/>
-              <a:t> with nothing but basic RFM features already beats it by 32%.</a:t>
-            </a:r>
-          </a:p>
-          <a:p>
-            <a:endParaRPr lang="en-US" dirty="0"/>
-          </a:p>
-          <a:p>
-            <a:r>
-              <a:rPr lang="en-US" dirty="0"/>
-              <a:t>Why it is already such a big gap…I honestly do not know since I thought the </a:t>
-            </a:r>
-            <a:r>
-              <a:rPr lang="en-US" dirty="0" err="1"/>
-              <a:t>CLVTools</a:t>
-            </a:r>
-            <a:r>
-              <a:rPr lang="en-US" dirty="0"/>
-              <a:t> baseline is already pretty competitive…maybe I made a mistake when running the code. </a:t>
-            </a:r>
-          </a:p>
-          <a:p>
-            <a:endParaRPr lang="en-US" dirty="0"/>
-          </a:p>
-          <a:p>
-            <a:r>
-              <a:rPr lang="en-US" dirty="0"/>
-              <a:t>So but </a:t>
-            </a:r>
-            <a:r>
-              <a:rPr lang="en-US" dirty="0" err="1"/>
-              <a:t>LightGBM</a:t>
-            </a:r>
-            <a:r>
-              <a:rPr lang="en-US" dirty="0"/>
-              <a:t> is actually an encouraging result. We haven't done any of the serious work yet — no product features, no Tweedie objective, no hybrid architecture — and we're already ahead of the benchmark. This chart is our starting point, not our destination.</a:t>
-            </a:r>
-          </a:p>
-          <a:p>
-            <a:r>
-              <a:rPr lang="en-US" dirty="0" err="1"/>
-              <a:t>LightGBM</a:t>
-            </a:r>
-            <a:r>
-              <a:rPr lang="en-US" dirty="0"/>
-              <a:t> with its tree structure was apparently able to properly interpret recency</a:t>
-            </a:r>
-          </a:p>
-          <a:p>
-            <a:endParaRPr lang="en-US" dirty="0"/>
-          </a:p>
-          <a:p>
-            <a:r>
-              <a:rPr lang="en-US" dirty="0"/>
-              <a:t>The question then becomes: how much further can we push it? And that's where the real modeling decisions begin.</a:t>
-            </a:r>
           </a:p>
         </p:txBody>
       </p:sp>
@@ -7420,514 +6896,7 @@
           <a:bodyPr/>
           <a:lstStyle/>
           <a:p>
-            <a:r>
-              <a:rPr lang="de-DE" dirty="0"/>
-              <a:t>Wanna </a:t>
-            </a:r>
-            <a:r>
-              <a:rPr lang="de-DE" dirty="0" err="1"/>
-              <a:t>give</a:t>
-            </a:r>
-            <a:r>
-              <a:rPr lang="de-DE" dirty="0"/>
-              <a:t> </a:t>
-            </a:r>
-            <a:r>
-              <a:rPr lang="de-DE" dirty="0" err="1"/>
-              <a:t>you</a:t>
-            </a:r>
-            <a:r>
-              <a:rPr lang="de-DE" dirty="0"/>
-              <a:t> </a:t>
-            </a:r>
-            <a:r>
-              <a:rPr lang="de-DE" dirty="0" err="1"/>
-              <a:t>some</a:t>
-            </a:r>
-            <a:r>
-              <a:rPr lang="de-DE" dirty="0"/>
-              <a:t> </a:t>
-            </a:r>
-            <a:r>
-              <a:rPr lang="de-DE" dirty="0" err="1"/>
-              <a:t>insights</a:t>
-            </a:r>
-            <a:r>
-              <a:rPr lang="de-DE" dirty="0"/>
-              <a:t> on </a:t>
-            </a:r>
-            <a:r>
-              <a:rPr lang="de-DE" dirty="0" err="1"/>
-              <a:t>our</a:t>
-            </a:r>
-            <a:r>
-              <a:rPr lang="de-DE" dirty="0"/>
-              <a:t> </a:t>
-            </a:r>
-            <a:r>
-              <a:rPr lang="de-DE" dirty="0" err="1"/>
-              <a:t>modeling</a:t>
-            </a:r>
-            <a:r>
-              <a:rPr lang="de-DE" dirty="0"/>
-              <a:t> </a:t>
-            </a:r>
-            <a:r>
-              <a:rPr lang="de-DE" dirty="0" err="1"/>
-              <a:t>journey</a:t>
-            </a:r>
-            <a:r>
-              <a:rPr lang="de-DE" dirty="0"/>
-              <a:t>.</a:t>
-            </a:r>
-          </a:p>
-          <a:p>
-            <a:r>
-              <a:rPr lang="de-DE" dirty="0" err="1"/>
-              <a:t>We</a:t>
-            </a:r>
-            <a:r>
-              <a:rPr lang="de-DE" dirty="0"/>
-              <a:t> </a:t>
-            </a:r>
-            <a:r>
-              <a:rPr lang="de-DE" dirty="0" err="1"/>
-              <a:t>had</a:t>
-            </a:r>
-            <a:r>
-              <a:rPr lang="de-DE" dirty="0"/>
-              <a:t> a </a:t>
-            </a:r>
-            <a:r>
-              <a:rPr lang="de-DE" dirty="0" err="1"/>
-              <a:t>couple</a:t>
-            </a:r>
-            <a:r>
-              <a:rPr lang="de-DE" dirty="0"/>
-              <a:t> </a:t>
-            </a:r>
-            <a:r>
-              <a:rPr lang="de-DE" dirty="0" err="1"/>
-              <a:t>more</a:t>
-            </a:r>
-            <a:r>
-              <a:rPr lang="de-DE" dirty="0"/>
-              <a:t> </a:t>
-            </a:r>
-            <a:r>
-              <a:rPr lang="de-DE" dirty="0" err="1"/>
-              <a:t>iterations</a:t>
-            </a:r>
-            <a:r>
-              <a:rPr lang="de-DE" dirty="0"/>
-              <a:t> with </a:t>
-            </a:r>
-            <a:r>
-              <a:rPr lang="de-DE" dirty="0" err="1"/>
-              <a:t>many</a:t>
-            </a:r>
-            <a:r>
-              <a:rPr lang="de-DE" dirty="0"/>
-              <a:t> </a:t>
-            </a:r>
-            <a:r>
-              <a:rPr lang="de-DE" dirty="0" err="1"/>
-              <a:t>more</a:t>
-            </a:r>
-            <a:r>
-              <a:rPr lang="de-DE" dirty="0"/>
-              <a:t> </a:t>
-            </a:r>
-            <a:r>
-              <a:rPr lang="de-DE" dirty="0" err="1"/>
-              <a:t>things</a:t>
-            </a:r>
-            <a:r>
-              <a:rPr lang="de-DE" dirty="0"/>
-              <a:t> </a:t>
-            </a:r>
-            <a:r>
-              <a:rPr lang="de-DE" dirty="0" err="1"/>
-              <a:t>tried</a:t>
-            </a:r>
-            <a:r>
-              <a:rPr lang="de-DE" dirty="0"/>
-              <a:t> with </a:t>
-            </a:r>
-            <a:r>
-              <a:rPr lang="de-DE" dirty="0" err="1"/>
-              <a:t>the</a:t>
-            </a:r>
-            <a:r>
-              <a:rPr lang="de-DE" dirty="0"/>
-              <a:t> </a:t>
-            </a:r>
-            <a:r>
-              <a:rPr lang="de-DE" dirty="0" err="1"/>
-              <a:t>model</a:t>
-            </a:r>
-            <a:r>
-              <a:rPr lang="de-DE" dirty="0"/>
-              <a:t> and </a:t>
-            </a:r>
-            <a:r>
-              <a:rPr lang="de-DE" dirty="0" err="1"/>
-              <a:t>data</a:t>
-            </a:r>
-            <a:r>
-              <a:rPr lang="de-DE" dirty="0"/>
-              <a:t> a </a:t>
-            </a:r>
-            <a:r>
-              <a:rPr lang="de-DE" dirty="0" err="1"/>
-              <a:t>lot</a:t>
-            </a:r>
-            <a:r>
-              <a:rPr lang="de-DE" dirty="0"/>
-              <a:t> did not </a:t>
-            </a:r>
-            <a:r>
-              <a:rPr lang="de-DE" dirty="0" err="1"/>
-              <a:t>work</a:t>
-            </a:r>
-            <a:r>
-              <a:rPr lang="de-DE" dirty="0"/>
-              <a:t> like log </a:t>
-            </a:r>
-            <a:r>
-              <a:rPr lang="de-DE" dirty="0" err="1"/>
-              <a:t>transformation</a:t>
-            </a:r>
-            <a:r>
-              <a:rPr lang="de-DE" dirty="0"/>
-              <a:t> </a:t>
-            </a:r>
-            <a:r>
-              <a:rPr lang="de-DE" dirty="0" err="1"/>
-              <a:t>or</a:t>
-            </a:r>
-            <a:r>
-              <a:rPr lang="de-DE" dirty="0"/>
-              <a:t> </a:t>
-            </a:r>
-            <a:r>
-              <a:rPr lang="de-DE" dirty="0" err="1"/>
-              <a:t>standardization</a:t>
-            </a:r>
-            <a:r>
-              <a:rPr lang="de-DE" dirty="0"/>
-              <a:t> </a:t>
-            </a:r>
-            <a:r>
-              <a:rPr lang="de-DE" dirty="0" err="1"/>
-              <a:t>of</a:t>
-            </a:r>
-            <a:r>
-              <a:rPr lang="de-DE" dirty="0"/>
-              <a:t> </a:t>
-            </a:r>
-            <a:r>
-              <a:rPr lang="de-DE" dirty="0" err="1"/>
-              <a:t>the</a:t>
-            </a:r>
-            <a:r>
-              <a:rPr lang="de-DE" dirty="0"/>
-              <a:t> </a:t>
-            </a:r>
-            <a:r>
-              <a:rPr lang="de-DE" dirty="0" err="1"/>
-              <a:t>dependent</a:t>
-            </a:r>
-            <a:r>
-              <a:rPr lang="de-DE" dirty="0"/>
-              <a:t> variable but </a:t>
-            </a:r>
-            <a:r>
-              <a:rPr lang="de-DE" dirty="0" err="1"/>
-              <a:t>here</a:t>
-            </a:r>
-            <a:r>
-              <a:rPr lang="de-DE" dirty="0"/>
-              <a:t> </a:t>
-            </a:r>
-            <a:r>
-              <a:rPr lang="de-DE" dirty="0" err="1"/>
-              <a:t>are</a:t>
-            </a:r>
-            <a:r>
-              <a:rPr lang="de-DE" dirty="0"/>
-              <a:t> </a:t>
-            </a:r>
-            <a:r>
-              <a:rPr lang="de-DE" dirty="0" err="1"/>
-              <a:t>the</a:t>
-            </a:r>
-            <a:r>
-              <a:rPr lang="de-DE" dirty="0"/>
-              <a:t> </a:t>
-            </a:r>
-            <a:r>
-              <a:rPr lang="de-DE" dirty="0" err="1"/>
-              <a:t>most</a:t>
-            </a:r>
-            <a:r>
-              <a:rPr lang="de-DE" dirty="0"/>
-              <a:t> </a:t>
-            </a:r>
-            <a:r>
-              <a:rPr lang="de-DE" dirty="0" err="1"/>
-              <a:t>important</a:t>
-            </a:r>
-            <a:r>
-              <a:rPr lang="de-DE" dirty="0"/>
-              <a:t> </a:t>
-            </a:r>
-            <a:r>
-              <a:rPr lang="de-DE" dirty="0" err="1"/>
-              <a:t>ones</a:t>
-            </a:r>
-            <a:endParaRPr lang="de-DE" dirty="0"/>
-          </a:p>
-          <a:p>
-            <a:endParaRPr lang="de-DE" dirty="0"/>
-          </a:p>
-          <a:p>
-            <a:r>
-              <a:rPr lang="de-DE" dirty="0"/>
-              <a:t>First </a:t>
-            </a:r>
-            <a:r>
-              <a:rPr lang="de-DE" dirty="0" err="1"/>
-              <a:t>thing</a:t>
-            </a:r>
-            <a:r>
-              <a:rPr lang="de-DE" dirty="0"/>
-              <a:t> </a:t>
-            </a:r>
-            <a:r>
-              <a:rPr lang="de-DE" dirty="0" err="1"/>
-              <a:t>we</a:t>
-            </a:r>
-            <a:r>
-              <a:rPr lang="de-DE" dirty="0"/>
-              <a:t> did </a:t>
-            </a:r>
-            <a:r>
-              <a:rPr lang="de-DE" dirty="0" err="1"/>
-              <a:t>where</a:t>
-            </a:r>
-            <a:r>
-              <a:rPr lang="de-DE" dirty="0"/>
-              <a:t> </a:t>
-            </a:r>
-            <a:r>
-              <a:rPr lang="de-DE" dirty="0" err="1"/>
-              <a:t>we</a:t>
-            </a:r>
-            <a:r>
-              <a:rPr lang="de-DE" dirty="0"/>
-              <a:t> </a:t>
-            </a:r>
-            <a:r>
-              <a:rPr lang="de-DE" dirty="0" err="1"/>
-              <a:t>thought</a:t>
-            </a:r>
-            <a:r>
-              <a:rPr lang="de-DE" dirty="0"/>
-              <a:t> </a:t>
-            </a:r>
-            <a:r>
-              <a:rPr lang="de-DE" dirty="0" err="1"/>
-              <a:t>it</a:t>
-            </a:r>
-            <a:r>
-              <a:rPr lang="de-DE" dirty="0"/>
-              <a:t> </a:t>
-            </a:r>
-            <a:r>
-              <a:rPr lang="de-DE" dirty="0" err="1"/>
-              <a:t>could</a:t>
-            </a:r>
-            <a:r>
-              <a:rPr lang="de-DE" dirty="0"/>
-              <a:t> </a:t>
-            </a:r>
-            <a:r>
-              <a:rPr lang="de-DE" dirty="0" err="1"/>
-              <a:t>increase</a:t>
-            </a:r>
-            <a:r>
-              <a:rPr lang="de-DE" dirty="0"/>
-              <a:t> </a:t>
-            </a:r>
-            <a:r>
-              <a:rPr lang="de-DE" dirty="0" err="1"/>
-              <a:t>performance</a:t>
-            </a:r>
-            <a:r>
-              <a:rPr lang="de-DE" dirty="0"/>
-              <a:t> </a:t>
-            </a:r>
-            <a:r>
-              <a:rPr lang="de-DE" dirty="0" err="1"/>
-              <a:t>is</a:t>
-            </a:r>
-            <a:r>
-              <a:rPr lang="de-DE" dirty="0"/>
-              <a:t> </a:t>
-            </a:r>
-            <a:r>
-              <a:rPr lang="de-DE" dirty="0" err="1"/>
-              <a:t>adding</a:t>
-            </a:r>
-            <a:r>
-              <a:rPr lang="de-DE" dirty="0"/>
-              <a:t> </a:t>
-            </a:r>
-            <a:r>
-              <a:rPr lang="de-DE" dirty="0" err="1"/>
-              <a:t>features</a:t>
-            </a:r>
-            <a:r>
-              <a:rPr lang="de-DE" dirty="0"/>
-              <a:t> so </a:t>
-            </a:r>
-            <a:r>
-              <a:rPr lang="de-DE" dirty="0" err="1"/>
-              <a:t>we</a:t>
-            </a:r>
-            <a:r>
-              <a:rPr lang="de-DE" dirty="0"/>
-              <a:t> </a:t>
-            </a:r>
-            <a:r>
-              <a:rPr lang="de-DE" dirty="0" err="1"/>
-              <a:t>engineered</a:t>
-            </a:r>
-            <a:r>
-              <a:rPr lang="de-DE" dirty="0"/>
-              <a:t> 36 </a:t>
-            </a:r>
-            <a:r>
-              <a:rPr lang="de-DE" dirty="0" err="1"/>
-              <a:t>features</a:t>
-            </a:r>
-            <a:r>
-              <a:rPr lang="de-DE" dirty="0"/>
-              <a:t> in total but </a:t>
-            </a:r>
-            <a:r>
-              <a:rPr lang="de-DE" dirty="0" err="1"/>
-              <a:t>it</a:t>
-            </a:r>
-            <a:r>
-              <a:rPr lang="de-DE" dirty="0"/>
-              <a:t> </a:t>
-            </a:r>
-            <a:r>
-              <a:rPr lang="de-DE" dirty="0" err="1"/>
-              <a:t>actually</a:t>
-            </a:r>
-            <a:r>
-              <a:rPr lang="de-DE" dirty="0"/>
-              <a:t> hurt </a:t>
-            </a:r>
-            <a:r>
-              <a:rPr lang="de-DE" dirty="0" err="1"/>
-              <a:t>the</a:t>
-            </a:r>
-            <a:r>
-              <a:rPr lang="de-DE" dirty="0"/>
-              <a:t> </a:t>
-            </a:r>
-            <a:r>
-              <a:rPr lang="de-DE" dirty="0" err="1"/>
-              <a:t>model</a:t>
-            </a:r>
-            <a:r>
-              <a:rPr lang="de-DE" dirty="0"/>
-              <a:t> and </a:t>
-            </a:r>
-            <a:r>
-              <a:rPr lang="de-DE" dirty="0" err="1"/>
-              <a:t>the</a:t>
-            </a:r>
-            <a:r>
-              <a:rPr lang="de-DE" dirty="0"/>
-              <a:t> MAE </a:t>
-            </a:r>
-            <a:r>
-              <a:rPr lang="de-DE" dirty="0" err="1"/>
-              <a:t>increased</a:t>
-            </a:r>
-            <a:r>
-              <a:rPr lang="de-DE" dirty="0"/>
-              <a:t>…but </a:t>
-            </a:r>
-            <a:r>
-              <a:rPr lang="de-DE" dirty="0" err="1"/>
-              <a:t>we</a:t>
-            </a:r>
-            <a:r>
-              <a:rPr lang="de-DE" dirty="0"/>
-              <a:t> </a:t>
-            </a:r>
-            <a:r>
-              <a:rPr lang="de-DE" dirty="0" err="1"/>
-              <a:t>are</a:t>
-            </a:r>
-            <a:r>
-              <a:rPr lang="de-DE" dirty="0"/>
-              <a:t> still </a:t>
-            </a:r>
-            <a:r>
-              <a:rPr lang="de-DE" dirty="0" err="1"/>
-              <a:t>better</a:t>
-            </a:r>
-            <a:r>
-              <a:rPr lang="de-DE" dirty="0"/>
-              <a:t> than </a:t>
-            </a:r>
-            <a:r>
-              <a:rPr lang="de-DE" dirty="0" err="1"/>
-              <a:t>the</a:t>
-            </a:r>
-            <a:r>
-              <a:rPr lang="de-DE" dirty="0"/>
-              <a:t> </a:t>
-            </a:r>
-            <a:r>
-              <a:rPr lang="de-DE" dirty="0" err="1"/>
-              <a:t>CLVTools</a:t>
-            </a:r>
-            <a:endParaRPr lang="de-DE" dirty="0"/>
-          </a:p>
-          <a:p>
-            <a:endParaRPr lang="de-DE" dirty="0"/>
-          </a:p>
-          <a:p>
-            <a:r>
-              <a:rPr lang="en-US" dirty="0"/>
-              <a:t>Secondly I guess everyone of us realized the same problem when testing around 90% of customers generate exactly zero revenue in the prediction window. Standard regression objectives weren’t built for that — most assume a roughly normal error distribution.  By accident I came across the Tweedie objective was designed precisely for zero-inflated, right-skewed data like this.</a:t>
-            </a:r>
-          </a:p>
-          <a:p>
             <a:endParaRPr lang="en-US" dirty="0"/>
-          </a:p>
-          <a:p>
-            <a:r>
-              <a:rPr lang="en-US" dirty="0"/>
-              <a:t>Second problem: our full feature set had 36 variables, many of them redundant. Sequential Forward Selection pruned that down to 18, and performance improved — less noise, cleaner signal.</a:t>
-            </a:r>
-          </a:p>
-          <a:p>
-            <a:endParaRPr lang="en-US" dirty="0"/>
-          </a:p>
-          <a:p>
-            <a:r>
-              <a:rPr lang="en-US" dirty="0"/>
-              <a:t>Third problem: even a well-calibrated model still over-predicts for customers who have quietly stopped renting. That's the latent attrition problem Constantin introduced earlier. The hybrid architecture is our answer to that.</a:t>
-            </a:r>
           </a:p>
         </p:txBody>
       </p:sp>
@@ -8427,7 +7396,7 @@
           <a:p>
             <a:fld id="{C47C2547-0B26-4181-9958-0F74634B97A1}" type="datetime1">
               <a:rPr lang="de-CH" noProof="0" smtClean="0"/>
-              <a:t>29.04.2026</a:t>
+              <a:t>30.04.2026</a:t>
             </a:fld>
             <a:endParaRPr lang="de-CH" noProof="0"/>
           </a:p>
@@ -8485,7 +7454,7 @@
           <a:p>
             <a:fld id="{5ACA52AF-F19D-405C-AD5F-7D94B96A5CC3}" type="slidenum">
               <a:rPr lang="de-CH" noProof="0" smtClean="0"/>
-              <a:t>‹#›</a:t>
+              <a:t>‹Nr.›</a:t>
             </a:fld>
             <a:endParaRPr lang="de-CH" noProof="0"/>
           </a:p>
@@ -8622,7 +7591,7 @@
           <a:p>
             <a:fld id="{4A533879-9C0F-4F94-919F-30B833E8871A}" type="datetime1">
               <a:rPr lang="de-CH" noProof="0" smtClean="0"/>
-              <a:t>29.04.2026</a:t>
+              <a:t>30.04.2026</a:t>
             </a:fld>
             <a:endParaRPr lang="de-CH" noProof="0"/>
           </a:p>
@@ -8680,7 +7649,7 @@
           <a:p>
             <a:fld id="{5ACA52AF-F19D-405C-AD5F-7D94B96A5CC3}" type="slidenum">
               <a:rPr lang="de-CH" noProof="0" smtClean="0"/>
-              <a:t>‹#›</a:t>
+              <a:t>‹Nr.›</a:t>
             </a:fld>
             <a:endParaRPr lang="de-CH" noProof="0"/>
           </a:p>
@@ -8909,7 +7878,7 @@
           <a:p>
             <a:fld id="{68EF82BE-DF56-4719-B180-C3B0D509F71F}" type="datetime1">
               <a:rPr lang="de-CH" noProof="0" smtClean="0"/>
-              <a:t>29.04.2026</a:t>
+              <a:t>30.04.2026</a:t>
             </a:fld>
             <a:endParaRPr lang="de-CH" noProof="0"/>
           </a:p>
@@ -8967,7 +7936,7 @@
           <a:p>
             <a:fld id="{5ACA52AF-F19D-405C-AD5F-7D94B96A5CC3}" type="slidenum">
               <a:rPr lang="de-CH" noProof="0" smtClean="0"/>
-              <a:t>‹#›</a:t>
+              <a:t>‹Nr.›</a:t>
             </a:fld>
             <a:endParaRPr lang="de-CH" noProof="0"/>
           </a:p>
@@ -9207,7 +8176,7 @@
           <a:p>
             <a:fld id="{3E1B9425-7348-43E2-B0E9-6A2A48F5FA8A}" type="datetime1">
               <a:rPr lang="de-CH" noProof="0" smtClean="0"/>
-              <a:t>29.04.2026</a:t>
+              <a:t>30.04.2026</a:t>
             </a:fld>
             <a:endParaRPr lang="de-CH" noProof="0"/>
           </a:p>
@@ -9265,7 +8234,7 @@
           <a:p>
             <a:fld id="{5ACA52AF-F19D-405C-AD5F-7D94B96A5CC3}" type="slidenum">
               <a:rPr lang="de-CH" noProof="0" smtClean="0"/>
-              <a:t>‹#›</a:t>
+              <a:t>‹Nr.›</a:t>
             </a:fld>
             <a:endParaRPr lang="de-CH" noProof="0"/>
           </a:p>
@@ -9607,7 +8576,7 @@
           <a:p>
             <a:fld id="{0F7782B2-018B-4FD3-AD95-2F64EDE0E9D6}" type="datetime1">
               <a:rPr lang="de-CH" noProof="0" smtClean="0"/>
-              <a:t>29.04.2026</a:t>
+              <a:t>30.04.2026</a:t>
             </a:fld>
             <a:endParaRPr lang="de-CH" noProof="0"/>
           </a:p>
@@ -9665,7 +8634,7 @@
           <a:p>
             <a:fld id="{5ACA52AF-F19D-405C-AD5F-7D94B96A5CC3}" type="slidenum">
               <a:rPr lang="de-CH" noProof="0" smtClean="0"/>
-              <a:t>‹#›</a:t>
+              <a:t>‹Nr.›</a:t>
             </a:fld>
             <a:endParaRPr lang="de-CH" noProof="0"/>
           </a:p>
@@ -9975,7 +8944,7 @@
           <a:p>
             <a:fld id="{D0A0FED0-443D-411A-B8E4-0668A8890EE3}" type="datetime1">
               <a:rPr lang="de-CH" noProof="0" smtClean="0"/>
-              <a:t>29.04.2026</a:t>
+              <a:t>30.04.2026</a:t>
             </a:fld>
             <a:endParaRPr lang="de-CH" noProof="0"/>
           </a:p>
@@ -10033,7 +9002,7 @@
           <a:p>
             <a:fld id="{5ACA52AF-F19D-405C-AD5F-7D94B96A5CC3}" type="slidenum">
               <a:rPr lang="de-CH" noProof="0" smtClean="0"/>
-              <a:t>‹#›</a:t>
+              <a:t>‹Nr.›</a:t>
             </a:fld>
             <a:endParaRPr lang="de-CH" noProof="0"/>
           </a:p>
@@ -12004,7 +10973,7 @@
           <a:p>
             <a:fld id="{1332D50A-E6CC-4D88-8908-F2129032F4C7}" type="datetime1">
               <a:rPr lang="de-CH" noProof="0" smtClean="0"/>
-              <a:t>29.04.2026</a:t>
+              <a:t>30.04.2026</a:t>
             </a:fld>
             <a:endParaRPr lang="de-CH" noProof="0"/>
           </a:p>
@@ -12062,7 +11031,7 @@
           <a:p>
             <a:fld id="{5ACA52AF-F19D-405C-AD5F-7D94B96A5CC3}" type="slidenum">
               <a:rPr lang="de-CH" noProof="0" smtClean="0"/>
-              <a:t>‹#›</a:t>
+              <a:t>‹Nr.›</a:t>
             </a:fld>
             <a:endParaRPr lang="de-CH" noProof="0"/>
           </a:p>
@@ -12247,7 +11216,7 @@
           <a:p>
             <a:fld id="{11B96697-4585-4368-989A-16003D150648}" type="datetime1">
               <a:rPr lang="de-CH" noProof="0" smtClean="0"/>
-              <a:t>29.04.2026</a:t>
+              <a:t>30.04.2026</a:t>
             </a:fld>
             <a:endParaRPr lang="de-CH" noProof="0"/>
           </a:p>
@@ -12305,7 +11274,7 @@
           <a:p>
             <a:fld id="{5ACA52AF-F19D-405C-AD5F-7D94B96A5CC3}" type="slidenum">
               <a:rPr lang="de-CH" noProof="0" smtClean="0"/>
-              <a:t>‹#›</a:t>
+              <a:t>‹Nr.›</a:t>
             </a:fld>
             <a:endParaRPr lang="de-CH" noProof="0"/>
           </a:p>
@@ -12495,7 +11464,7 @@
           <a:p>
             <a:fld id="{3A01E762-278A-4155-9BEB-7C2CB2386E92}" type="datetime1">
               <a:rPr lang="de-CH" noProof="0" smtClean="0"/>
-              <a:t>29.04.2026</a:t>
+              <a:t>30.04.2026</a:t>
             </a:fld>
             <a:endParaRPr lang="de-CH" noProof="0"/>
           </a:p>
@@ -12553,7 +11522,7 @@
           <a:p>
             <a:fld id="{5ACA52AF-F19D-405C-AD5F-7D94B96A5CC3}" type="slidenum">
               <a:rPr lang="de-CH" noProof="0" smtClean="0"/>
-              <a:t>‹#›</a:t>
+              <a:t>‹Nr.›</a:t>
             </a:fld>
             <a:endParaRPr lang="de-CH" noProof="0"/>
           </a:p>
@@ -12771,7 +11740,7 @@
           <a:p>
             <a:fld id="{6C4EAFE7-317E-4912-B75C-DD6945F82242}" type="datetime1">
               <a:rPr lang="de-CH" noProof="0" smtClean="0"/>
-              <a:t>29.04.2026</a:t>
+              <a:t>30.04.2026</a:t>
             </a:fld>
             <a:endParaRPr lang="de-CH" noProof="0"/>
           </a:p>
@@ -12846,7 +11815,7 @@
             <a:fld id="{5ACA52AF-F19D-405C-AD5F-7D94B96A5CC3}" type="slidenum">
               <a:rPr lang="de-CH" noProof="0" smtClean="0"/>
               <a:pPr/>
-              <a:t>‹#›</a:t>
+              <a:t>‹Nr.›</a:t>
             </a:fld>
             <a:endParaRPr lang="de-CH" noProof="0"/>
           </a:p>
@@ -14702,7 +13671,7 @@
           <a:p>
             <a:fld id="{4A358CF3-A22A-46C1-A4E5-5810212466EF}" type="datetime1">
               <a:rPr lang="de-CH" noProof="0" smtClean="0"/>
-              <a:t>29.04.2026</a:t>
+              <a:t>30.04.2026</a:t>
             </a:fld>
             <a:endParaRPr lang="de-CH" noProof="0"/>
           </a:p>
@@ -14789,7 +13758,7 @@
             <a:fld id="{5ACA52AF-F19D-405C-AD5F-7D94B96A5CC3}" type="slidenum">
               <a:rPr lang="de-CH" noProof="0" smtClean="0"/>
               <a:pPr/>
-              <a:t>‹#›</a:t>
+              <a:t>‹Nr.›</a:t>
             </a:fld>
             <a:endParaRPr lang="de-CH" noProof="0"/>
           </a:p>
@@ -15424,7 +14393,7 @@
         <p:cNvPr id="1" name="">
           <a:extLst>
             <a:ext uri="{FF2B5EF4-FFF2-40B4-BE49-F238E27FC236}">
-              <a16:creationId xmlns:a16="http://schemas.microsoft.com/office/drawing/2014/main" id="{BEE63B40-9D88-A698-342B-D4BF475EFCD5}"/>
+              <a16:creationId xmlns:a16="http://schemas.microsoft.com/office/drawing/2014/main" id="{E12DE977-7471-22F8-F77E-8935C6C9D17E}"/>
             </a:ext>
           </a:extLst>
         </p:cNvPr>
@@ -15444,7 +14413,7 @@
           <p:cNvPr id="2" name="Titel 1">
             <a:extLst>
               <a:ext uri="{FF2B5EF4-FFF2-40B4-BE49-F238E27FC236}">
-                <a16:creationId xmlns:a16="http://schemas.microsoft.com/office/drawing/2014/main" id="{976B756B-35C0-3FFD-A560-EC5A51C51C84}"/>
+                <a16:creationId xmlns:a16="http://schemas.microsoft.com/office/drawing/2014/main" id="{C5BB34BF-1AA8-BB58-94FE-86AD528B67E8}"/>
               </a:ext>
             </a:extLst>
           </p:cNvPr>
@@ -15473,7 +14442,7 @@
           <p:cNvPr id="4" name="Datumsplatzhalter 3">
             <a:extLst>
               <a:ext uri="{FF2B5EF4-FFF2-40B4-BE49-F238E27FC236}">
-                <a16:creationId xmlns:a16="http://schemas.microsoft.com/office/drawing/2014/main" id="{632D7C39-11CC-C55F-0198-7B9D102B865B}"/>
+                <a16:creationId xmlns:a16="http://schemas.microsoft.com/office/drawing/2014/main" id="{D780938C-1245-351F-95F8-BB2869E19CF7}"/>
               </a:ext>
             </a:extLst>
           </p:cNvPr>
@@ -15491,7 +14460,7 @@
           <a:p>
             <a:fld id="{11B96697-4585-4368-989A-16003D150648}" type="datetime1">
               <a:rPr lang="de-CH" noProof="0" smtClean="0"/>
-              <a:t>29.04.2026</a:t>
+              <a:t>30.04.2026</a:t>
             </a:fld>
             <a:endParaRPr lang="de-CH" noProof="0"/>
           </a:p>
@@ -15502,7 +14471,7 @@
           <p:cNvPr id="5" name="Fußzeilenplatzhalter 4">
             <a:extLst>
               <a:ext uri="{FF2B5EF4-FFF2-40B4-BE49-F238E27FC236}">
-                <a16:creationId xmlns:a16="http://schemas.microsoft.com/office/drawing/2014/main" id="{6EE2FA85-0A95-2924-3338-1C73798A4F52}"/>
+                <a16:creationId xmlns:a16="http://schemas.microsoft.com/office/drawing/2014/main" id="{9756A366-202E-B174-D387-92505F385B8D}"/>
               </a:ext>
             </a:extLst>
           </p:cNvPr>
@@ -15530,7 +14499,7 @@
           <p:cNvPr id="6" name="Foliennummernplatzhalter 5">
             <a:extLst>
               <a:ext uri="{FF2B5EF4-FFF2-40B4-BE49-F238E27FC236}">
-                <a16:creationId xmlns:a16="http://schemas.microsoft.com/office/drawing/2014/main" id="{91F371B2-FB30-D8D1-7475-8FF93F5EB58E}"/>
+                <a16:creationId xmlns:a16="http://schemas.microsoft.com/office/drawing/2014/main" id="{904AD687-A66C-F0AD-F240-F9F30CF54042}"/>
               </a:ext>
             </a:extLst>
           </p:cNvPr>
@@ -15559,7 +14528,7 @@
           <p:cNvPr id="9" name="Ellipse 8">
             <a:extLst>
               <a:ext uri="{FF2B5EF4-FFF2-40B4-BE49-F238E27FC236}">
-                <a16:creationId xmlns:a16="http://schemas.microsoft.com/office/drawing/2014/main" id="{F21A652C-EF5F-361C-1C3F-867324111F17}"/>
+                <a16:creationId xmlns:a16="http://schemas.microsoft.com/office/drawing/2014/main" id="{2765AAD7-65E4-2969-61B8-4EE25F8E2071}"/>
               </a:ext>
             </a:extLst>
           </p:cNvPr>
@@ -15570,8 +14539,8 @@
         </p:nvSpPr>
         <p:spPr>
           <a:xfrm>
-            <a:off x="302952" y="1692912"/>
-            <a:ext cx="975043" cy="975043"/>
+            <a:off x="207308" y="1817220"/>
+            <a:ext cx="755377" cy="755377"/>
           </a:xfrm>
           <a:prstGeom prst="ellipse">
             <a:avLst/>
@@ -15581,7 +14550,7 @@
           </a:solidFill>
           <a:ln>
             <a:solidFill>
-              <a:srgbClr val="215CAF"/>
+              <a:schemeClr val="tx1"/>
             </a:solidFill>
           </a:ln>
         </p:spPr>
@@ -15607,19 +14576,65 @@
           <a:p>
             <a:pPr algn="ctr"/>
             <a:r>
-              <a:rPr lang="de-DE" dirty="0"/>
+              <a:rPr lang="de-DE" sz="1200" dirty="0"/>
               <a:t>Start</a:t>
             </a:r>
-            <a:endParaRPr lang="en-US" dirty="0"/>
+            <a:endParaRPr lang="en-US" sz="1200" dirty="0"/>
           </a:p>
         </p:txBody>
       </p:sp>
+      <p:cxnSp>
+        <p:nvCxnSpPr>
+          <p:cNvPr id="18" name="Gerade Verbindung mit Pfeil 17">
+            <a:extLst>
+              <a:ext uri="{FF2B5EF4-FFF2-40B4-BE49-F238E27FC236}">
+                <a16:creationId xmlns:a16="http://schemas.microsoft.com/office/drawing/2014/main" id="{BDD632EC-C8A7-561A-6B55-22F252CA0CFA}"/>
+              </a:ext>
+            </a:extLst>
+          </p:cNvPr>
+          <p:cNvCxnSpPr>
+            <a:cxnSpLocks/>
+            <a:stCxn id="9" idx="6"/>
+            <a:endCxn id="7" idx="1"/>
+          </p:cNvCxnSpPr>
+          <p:nvPr/>
+        </p:nvCxnSpPr>
+        <p:spPr>
+          <a:xfrm>
+            <a:off x="962685" y="2194909"/>
+            <a:ext cx="415728" cy="1"/>
+          </a:xfrm>
+          <a:prstGeom prst="straightConnector1">
+            <a:avLst/>
+          </a:prstGeom>
+          <a:ln w="12700">
+            <a:solidFill>
+              <a:schemeClr val="tx1"/>
+            </a:solidFill>
+            <a:tailEnd type="triangle"/>
+          </a:ln>
+        </p:spPr>
+        <p:style>
+          <a:lnRef idx="1">
+            <a:schemeClr val="accent1"/>
+          </a:lnRef>
+          <a:fillRef idx="0">
+            <a:schemeClr val="accent1"/>
+          </a:fillRef>
+          <a:effectRef idx="0">
+            <a:schemeClr val="accent1"/>
+          </a:effectRef>
+          <a:fontRef idx="minor">
+            <a:schemeClr val="tx1"/>
+          </a:fontRef>
+        </p:style>
+      </p:cxnSp>
       <p:sp>
         <p:nvSpPr>
-          <p:cNvPr id="11" name="Rechteck 10">
-            <a:extLst>
-              <a:ext uri="{FF2B5EF4-FFF2-40B4-BE49-F238E27FC236}">
-                <a16:creationId xmlns:a16="http://schemas.microsoft.com/office/drawing/2014/main" id="{64349104-A0CA-60BD-98A3-E776BC66E1FC}"/>
+          <p:cNvPr id="42" name="Rechteck 41">
+            <a:extLst>
+              <a:ext uri="{FF2B5EF4-FFF2-40B4-BE49-F238E27FC236}">
+                <a16:creationId xmlns:a16="http://schemas.microsoft.com/office/drawing/2014/main" id="{7CCB5191-03BA-0A32-C37B-2D977D9E748E}"/>
               </a:ext>
             </a:extLst>
           </p:cNvPr>
@@ -15628,8 +14643,301 @@
         </p:nvSpPr>
         <p:spPr>
           <a:xfrm>
-            <a:off x="1742816" y="1692912"/>
-            <a:ext cx="1882141" cy="975043"/>
+            <a:off x="731837" y="4289460"/>
+            <a:ext cx="5071555" cy="1424889"/>
+          </a:xfrm>
+          <a:prstGeom prst="rect">
+            <a:avLst/>
+          </a:prstGeom>
+          <a:noFill/>
+        </p:spPr>
+        <p:style>
+          <a:lnRef idx="2">
+            <a:schemeClr val="accent1">
+              <a:shade val="15000"/>
+            </a:schemeClr>
+          </a:lnRef>
+          <a:fillRef idx="1">
+            <a:schemeClr val="accent1"/>
+          </a:fillRef>
+          <a:effectRef idx="0">
+            <a:schemeClr val="accent1"/>
+          </a:effectRef>
+          <a:fontRef idx="minor">
+            <a:schemeClr val="lt1"/>
+          </a:fontRef>
+        </p:style>
+        <p:txBody>
+          <a:bodyPr rtlCol="0" anchor="b"/>
+          <a:lstStyle/>
+          <a:p>
+            <a:pPr algn="ctr"/>
+            <a:r>
+              <a:rPr lang="en-US" dirty="0">
+                <a:solidFill>
+                  <a:schemeClr val="tx1"/>
+                </a:solidFill>
+              </a:rPr>
+              <a:t>Stage 2 trained on only 439 active customers</a:t>
+            </a:r>
+            <a:br>
+              <a:rPr lang="en-US" dirty="0">
+                <a:solidFill>
+                  <a:schemeClr val="tx1"/>
+                </a:solidFill>
+              </a:rPr>
+            </a:br>
+            <a:r>
+              <a:rPr lang="en-US" dirty="0">
+                <a:solidFill>
+                  <a:schemeClr val="tx1"/>
+                </a:solidFill>
+              </a:rPr>
+              <a:t>→ too sparse to learn high-value behavior</a:t>
+            </a:r>
+          </a:p>
+        </p:txBody>
+      </p:sp>
+      <p:sp>
+        <p:nvSpPr>
+          <p:cNvPr id="43" name="Rechteck 42">
+            <a:extLst>
+              <a:ext uri="{FF2B5EF4-FFF2-40B4-BE49-F238E27FC236}">
+                <a16:creationId xmlns:a16="http://schemas.microsoft.com/office/drawing/2014/main" id="{873F69CE-E9F3-B49D-A692-D7A53460424E}"/>
+              </a:ext>
+            </a:extLst>
+          </p:cNvPr>
+          <p:cNvSpPr/>
+          <p:nvPr/>
+        </p:nvSpPr>
+        <p:spPr>
+          <a:xfrm>
+            <a:off x="6388607" y="4284321"/>
+            <a:ext cx="5071555" cy="1424889"/>
+          </a:xfrm>
+          <a:prstGeom prst="rect">
+            <a:avLst/>
+          </a:prstGeom>
+          <a:noFill/>
+        </p:spPr>
+        <p:style>
+          <a:lnRef idx="2">
+            <a:schemeClr val="accent1">
+              <a:shade val="15000"/>
+            </a:schemeClr>
+          </a:lnRef>
+          <a:fillRef idx="1">
+            <a:schemeClr val="accent1"/>
+          </a:fillRef>
+          <a:effectRef idx="0">
+            <a:schemeClr val="accent1"/>
+          </a:effectRef>
+          <a:fontRef idx="minor">
+            <a:schemeClr val="lt1"/>
+          </a:fontRef>
+        </p:style>
+        <p:txBody>
+          <a:bodyPr rtlCol="0" anchor="b"/>
+          <a:lstStyle/>
+          <a:p>
+            <a:pPr algn="ctr"/>
+            <a:r>
+              <a:rPr lang="en-US" dirty="0">
+                <a:solidFill>
+                  <a:schemeClr val="tx1"/>
+                </a:solidFill>
+              </a:rPr>
+              <a:t>Can't explicitly zero out latent churners </a:t>
+            </a:r>
+            <a:br>
+              <a:rPr lang="en-US" dirty="0">
+                <a:solidFill>
+                  <a:schemeClr val="tx1"/>
+                </a:solidFill>
+              </a:rPr>
+            </a:br>
+            <a:r>
+              <a:rPr lang="en-US" dirty="0">
+                <a:solidFill>
+                  <a:schemeClr val="tx1"/>
+                </a:solidFill>
+              </a:rPr>
+              <a:t>→ over-predicts dormant high-spenders</a:t>
+            </a:r>
+          </a:p>
+        </p:txBody>
+      </p:sp>
+      <p:sp>
+        <p:nvSpPr>
+          <p:cNvPr id="44" name="Rechteck 43">
+            <a:extLst>
+              <a:ext uri="{FF2B5EF4-FFF2-40B4-BE49-F238E27FC236}">
+                <a16:creationId xmlns:a16="http://schemas.microsoft.com/office/drawing/2014/main" id="{5CA01B45-B44D-B7F3-7AC6-23C1081A615E}"/>
+              </a:ext>
+            </a:extLst>
+          </p:cNvPr>
+          <p:cNvSpPr/>
+          <p:nvPr/>
+        </p:nvSpPr>
+        <p:spPr>
+          <a:xfrm>
+            <a:off x="731837" y="4278060"/>
+            <a:ext cx="5071554" cy="694944"/>
+          </a:xfrm>
+          <a:prstGeom prst="rect">
+            <a:avLst/>
+          </a:prstGeom>
+        </p:spPr>
+        <p:style>
+          <a:lnRef idx="2">
+            <a:schemeClr val="accent1">
+              <a:shade val="15000"/>
+            </a:schemeClr>
+          </a:lnRef>
+          <a:fillRef idx="1">
+            <a:schemeClr val="accent1"/>
+          </a:fillRef>
+          <a:effectRef idx="0">
+            <a:schemeClr val="accent1"/>
+          </a:effectRef>
+          <a:fontRef idx="minor">
+            <a:schemeClr val="lt1"/>
+          </a:fontRef>
+        </p:style>
+        <p:txBody>
+          <a:bodyPr rtlCol="0" anchor="ctr"/>
+          <a:lstStyle/>
+          <a:p>
+            <a:pPr algn="ctr"/>
+            <a:r>
+              <a:rPr lang="en-US" sz="2000" b="1" dirty="0"/>
+              <a:t>Why not a pure two-stage model?</a:t>
+            </a:r>
+          </a:p>
+        </p:txBody>
+      </p:sp>
+      <p:sp>
+        <p:nvSpPr>
+          <p:cNvPr id="45" name="Rechteck 44">
+            <a:extLst>
+              <a:ext uri="{FF2B5EF4-FFF2-40B4-BE49-F238E27FC236}">
+                <a16:creationId xmlns:a16="http://schemas.microsoft.com/office/drawing/2014/main" id="{6F8D559E-403B-8896-4830-36BCB37EEDDA}"/>
+              </a:ext>
+            </a:extLst>
+          </p:cNvPr>
+          <p:cNvSpPr/>
+          <p:nvPr/>
+        </p:nvSpPr>
+        <p:spPr>
+          <a:xfrm>
+            <a:off x="6387227" y="4278060"/>
+            <a:ext cx="5071554" cy="694944"/>
+          </a:xfrm>
+          <a:prstGeom prst="rect">
+            <a:avLst/>
+          </a:prstGeom>
+        </p:spPr>
+        <p:style>
+          <a:lnRef idx="2">
+            <a:schemeClr val="accent1">
+              <a:shade val="15000"/>
+            </a:schemeClr>
+          </a:lnRef>
+          <a:fillRef idx="1">
+            <a:schemeClr val="accent1"/>
+          </a:fillRef>
+          <a:effectRef idx="0">
+            <a:schemeClr val="accent1"/>
+          </a:effectRef>
+          <a:fontRef idx="minor">
+            <a:schemeClr val="lt1"/>
+          </a:fontRef>
+        </p:style>
+        <p:txBody>
+          <a:bodyPr rtlCol="0" anchor="ctr"/>
+          <a:lstStyle/>
+          <a:p>
+            <a:pPr algn="ctr"/>
+            <a:r>
+              <a:rPr lang="en-US" sz="2000" b="1" dirty="0"/>
+              <a:t>Why not a single-stage model alone?</a:t>
+            </a:r>
+          </a:p>
+        </p:txBody>
+      </p:sp>
+      <p:sp>
+        <p:nvSpPr>
+          <p:cNvPr id="7" name="Rechteck: abgerundete Ecken 6">
+            <a:extLst>
+              <a:ext uri="{FF2B5EF4-FFF2-40B4-BE49-F238E27FC236}">
+                <a16:creationId xmlns:a16="http://schemas.microsoft.com/office/drawing/2014/main" id="{1FBE4925-6C96-53F8-7164-9B2469B22402}"/>
+              </a:ext>
+            </a:extLst>
+          </p:cNvPr>
+          <p:cNvSpPr/>
+          <p:nvPr/>
+        </p:nvSpPr>
+        <p:spPr>
+          <a:xfrm>
+            <a:off x="1378413" y="1817221"/>
+            <a:ext cx="1800000" cy="755377"/>
+          </a:xfrm>
+          <a:prstGeom prst="roundRect">
+            <a:avLst/>
+          </a:prstGeom>
+          <a:solidFill>
+            <a:srgbClr val="007894"/>
+          </a:solidFill>
+        </p:spPr>
+        <p:style>
+          <a:lnRef idx="2">
+            <a:schemeClr val="accent1">
+              <a:shade val="15000"/>
+            </a:schemeClr>
+          </a:lnRef>
+          <a:fillRef idx="1">
+            <a:schemeClr val="accent1"/>
+          </a:fillRef>
+          <a:effectRef idx="0">
+            <a:schemeClr val="accent1"/>
+          </a:effectRef>
+          <a:fontRef idx="minor">
+            <a:schemeClr val="lt1"/>
+          </a:fontRef>
+        </p:style>
+        <p:txBody>
+          <a:bodyPr rtlCol="0" anchor="ctr"/>
+          <a:lstStyle/>
+          <a:p>
+            <a:pPr algn="ctr"/>
+            <a:r>
+              <a:rPr lang="de-DE" sz="1200" b="1" dirty="0"/>
+              <a:t>All </a:t>
+            </a:r>
+            <a:r>
+              <a:rPr lang="de-DE" sz="1200" b="1" dirty="0" err="1"/>
+              <a:t>customers</a:t>
+            </a:r>
+            <a:endParaRPr lang="en-US" sz="1200" b="1" dirty="0"/>
+          </a:p>
+        </p:txBody>
+      </p:sp>
+      <p:sp>
+        <p:nvSpPr>
+          <p:cNvPr id="28" name="Rechteck 27">
+            <a:extLst>
+              <a:ext uri="{FF2B5EF4-FFF2-40B4-BE49-F238E27FC236}">
+                <a16:creationId xmlns:a16="http://schemas.microsoft.com/office/drawing/2014/main" id="{87269859-BD14-38F5-4A93-80DC33EA81A4}"/>
+              </a:ext>
+            </a:extLst>
+          </p:cNvPr>
+          <p:cNvSpPr/>
+          <p:nvPr/>
+        </p:nvSpPr>
+        <p:spPr>
+          <a:xfrm>
+            <a:off x="3686187" y="926610"/>
+            <a:ext cx="1800000" cy="755377"/>
           </a:xfrm>
           <a:prstGeom prst="rect">
             <a:avLst/>
@@ -15660,27 +14968,50 @@
           <a:p>
             <a:pPr algn="ctr"/>
             <a:r>
-              <a:rPr lang="de-DE" b="1" dirty="0" err="1"/>
+              <a:rPr lang="de-DE" sz="1200" b="1" dirty="0" err="1"/>
               <a:t>LightGBM</a:t>
             </a:r>
             <a:r>
-              <a:rPr lang="de-DE" b="1" dirty="0"/>
+              <a:rPr lang="de-DE" sz="1200" b="1" dirty="0"/>
               <a:t> </a:t>
             </a:r>
             <a:r>
-              <a:rPr lang="de-DE" b="1" dirty="0" err="1"/>
+              <a:rPr lang="de-DE" sz="1200" b="1" dirty="0" err="1"/>
               <a:t>Classifier</a:t>
             </a:r>
-            <a:endParaRPr lang="en-US" b="1" dirty="0"/>
+            <a:br>
+              <a:rPr lang="de-DE" sz="1200" b="1" dirty="0"/>
+            </a:br>
+            <a:r>
+              <a:rPr lang="de-DE" sz="1000" dirty="0" err="1"/>
+              <a:t>scores</a:t>
+            </a:r>
+            <a:r>
+              <a:rPr lang="de-DE" sz="1000" dirty="0"/>
+              <a:t> </a:t>
+            </a:r>
+            <a:r>
+              <a:rPr lang="de-DE" sz="1000" dirty="0" err="1"/>
+              <a:t>churn</a:t>
+            </a:r>
+            <a:r>
+              <a:rPr lang="de-DE" sz="1000" dirty="0"/>
+              <a:t> </a:t>
+            </a:r>
+            <a:r>
+              <a:rPr lang="de-DE" sz="1000" dirty="0" err="1"/>
+              <a:t>prediction</a:t>
+            </a:r>
+            <a:endParaRPr lang="en-US" sz="1100" b="1" dirty="0"/>
           </a:p>
         </p:txBody>
       </p:sp>
       <p:sp>
         <p:nvSpPr>
-          <p:cNvPr id="12" name="Raute 11">
-            <a:extLst>
-              <a:ext uri="{FF2B5EF4-FFF2-40B4-BE49-F238E27FC236}">
-                <a16:creationId xmlns:a16="http://schemas.microsoft.com/office/drawing/2014/main" id="{AA56B318-D467-1B6A-3063-754BA3752937}"/>
+          <p:cNvPr id="30" name="Rechteck 29">
+            <a:extLst>
+              <a:ext uri="{FF2B5EF4-FFF2-40B4-BE49-F238E27FC236}">
+                <a16:creationId xmlns:a16="http://schemas.microsoft.com/office/drawing/2014/main" id="{5D1A89B9-C86E-62AF-40E3-6C8573A9C8C4}"/>
               </a:ext>
             </a:extLst>
           </p:cNvPr>
@@ -15689,65 +15020,8 @@
         </p:nvSpPr>
         <p:spPr>
           <a:xfrm>
-            <a:off x="4091303" y="1692912"/>
-            <a:ext cx="1588322" cy="975043"/>
-          </a:xfrm>
-          <a:prstGeom prst="diamond">
-            <a:avLst/>
-          </a:prstGeom>
-          <a:solidFill>
-            <a:srgbClr val="007894"/>
-          </a:solidFill>
-        </p:spPr>
-        <p:style>
-          <a:lnRef idx="2">
-            <a:schemeClr val="accent1">
-              <a:shade val="15000"/>
-            </a:schemeClr>
-          </a:lnRef>
-          <a:fillRef idx="1">
-            <a:schemeClr val="accent1"/>
-          </a:fillRef>
-          <a:effectRef idx="0">
-            <a:schemeClr val="accent1"/>
-          </a:effectRef>
-          <a:fontRef idx="minor">
-            <a:schemeClr val="lt1"/>
-          </a:fontRef>
-        </p:style>
-        <p:txBody>
-          <a:bodyPr rtlCol="0" anchor="ctr"/>
-          <a:lstStyle/>
-          <a:p>
-            <a:pPr algn="ctr"/>
-            <a:r>
-              <a:rPr lang="de-DE" dirty="0" err="1"/>
-              <a:t>Churned</a:t>
-            </a:r>
-            <a:r>
-              <a:rPr lang="de-DE" dirty="0"/>
-              <a:t>?</a:t>
-            </a:r>
-            <a:endParaRPr lang="en-US" dirty="0"/>
-          </a:p>
-        </p:txBody>
-      </p:sp>
-      <p:sp>
-        <p:nvSpPr>
-          <p:cNvPr id="15" name="Rechteck 14">
-            <a:extLst>
-              <a:ext uri="{FF2B5EF4-FFF2-40B4-BE49-F238E27FC236}">
-                <a16:creationId xmlns:a16="http://schemas.microsoft.com/office/drawing/2014/main" id="{42F352B7-E43C-0161-731C-C1898195F47B}"/>
-              </a:ext>
-            </a:extLst>
-          </p:cNvPr>
-          <p:cNvSpPr/>
-          <p:nvPr/>
-        </p:nvSpPr>
-        <p:spPr>
-          <a:xfrm>
-            <a:off x="6547177" y="950639"/>
-            <a:ext cx="2346962" cy="975043"/>
+            <a:off x="3685733" y="2794154"/>
+            <a:ext cx="1800000" cy="756000"/>
           </a:xfrm>
           <a:prstGeom prst="rect">
             <a:avLst/>
@@ -15778,99 +15052,62 @@
           <a:p>
             <a:pPr algn="ctr"/>
             <a:r>
-              <a:rPr lang="de-DE" b="1" dirty="0"/>
-              <a:t>Single-Stage </a:t>
-            </a:r>
-            <a:r>
-              <a:rPr lang="de-DE" b="1" dirty="0" err="1"/>
+              <a:rPr lang="de-DE" sz="1200" b="1" dirty="0" err="1"/>
               <a:t>LightGBM</a:t>
             </a:r>
             <a:r>
-              <a:rPr lang="de-DE" b="1" dirty="0"/>
-              <a:t> Regressor </a:t>
-            </a:r>
-            <a:endParaRPr lang="en-US" b="1" dirty="0"/>
-          </a:p>
-        </p:txBody>
-      </p:sp>
-      <p:sp>
-        <p:nvSpPr>
-          <p:cNvPr id="16" name="Parallelogramm 15">
-            <a:extLst>
-              <a:ext uri="{FF2B5EF4-FFF2-40B4-BE49-F238E27FC236}">
-                <a16:creationId xmlns:a16="http://schemas.microsoft.com/office/drawing/2014/main" id="{568E6531-E5E2-8296-2A92-F86DAAE8D1D4}"/>
-              </a:ext>
-            </a:extLst>
-          </p:cNvPr>
-          <p:cNvSpPr/>
-          <p:nvPr/>
-        </p:nvSpPr>
-        <p:spPr>
-          <a:xfrm>
-            <a:off x="6412992" y="2466102"/>
-            <a:ext cx="2517723" cy="975043"/>
-          </a:xfrm>
-          <a:prstGeom prst="parallelogram">
-            <a:avLst/>
-          </a:prstGeom>
-          <a:solidFill>
-            <a:srgbClr val="007894"/>
-          </a:solidFill>
-        </p:spPr>
-        <p:style>
-          <a:lnRef idx="2">
-            <a:schemeClr val="accent1">
-              <a:shade val="15000"/>
-            </a:schemeClr>
-          </a:lnRef>
-          <a:fillRef idx="1">
-            <a:schemeClr val="accent1"/>
-          </a:fillRef>
-          <a:effectRef idx="0">
-            <a:schemeClr val="accent1"/>
-          </a:effectRef>
-          <a:fontRef idx="minor">
-            <a:schemeClr val="lt1"/>
-          </a:fontRef>
-        </p:style>
-        <p:txBody>
-          <a:bodyPr rtlCol="0" anchor="ctr"/>
-          <a:lstStyle/>
+              <a:rPr lang="de-DE" sz="1200" b="1" dirty="0"/>
+              <a:t> Regressor</a:t>
+            </a:r>
+          </a:p>
           <a:p>
             <a:pPr algn="ctr"/>
             <a:r>
-              <a:rPr lang="de-DE" b="1" dirty="0"/>
-              <a:t>Set CLV = 0 </a:t>
-            </a:r>
-            <a:endParaRPr lang="en-US" b="1" dirty="0"/>
+              <a:rPr lang="de-DE" sz="1000" dirty="0" err="1"/>
+              <a:t>predicts</a:t>
+            </a:r>
+            <a:r>
+              <a:rPr lang="de-DE" sz="1000" dirty="0"/>
+              <a:t> clv </a:t>
+            </a:r>
+            <a:r>
+              <a:rPr lang="de-DE" sz="1000" dirty="0" err="1"/>
+              <a:t>for</a:t>
+            </a:r>
+            <a:r>
+              <a:rPr lang="de-DE" sz="1000" dirty="0"/>
+              <a:t> all</a:t>
+            </a:r>
+            <a:endParaRPr lang="en-US" sz="1200" dirty="0"/>
           </a:p>
         </p:txBody>
       </p:sp>
       <p:cxnSp>
         <p:nvCxnSpPr>
-          <p:cNvPr id="18" name="Gerade Verbindung mit Pfeil 17">
-            <a:extLst>
-              <a:ext uri="{FF2B5EF4-FFF2-40B4-BE49-F238E27FC236}">
-                <a16:creationId xmlns:a16="http://schemas.microsoft.com/office/drawing/2014/main" id="{BB614301-4E7D-FD57-8726-1BBCD87310CD}"/>
+          <p:cNvPr id="33" name="Verbinder: gewinkelt 32">
+            <a:extLst>
+              <a:ext uri="{FF2B5EF4-FFF2-40B4-BE49-F238E27FC236}">
+                <a16:creationId xmlns:a16="http://schemas.microsoft.com/office/drawing/2014/main" id="{EA6AFE09-5F5A-E4F1-C999-9ED52590FA01}"/>
               </a:ext>
             </a:extLst>
           </p:cNvPr>
           <p:cNvCxnSpPr>
-            <a:stCxn id="9" idx="6"/>
+            <a:stCxn id="7" idx="3"/>
+            <a:endCxn id="28" idx="1"/>
           </p:cNvCxnSpPr>
           <p:nvPr/>
         </p:nvCxnSpPr>
         <p:spPr>
-          <a:xfrm>
-            <a:off x="1277995" y="2180434"/>
-            <a:ext cx="464821" cy="0"/>
+          <a:xfrm flipV="1">
+            <a:off x="3178413" y="1304299"/>
+            <a:ext cx="507774" cy="890611"/>
           </a:xfrm>
-          <a:prstGeom prst="straightConnector1">
+          <a:prstGeom prst="bentConnector3">
             <a:avLst/>
           </a:prstGeom>
           <a:ln w="12700">
             <a:solidFill>
-              <a:srgbClr val="007894"/>
+              <a:schemeClr val="tx1"/>
             </a:solidFill>
             <a:tailEnd type="triangle"/>
           </a:ln>
@@ -15892,121 +15129,30 @@
       </p:cxnSp>
       <p:cxnSp>
         <p:nvCxnSpPr>
-          <p:cNvPr id="20" name="Gerade Verbindung mit Pfeil 19">
-            <a:extLst>
-              <a:ext uri="{FF2B5EF4-FFF2-40B4-BE49-F238E27FC236}">
-                <a16:creationId xmlns:a16="http://schemas.microsoft.com/office/drawing/2014/main" id="{E71DB375-50A8-D5D3-F8BB-72E4E3DFB11E}"/>
+          <p:cNvPr id="38" name="Verbinder: gewinkelt 37">
+            <a:extLst>
+              <a:ext uri="{FF2B5EF4-FFF2-40B4-BE49-F238E27FC236}">
+                <a16:creationId xmlns:a16="http://schemas.microsoft.com/office/drawing/2014/main" id="{129F215E-8D4D-F1A1-2C01-3096367CF20E}"/>
               </a:ext>
             </a:extLst>
           </p:cNvPr>
           <p:cNvCxnSpPr>
-            <a:cxnSpLocks/>
-            <a:stCxn id="11" idx="3"/>
-            <a:endCxn id="12" idx="1"/>
+            <a:stCxn id="7" idx="3"/>
+            <a:endCxn id="30" idx="1"/>
           </p:cNvCxnSpPr>
           <p:nvPr/>
         </p:nvCxnSpPr>
         <p:spPr>
           <a:xfrm>
-            <a:off x="3624957" y="2180434"/>
-            <a:ext cx="466346" cy="0"/>
+            <a:off x="3178413" y="2194910"/>
+            <a:ext cx="507320" cy="977244"/>
           </a:xfrm>
-          <a:prstGeom prst="straightConnector1">
+          <a:prstGeom prst="bentConnector3">
             <a:avLst/>
           </a:prstGeom>
           <a:ln w="12700">
             <a:solidFill>
-              <a:srgbClr val="007894"/>
-            </a:solidFill>
-            <a:tailEnd type="triangle"/>
-          </a:ln>
-        </p:spPr>
-        <p:style>
-          <a:lnRef idx="1">
-            <a:schemeClr val="accent1"/>
-          </a:lnRef>
-          <a:fillRef idx="0">
-            <a:schemeClr val="accent1"/>
-          </a:fillRef>
-          <a:effectRef idx="0">
-            <a:schemeClr val="accent1"/>
-          </a:effectRef>
-          <a:fontRef idx="minor">
-            <a:schemeClr val="tx1"/>
-          </a:fontRef>
-        </p:style>
-      </p:cxnSp>
-      <p:cxnSp>
-        <p:nvCxnSpPr>
-          <p:cNvPr id="22" name="Verbinder: gewinkelt 21">
-            <a:extLst>
-              <a:ext uri="{FF2B5EF4-FFF2-40B4-BE49-F238E27FC236}">
-                <a16:creationId xmlns:a16="http://schemas.microsoft.com/office/drawing/2014/main" id="{6364E69B-14FE-F202-591E-C9EB468992A4}"/>
-              </a:ext>
-            </a:extLst>
-          </p:cNvPr>
-          <p:cNvCxnSpPr>
-            <a:cxnSpLocks/>
-            <a:stCxn id="12" idx="0"/>
-            <a:endCxn id="15" idx="1"/>
-          </p:cNvCxnSpPr>
-          <p:nvPr/>
-        </p:nvCxnSpPr>
-        <p:spPr>
-          <a:xfrm rot="5400000" flipH="1" flipV="1">
-            <a:off x="5588945" y="734681"/>
-            <a:ext cx="254751" cy="1661713"/>
-          </a:xfrm>
-          <a:prstGeom prst="bentConnector2">
-            <a:avLst/>
-          </a:prstGeom>
-          <a:ln w="12700">
-            <a:solidFill>
-              <a:srgbClr val="007894"/>
-            </a:solidFill>
-            <a:tailEnd type="triangle"/>
-          </a:ln>
-        </p:spPr>
-        <p:style>
-          <a:lnRef idx="1">
-            <a:schemeClr val="accent1"/>
-          </a:lnRef>
-          <a:fillRef idx="0">
-            <a:schemeClr val="accent1"/>
-          </a:fillRef>
-          <a:effectRef idx="0">
-            <a:schemeClr val="accent1"/>
-          </a:effectRef>
-          <a:fontRef idx="minor">
-            <a:schemeClr val="tx1"/>
-          </a:fontRef>
-        </p:style>
-      </p:cxnSp>
-      <p:cxnSp>
-        <p:nvCxnSpPr>
-          <p:cNvPr id="21" name="Verbinder: gewinkelt 20">
-            <a:extLst>
-              <a:ext uri="{FF2B5EF4-FFF2-40B4-BE49-F238E27FC236}">
-                <a16:creationId xmlns:a16="http://schemas.microsoft.com/office/drawing/2014/main" id="{62A4303F-9859-1655-63B2-C55658DBD47D}"/>
-              </a:ext>
-            </a:extLst>
-          </p:cNvPr>
-          <p:cNvCxnSpPr>
-            <a:stCxn id="12" idx="2"/>
-          </p:cNvCxnSpPr>
-          <p:nvPr/>
-        </p:nvCxnSpPr>
-        <p:spPr>
-          <a:xfrm rot="16200000" flipH="1">
-            <a:off x="5573486" y="1979932"/>
-            <a:ext cx="285669" cy="1661713"/>
-          </a:xfrm>
-          <a:prstGeom prst="bentConnector2">
-            <a:avLst/>
-          </a:prstGeom>
-          <a:ln w="12700">
-            <a:solidFill>
-              <a:srgbClr val="007894"/>
+              <a:schemeClr val="tx1"/>
             </a:solidFill>
             <a:tailEnd type="triangle"/>
           </a:ln>
@@ -16028,88 +15174,10 @@
       </p:cxnSp>
       <p:sp>
         <p:nvSpPr>
-          <p:cNvPr id="24" name="Textfeld 23">
-            <a:extLst>
-              <a:ext uri="{FF2B5EF4-FFF2-40B4-BE49-F238E27FC236}">
-                <a16:creationId xmlns:a16="http://schemas.microsoft.com/office/drawing/2014/main" id="{CF6D6DE5-8AC4-89E0-8796-D03B8F4C9478}"/>
-              </a:ext>
-            </a:extLst>
-          </p:cNvPr>
-          <p:cNvSpPr txBox="1"/>
-          <p:nvPr/>
-        </p:nvSpPr>
-        <p:spPr>
-          <a:xfrm>
-            <a:off x="5545981" y="1090811"/>
-            <a:ext cx="1403927" cy="369332"/>
-          </a:xfrm>
-          <a:prstGeom prst="rect">
-            <a:avLst/>
-          </a:prstGeom>
-          <a:noFill/>
-          <a:ln>
-            <a:noFill/>
-          </a:ln>
-        </p:spPr>
-        <p:txBody>
-          <a:bodyPr wrap="square" rtlCol="0">
-            <a:spAutoFit/>
-          </a:bodyPr>
-          <a:lstStyle/>
-          <a:p>
-            <a:r>
-              <a:rPr lang="de-DE" dirty="0"/>
-              <a:t>NO </a:t>
-            </a:r>
-            <a:endParaRPr lang="en-US" dirty="0"/>
-          </a:p>
-        </p:txBody>
-      </p:sp>
-      <p:sp>
-        <p:nvSpPr>
-          <p:cNvPr id="25" name="Textfeld 24">
-            <a:extLst>
-              <a:ext uri="{FF2B5EF4-FFF2-40B4-BE49-F238E27FC236}">
-                <a16:creationId xmlns:a16="http://schemas.microsoft.com/office/drawing/2014/main" id="{BF79C5BE-B7F3-F0AA-449A-6A330158ACFF}"/>
-              </a:ext>
-            </a:extLst>
-          </p:cNvPr>
-          <p:cNvSpPr txBox="1"/>
-          <p:nvPr/>
-        </p:nvSpPr>
-        <p:spPr>
-          <a:xfrm>
-            <a:off x="5474207" y="2947536"/>
-            <a:ext cx="1403927" cy="369332"/>
-          </a:xfrm>
-          <a:prstGeom prst="rect">
-            <a:avLst/>
-          </a:prstGeom>
-          <a:noFill/>
-          <a:ln>
-            <a:noFill/>
-          </a:ln>
-        </p:spPr>
-        <p:txBody>
-          <a:bodyPr wrap="square" rtlCol="0">
-            <a:spAutoFit/>
-          </a:bodyPr>
-          <a:lstStyle/>
-          <a:p>
-            <a:r>
-              <a:rPr lang="de-DE" dirty="0"/>
-              <a:t>YES </a:t>
-            </a:r>
-            <a:endParaRPr lang="en-US" dirty="0"/>
-          </a:p>
-        </p:txBody>
-      </p:sp>
-      <p:sp>
-        <p:nvSpPr>
-          <p:cNvPr id="32" name="Parallelogramm 31">
-            <a:extLst>
-              <a:ext uri="{FF2B5EF4-FFF2-40B4-BE49-F238E27FC236}">
-                <a16:creationId xmlns:a16="http://schemas.microsoft.com/office/drawing/2014/main" id="{D127A36A-B61C-DC47-C75E-87B549AFD355}"/>
+          <p:cNvPr id="40" name="Rechteck: abgerundete Ecken 39">
+            <a:extLst>
+              <a:ext uri="{FF2B5EF4-FFF2-40B4-BE49-F238E27FC236}">
+                <a16:creationId xmlns:a16="http://schemas.microsoft.com/office/drawing/2014/main" id="{2511762C-E576-3BEC-AA00-2D893404D8BD}"/>
               </a:ext>
             </a:extLst>
           </p:cNvPr>
@@ -16118,122 +15186,8 @@
         </p:nvSpPr>
         <p:spPr>
           <a:xfrm>
-            <a:off x="9404825" y="950638"/>
-            <a:ext cx="2517723" cy="975043"/>
-          </a:xfrm>
-          <a:prstGeom prst="parallelogram">
-            <a:avLst/>
-          </a:prstGeom>
-          <a:solidFill>
-            <a:srgbClr val="007894"/>
-          </a:solidFill>
-        </p:spPr>
-        <p:style>
-          <a:lnRef idx="2">
-            <a:schemeClr val="accent1">
-              <a:shade val="15000"/>
-            </a:schemeClr>
-          </a:lnRef>
-          <a:fillRef idx="1">
-            <a:schemeClr val="accent1"/>
-          </a:fillRef>
-          <a:effectRef idx="0">
-            <a:schemeClr val="accent1"/>
-          </a:effectRef>
-          <a:fontRef idx="minor">
-            <a:schemeClr val="lt1"/>
-          </a:fontRef>
-        </p:style>
-        <p:txBody>
-          <a:bodyPr rtlCol="0" anchor="ctr"/>
-          <a:lstStyle/>
-          <a:p>
-            <a:pPr algn="ctr"/>
-            <a:r>
-              <a:rPr lang="de-DE" b="1" dirty="0" err="1"/>
-              <a:t>Predict</a:t>
-            </a:r>
-            <a:r>
-              <a:rPr lang="de-DE" b="1" dirty="0"/>
-              <a:t> CLV </a:t>
-            </a:r>
-            <a:r>
-              <a:rPr lang="de-DE" b="1" dirty="0" err="1"/>
-              <a:t>of</a:t>
-            </a:r>
-            <a:r>
-              <a:rPr lang="de-DE" b="1" dirty="0"/>
-              <a:t> all </a:t>
-            </a:r>
-            <a:r>
-              <a:rPr lang="de-DE" b="1" dirty="0" err="1"/>
-              <a:t>customers</a:t>
-            </a:r>
-            <a:endParaRPr lang="en-US" b="1" dirty="0"/>
-          </a:p>
-        </p:txBody>
-      </p:sp>
-      <p:cxnSp>
-        <p:nvCxnSpPr>
-          <p:cNvPr id="34" name="Gerade Verbindung mit Pfeil 33">
-            <a:extLst>
-              <a:ext uri="{FF2B5EF4-FFF2-40B4-BE49-F238E27FC236}">
-                <a16:creationId xmlns:a16="http://schemas.microsoft.com/office/drawing/2014/main" id="{E0D9C499-5C74-CEFD-2457-0EB07F40DA32}"/>
-              </a:ext>
-            </a:extLst>
-          </p:cNvPr>
-          <p:cNvCxnSpPr>
-            <a:stCxn id="15" idx="3"/>
-            <a:endCxn id="32" idx="5"/>
-          </p:cNvCxnSpPr>
-          <p:nvPr/>
-        </p:nvCxnSpPr>
-        <p:spPr>
-          <a:xfrm flipV="1">
-            <a:off x="8894139" y="1438160"/>
-            <a:ext cx="632566" cy="1"/>
-          </a:xfrm>
-          <a:prstGeom prst="straightConnector1">
-            <a:avLst/>
-          </a:prstGeom>
-          <a:ln w="12700">
-            <a:solidFill>
-              <a:srgbClr val="007894"/>
-            </a:solidFill>
-            <a:tailEnd type="triangle"/>
-          </a:ln>
-        </p:spPr>
-        <p:style>
-          <a:lnRef idx="1">
-            <a:schemeClr val="accent1"/>
-          </a:lnRef>
-          <a:fillRef idx="0">
-            <a:schemeClr val="accent1"/>
-          </a:fillRef>
-          <a:effectRef idx="0">
-            <a:schemeClr val="accent1"/>
-          </a:effectRef>
-          <a:fontRef idx="minor">
-            <a:schemeClr val="tx1"/>
-          </a:fontRef>
-        </p:style>
-      </p:cxnSp>
-      <p:sp>
-        <p:nvSpPr>
-          <p:cNvPr id="35" name="Rechteck: abgerundete Ecken 34">
-            <a:extLst>
-              <a:ext uri="{FF2B5EF4-FFF2-40B4-BE49-F238E27FC236}">
-                <a16:creationId xmlns:a16="http://schemas.microsoft.com/office/drawing/2014/main" id="{8D5D5BB4-C0E3-6029-8530-B60FD22CDB82}"/>
-              </a:ext>
-            </a:extLst>
-          </p:cNvPr>
-          <p:cNvSpPr/>
-          <p:nvPr/>
-        </p:nvSpPr>
-        <p:spPr>
-          <a:xfrm>
-            <a:off x="9404825" y="2466102"/>
-            <a:ext cx="2395843" cy="975043"/>
+            <a:off x="5901461" y="1817220"/>
+            <a:ext cx="2663884" cy="755377"/>
           </a:xfrm>
           <a:prstGeom prst="roundRect">
             <a:avLst/>
@@ -16264,42 +15218,155 @@
           <a:p>
             <a:pPr algn="ctr"/>
             <a:r>
-              <a:rPr lang="de-DE" dirty="0"/>
-              <a:t>Combine </a:t>
-            </a:r>
-            <a:r>
-              <a:rPr lang="de-DE" dirty="0" err="1"/>
-              <a:t>predictions</a:t>
-            </a:r>
-            <a:endParaRPr lang="en-US" dirty="0"/>
+              <a:rPr lang="de-DE" sz="1200" b="1" dirty="0"/>
+              <a:t>Hybrid </a:t>
+            </a:r>
+            <a:r>
+              <a:rPr lang="de-DE" sz="1200" b="1" dirty="0" err="1"/>
+              <a:t>prediction</a:t>
+            </a:r>
+            <a:r>
+              <a:rPr lang="de-DE" sz="1200" b="1" dirty="0"/>
+              <a:t> </a:t>
+            </a:r>
+            <a:r>
+              <a:rPr lang="de-DE" sz="1200" b="1" dirty="0" err="1"/>
+              <a:t>combination</a:t>
+            </a:r>
+            <a:br>
+              <a:rPr lang="de-DE" sz="1200" b="1" dirty="0"/>
+            </a:br>
+            <a:r>
+              <a:rPr lang="de-DE" sz="1000" dirty="0" err="1"/>
+              <a:t>if</a:t>
+            </a:r>
+            <a:r>
+              <a:rPr lang="de-DE" sz="1000" dirty="0"/>
+              <a:t> </a:t>
+            </a:r>
+            <a:r>
+              <a:rPr lang="de-DE" sz="1000" dirty="0" err="1"/>
+              <a:t>churned</a:t>
+            </a:r>
+            <a:r>
+              <a:rPr lang="de-DE" sz="1000" dirty="0"/>
+              <a:t> </a:t>
+            </a:r>
+            <a:r>
+              <a:rPr lang="de-DE" sz="1000" dirty="0">
+                <a:latin typeface="Segoe UI Symbol" panose="020B0502040204020203" pitchFamily="34" charset="0"/>
+                <a:ea typeface="Segoe UI Symbol" panose="020B0502040204020203" pitchFamily="34" charset="0"/>
+              </a:rPr>
+              <a:t>→ </a:t>
+            </a:r>
+            <a:r>
+              <a:rPr lang="de-DE" sz="1000" dirty="0">
+                <a:ea typeface="Segoe UI Symbol" panose="020B0502040204020203" pitchFamily="34" charset="0"/>
+              </a:rPr>
+              <a:t>CLV = 0</a:t>
+            </a:r>
+          </a:p>
+          <a:p>
+            <a:pPr algn="ctr"/>
+            <a:r>
+              <a:rPr lang="de-DE" sz="1000" dirty="0" err="1">
+                <a:ea typeface="Segoe UI Symbol" panose="020B0502040204020203" pitchFamily="34" charset="0"/>
+              </a:rPr>
+              <a:t>If</a:t>
+            </a:r>
+            <a:r>
+              <a:rPr lang="de-DE" sz="1000" dirty="0">
+                <a:ea typeface="Segoe UI Symbol" panose="020B0502040204020203" pitchFamily="34" charset="0"/>
+              </a:rPr>
+              <a:t> </a:t>
+            </a:r>
+            <a:r>
+              <a:rPr lang="de-DE" sz="1000" dirty="0" err="1">
+                <a:ea typeface="Segoe UI Symbol" panose="020B0502040204020203" pitchFamily="34" charset="0"/>
+              </a:rPr>
+              <a:t>active</a:t>
+            </a:r>
+            <a:r>
+              <a:rPr lang="de-DE" sz="1000" dirty="0">
+                <a:ea typeface="Segoe UI Symbol" panose="020B0502040204020203" pitchFamily="34" charset="0"/>
+              </a:rPr>
+              <a:t> </a:t>
+            </a:r>
+            <a:r>
+              <a:rPr lang="de-DE" sz="1000" dirty="0">
+                <a:latin typeface="Segoe UI Symbol" panose="020B0502040204020203" pitchFamily="34" charset="0"/>
+                <a:ea typeface="Segoe UI Symbol" panose="020B0502040204020203" pitchFamily="34" charset="0"/>
+              </a:rPr>
+              <a:t>→</a:t>
+            </a:r>
+            <a:r>
+              <a:rPr lang="de-DE" sz="1000" dirty="0">
+                <a:ea typeface="Segoe UI Symbol" panose="020B0502040204020203" pitchFamily="34" charset="0"/>
+              </a:rPr>
+              <a:t> CLV </a:t>
+            </a:r>
+            <a:r>
+              <a:rPr lang="de-DE" sz="1000" dirty="0" err="1">
+                <a:ea typeface="Segoe UI Symbol" panose="020B0502040204020203" pitchFamily="34" charset="0"/>
+              </a:rPr>
+              <a:t>prediction</a:t>
+            </a:r>
+            <a:r>
+              <a:rPr lang="de-DE" sz="1000" dirty="0">
+                <a:ea typeface="Segoe UI Symbol" panose="020B0502040204020203" pitchFamily="34" charset="0"/>
+              </a:rPr>
+              <a:t> </a:t>
+            </a:r>
+            <a:r>
+              <a:rPr lang="de-DE" sz="1000" dirty="0" err="1">
+                <a:ea typeface="Segoe UI Symbol" panose="020B0502040204020203" pitchFamily="34" charset="0"/>
+              </a:rPr>
+              <a:t>of</a:t>
+            </a:r>
+            <a:r>
+              <a:rPr lang="de-DE" sz="1000" dirty="0">
+                <a:ea typeface="Segoe UI Symbol" panose="020B0502040204020203" pitchFamily="34" charset="0"/>
+              </a:rPr>
+              <a:t> </a:t>
+            </a:r>
+            <a:r>
+              <a:rPr lang="de-DE" sz="1000" dirty="0" err="1">
+                <a:ea typeface="Segoe UI Symbol" panose="020B0502040204020203" pitchFamily="34" charset="0"/>
+              </a:rPr>
+              <a:t>regressor</a:t>
+            </a:r>
+            <a:endParaRPr lang="en-US" sz="1200" dirty="0">
+              <a:ea typeface="Segoe UI Symbol" panose="020B0502040204020203" pitchFamily="34" charset="0"/>
+            </a:endParaRPr>
           </a:p>
         </p:txBody>
       </p:sp>
       <p:cxnSp>
         <p:nvCxnSpPr>
-          <p:cNvPr id="37" name="Gerade Verbindung mit Pfeil 36">
-            <a:extLst>
-              <a:ext uri="{FF2B5EF4-FFF2-40B4-BE49-F238E27FC236}">
-                <a16:creationId xmlns:a16="http://schemas.microsoft.com/office/drawing/2014/main" id="{EC1A897E-7BB1-90E6-260B-48206C189140}"/>
+          <p:cNvPr id="47" name="Verbinder: gewinkelt 46">
+            <a:extLst>
+              <a:ext uri="{FF2B5EF4-FFF2-40B4-BE49-F238E27FC236}">
+                <a16:creationId xmlns:a16="http://schemas.microsoft.com/office/drawing/2014/main" id="{FA9FEE98-9AD6-F8ED-2234-81DAA88AFBC8}"/>
               </a:ext>
             </a:extLst>
           </p:cNvPr>
           <p:cNvCxnSpPr>
-            <a:cxnSpLocks/>
+            <a:stCxn id="28" idx="3"/>
+            <a:endCxn id="40" idx="0"/>
           </p:cNvCxnSpPr>
           <p:nvPr/>
         </p:nvCxnSpPr>
         <p:spPr>
-          <a:xfrm flipH="1">
-            <a:off x="10602746" y="1926290"/>
-            <a:ext cx="1" cy="522000"/>
+          <a:xfrm>
+            <a:off x="5486187" y="1304299"/>
+            <a:ext cx="1747216" cy="512921"/>
           </a:xfrm>
-          <a:prstGeom prst="straightConnector1">
+          <a:prstGeom prst="bentConnector2">
             <a:avLst/>
           </a:prstGeom>
           <a:ln w="12700">
             <a:solidFill>
-              <a:srgbClr val="007894"/>
+              <a:schemeClr val="tx1"/>
             </a:solidFill>
             <a:tailEnd type="triangle"/>
           </a:ln>
@@ -16321,30 +15388,30 @@
       </p:cxnSp>
       <p:cxnSp>
         <p:nvCxnSpPr>
-          <p:cNvPr id="41" name="Gerade Verbindung mit Pfeil 40">
-            <a:extLst>
-              <a:ext uri="{FF2B5EF4-FFF2-40B4-BE49-F238E27FC236}">
-                <a16:creationId xmlns:a16="http://schemas.microsoft.com/office/drawing/2014/main" id="{5CC9ACFF-2AE3-3508-082D-F00707668D90}"/>
+          <p:cNvPr id="51" name="Verbinder: gewinkelt 50">
+            <a:extLst>
+              <a:ext uri="{FF2B5EF4-FFF2-40B4-BE49-F238E27FC236}">
+                <a16:creationId xmlns:a16="http://schemas.microsoft.com/office/drawing/2014/main" id="{70879B67-F9C2-DD5D-0728-DD69DF628FC1}"/>
               </a:ext>
             </a:extLst>
           </p:cNvPr>
           <p:cNvCxnSpPr>
-            <a:stCxn id="16" idx="2"/>
-            <a:endCxn id="35" idx="1"/>
+            <a:stCxn id="30" idx="3"/>
+            <a:endCxn id="40" idx="2"/>
           </p:cNvCxnSpPr>
           <p:nvPr/>
         </p:nvCxnSpPr>
         <p:spPr>
-          <a:xfrm>
-            <a:off x="8808835" y="2953624"/>
-            <a:ext cx="595990" cy="0"/>
+          <a:xfrm flipV="1">
+            <a:off x="5485733" y="2572597"/>
+            <a:ext cx="1747670" cy="599557"/>
           </a:xfrm>
-          <a:prstGeom prst="straightConnector1">
+          <a:prstGeom prst="bentConnector2">
             <a:avLst/>
           </a:prstGeom>
           <a:ln w="12700">
             <a:solidFill>
-              <a:srgbClr val="007894"/>
+              <a:schemeClr val="tx1"/>
             </a:solidFill>
             <a:tailEnd type="triangle"/>
           </a:ln>
@@ -16366,10 +15433,10 @@
       </p:cxnSp>
       <p:sp>
         <p:nvSpPr>
-          <p:cNvPr id="42" name="Rechteck 41">
-            <a:extLst>
-              <a:ext uri="{FF2B5EF4-FFF2-40B4-BE49-F238E27FC236}">
-                <a16:creationId xmlns:a16="http://schemas.microsoft.com/office/drawing/2014/main" id="{37AFA877-7EA0-B991-32AA-D07740FBEBD1}"/>
+          <p:cNvPr id="52" name="Rechteck: abgerundete Ecken 51">
+            <a:extLst>
+              <a:ext uri="{FF2B5EF4-FFF2-40B4-BE49-F238E27FC236}">
+                <a16:creationId xmlns:a16="http://schemas.microsoft.com/office/drawing/2014/main" id="{09B97FB7-F0A7-5381-68C3-C721B836E053}"/>
               </a:ext>
             </a:extLst>
           </p:cNvPr>
@@ -16378,150 +15445,15 @@
         </p:nvSpPr>
         <p:spPr>
           <a:xfrm>
-            <a:off x="731837" y="4205370"/>
-            <a:ext cx="5071555" cy="1424889"/>
+            <a:off x="8980619" y="1816916"/>
+            <a:ext cx="1800000" cy="755377"/>
           </a:xfrm>
-          <a:prstGeom prst="rect">
+          <a:prstGeom prst="roundRect">
             <a:avLst/>
           </a:prstGeom>
-          <a:noFill/>
-        </p:spPr>
-        <p:style>
-          <a:lnRef idx="2">
-            <a:schemeClr val="accent1">
-              <a:shade val="15000"/>
-            </a:schemeClr>
-          </a:lnRef>
-          <a:fillRef idx="1">
-            <a:schemeClr val="accent1"/>
-          </a:fillRef>
-          <a:effectRef idx="0">
-            <a:schemeClr val="accent1"/>
-          </a:effectRef>
-          <a:fontRef idx="minor">
-            <a:schemeClr val="lt1"/>
-          </a:fontRef>
-        </p:style>
-        <p:txBody>
-          <a:bodyPr rtlCol="0" anchor="b"/>
-          <a:lstStyle/>
-          <a:p>
-            <a:pPr algn="ctr"/>
-            <a:r>
-              <a:rPr lang="en-US" dirty="0">
-                <a:solidFill>
-                  <a:schemeClr val="tx1"/>
-                </a:solidFill>
-              </a:rPr>
-              <a:t>Stage 2 trained on only 439 active customers</a:t>
-            </a:r>
-            <a:br>
-              <a:rPr lang="en-US" dirty="0">
-                <a:solidFill>
-                  <a:schemeClr val="tx1"/>
-                </a:solidFill>
-              </a:rPr>
-            </a:br>
-            <a:r>
-              <a:rPr lang="en-US" dirty="0">
-                <a:solidFill>
-                  <a:schemeClr val="tx1"/>
-                </a:solidFill>
-              </a:rPr>
-              <a:t>→ too sparse to learn high-value behavior</a:t>
-            </a:r>
-          </a:p>
-        </p:txBody>
-      </p:sp>
-      <p:sp>
-        <p:nvSpPr>
-          <p:cNvPr id="43" name="Rechteck 42">
-            <a:extLst>
-              <a:ext uri="{FF2B5EF4-FFF2-40B4-BE49-F238E27FC236}">
-                <a16:creationId xmlns:a16="http://schemas.microsoft.com/office/drawing/2014/main" id="{058FD6B5-3F5C-6E95-43AB-8CB4AE0F6FB5}"/>
-              </a:ext>
-            </a:extLst>
-          </p:cNvPr>
-          <p:cNvSpPr/>
-          <p:nvPr/>
-        </p:nvSpPr>
-        <p:spPr>
-          <a:xfrm>
-            <a:off x="6388607" y="4200231"/>
-            <a:ext cx="5071555" cy="1424889"/>
-          </a:xfrm>
-          <a:prstGeom prst="rect">
-            <a:avLst/>
-          </a:prstGeom>
-          <a:noFill/>
-        </p:spPr>
-        <p:style>
-          <a:lnRef idx="2">
-            <a:schemeClr val="accent1">
-              <a:shade val="15000"/>
-            </a:schemeClr>
-          </a:lnRef>
-          <a:fillRef idx="1">
-            <a:schemeClr val="accent1"/>
-          </a:fillRef>
-          <a:effectRef idx="0">
-            <a:schemeClr val="accent1"/>
-          </a:effectRef>
-          <a:fontRef idx="minor">
-            <a:schemeClr val="lt1"/>
-          </a:fontRef>
-        </p:style>
-        <p:txBody>
-          <a:bodyPr rtlCol="0" anchor="b"/>
-          <a:lstStyle/>
-          <a:p>
-            <a:pPr algn="ctr"/>
-            <a:r>
-              <a:rPr lang="en-US" dirty="0">
-                <a:solidFill>
-                  <a:schemeClr val="tx1"/>
-                </a:solidFill>
-              </a:rPr>
-              <a:t>Can't explicitly zero out latent churners </a:t>
-            </a:r>
-            <a:br>
-              <a:rPr lang="en-US" dirty="0">
-                <a:solidFill>
-                  <a:schemeClr val="tx1"/>
-                </a:solidFill>
-              </a:rPr>
-            </a:br>
-            <a:r>
-              <a:rPr lang="en-US" dirty="0">
-                <a:solidFill>
-                  <a:schemeClr val="tx1"/>
-                </a:solidFill>
-              </a:rPr>
-              <a:t>→ over-predicts dormant high-spenders</a:t>
-            </a:r>
-          </a:p>
-        </p:txBody>
-      </p:sp>
-      <p:sp>
-        <p:nvSpPr>
-          <p:cNvPr id="44" name="Rechteck 43">
-            <a:extLst>
-              <a:ext uri="{FF2B5EF4-FFF2-40B4-BE49-F238E27FC236}">
-                <a16:creationId xmlns:a16="http://schemas.microsoft.com/office/drawing/2014/main" id="{635480CD-CF84-5A28-0EB7-7EC71982F1FD}"/>
-              </a:ext>
-            </a:extLst>
-          </p:cNvPr>
-          <p:cNvSpPr/>
-          <p:nvPr/>
-        </p:nvSpPr>
-        <p:spPr>
-          <a:xfrm>
-            <a:off x="731837" y="4193970"/>
-            <a:ext cx="5071554" cy="694944"/>
-          </a:xfrm>
-          <a:prstGeom prst="rect">
-            <a:avLst/>
-          </a:prstGeom>
+          <a:solidFill>
+            <a:srgbClr val="007894"/>
+          </a:solidFill>
         </p:spPr>
         <p:style>
           <a:lnRef idx="2">
@@ -16545,32 +15477,92 @@
           <a:p>
             <a:pPr algn="ctr"/>
             <a:r>
-              <a:rPr lang="en-US" sz="2000" b="1" dirty="0"/>
-              <a:t>Why not a pure two-stage model?</a:t>
-            </a:r>
+              <a:rPr lang="de-DE" sz="1200" b="1" dirty="0"/>
+              <a:t>Final CLV </a:t>
+            </a:r>
+            <a:r>
+              <a:rPr lang="de-DE" sz="1200" b="1" dirty="0" err="1"/>
+              <a:t>prediction</a:t>
+            </a:r>
+            <a:endParaRPr lang="en-US" sz="1200" b="1" dirty="0"/>
           </a:p>
         </p:txBody>
       </p:sp>
+      <p:cxnSp>
+        <p:nvCxnSpPr>
+          <p:cNvPr id="56" name="Gerade Verbindung mit Pfeil 55">
+            <a:extLst>
+              <a:ext uri="{FF2B5EF4-FFF2-40B4-BE49-F238E27FC236}">
+                <a16:creationId xmlns:a16="http://schemas.microsoft.com/office/drawing/2014/main" id="{5D0C5AD3-22DD-119D-30A6-1D968850F850}"/>
+              </a:ext>
+            </a:extLst>
+          </p:cNvPr>
+          <p:cNvCxnSpPr>
+            <a:stCxn id="40" idx="3"/>
+            <a:endCxn id="52" idx="1"/>
+          </p:cNvCxnSpPr>
+          <p:nvPr/>
+        </p:nvCxnSpPr>
+        <p:spPr>
+          <a:xfrm flipV="1">
+            <a:off x="8565345" y="2194605"/>
+            <a:ext cx="415274" cy="304"/>
+          </a:xfrm>
+          <a:prstGeom prst="straightConnector1">
+            <a:avLst/>
+          </a:prstGeom>
+          <a:ln w="12700">
+            <a:solidFill>
+              <a:schemeClr val="tx1"/>
+            </a:solidFill>
+            <a:tailEnd type="triangle"/>
+          </a:ln>
+        </p:spPr>
+        <p:style>
+          <a:lnRef idx="1">
+            <a:schemeClr val="accent1"/>
+          </a:lnRef>
+          <a:fillRef idx="0">
+            <a:schemeClr val="accent1"/>
+          </a:fillRef>
+          <a:effectRef idx="0">
+            <a:schemeClr val="accent1"/>
+          </a:effectRef>
+          <a:fontRef idx="minor">
+            <a:schemeClr val="tx1"/>
+          </a:fontRef>
+        </p:style>
+      </p:cxnSp>
       <p:sp>
         <p:nvSpPr>
-          <p:cNvPr id="45" name="Rechteck 44">
-            <a:extLst>
-              <a:ext uri="{FF2B5EF4-FFF2-40B4-BE49-F238E27FC236}">
-                <a16:creationId xmlns:a16="http://schemas.microsoft.com/office/drawing/2014/main" id="{AB1211C4-8C5B-0A3C-02A3-1FC463677E97}"/>
-              </a:ext>
-            </a:extLst>
-          </p:cNvPr>
-          <p:cNvSpPr/>
+          <p:cNvPr id="58" name="Ellipse 57">
+            <a:extLst>
+              <a:ext uri="{FF2B5EF4-FFF2-40B4-BE49-F238E27FC236}">
+                <a16:creationId xmlns:a16="http://schemas.microsoft.com/office/drawing/2014/main" id="{9D6C7B3D-9FBD-962A-E6AD-96B0A58BC147}"/>
+              </a:ext>
+            </a:extLst>
+          </p:cNvPr>
+          <p:cNvSpPr>
+            <a:spLocks noChangeAspect="1"/>
+          </p:cNvSpPr>
           <p:nvPr/>
         </p:nvSpPr>
         <p:spPr>
           <a:xfrm>
-            <a:off x="6387227" y="4193970"/>
-            <a:ext cx="5071554" cy="694944"/>
+            <a:off x="11195893" y="1816915"/>
+            <a:ext cx="755377" cy="755377"/>
           </a:xfrm>
-          <a:prstGeom prst="rect">
+          <a:prstGeom prst="ellipse">
             <a:avLst/>
           </a:prstGeom>
+          <a:solidFill>
+            <a:srgbClr val="007894"/>
+          </a:solidFill>
+          <a:ln>
+            <a:solidFill>
+              <a:schemeClr val="tx1"/>
+            </a:solidFill>
+          </a:ln>
         </p:spPr>
         <p:style>
           <a:lnRef idx="2">
@@ -16594,16 +15586,62 @@
           <a:p>
             <a:pPr algn="ctr"/>
             <a:r>
-              <a:rPr lang="en-US" sz="2000" b="1" dirty="0"/>
-              <a:t>Why not a single-stage model alone?</a:t>
-            </a:r>
+              <a:rPr lang="de-DE" sz="1200" dirty="0"/>
+              <a:t>End</a:t>
+            </a:r>
+            <a:endParaRPr lang="en-US" sz="1200" dirty="0"/>
           </a:p>
         </p:txBody>
       </p:sp>
+      <p:cxnSp>
+        <p:nvCxnSpPr>
+          <p:cNvPr id="60" name="Gerade Verbindung mit Pfeil 59">
+            <a:extLst>
+              <a:ext uri="{FF2B5EF4-FFF2-40B4-BE49-F238E27FC236}">
+                <a16:creationId xmlns:a16="http://schemas.microsoft.com/office/drawing/2014/main" id="{28FAC422-2133-3D53-A682-10E301EB8B0E}"/>
+              </a:ext>
+            </a:extLst>
+          </p:cNvPr>
+          <p:cNvCxnSpPr>
+            <a:stCxn id="52" idx="3"/>
+            <a:endCxn id="58" idx="2"/>
+          </p:cNvCxnSpPr>
+          <p:nvPr/>
+        </p:nvCxnSpPr>
+        <p:spPr>
+          <a:xfrm flipV="1">
+            <a:off x="10780619" y="2194604"/>
+            <a:ext cx="415274" cy="1"/>
+          </a:xfrm>
+          <a:prstGeom prst="straightConnector1">
+            <a:avLst/>
+          </a:prstGeom>
+          <a:ln w="12700">
+            <a:solidFill>
+              <a:schemeClr val="tx1"/>
+            </a:solidFill>
+            <a:tailEnd type="triangle"/>
+          </a:ln>
+        </p:spPr>
+        <p:style>
+          <a:lnRef idx="1">
+            <a:schemeClr val="accent1"/>
+          </a:lnRef>
+          <a:fillRef idx="0">
+            <a:schemeClr val="accent1"/>
+          </a:fillRef>
+          <a:effectRef idx="0">
+            <a:schemeClr val="accent1"/>
+          </a:effectRef>
+          <a:fontRef idx="minor">
+            <a:schemeClr val="tx1"/>
+          </a:fontRef>
+        </p:style>
+      </p:cxnSp>
     </p:spTree>
     <p:extLst>
       <p:ext uri="{BB962C8B-B14F-4D97-AF65-F5344CB8AC3E}">
-        <p14:creationId xmlns:p14="http://schemas.microsoft.com/office/powerpoint/2010/main" val="2526911360"/>
+        <p14:creationId xmlns:p14="http://schemas.microsoft.com/office/powerpoint/2010/main" val="1616965000"/>
       </p:ext>
     </p:extLst>
   </p:cSld>
@@ -16688,7 +15726,7 @@
           <a:p>
             <a:fld id="{11B96697-4585-4368-989A-16003D150648}" type="datetime1">
               <a:rPr lang="de-CH" noProof="0" smtClean="0"/>
-              <a:t>29.04.2026</a:t>
+              <a:t>30.04.2026</a:t>
             </a:fld>
             <a:endParaRPr lang="de-CH" noProof="0"/>
           </a:p>
@@ -18432,7 +17470,7 @@
           <a:p>
             <a:fld id="{68EF82BE-DF56-4719-B180-C3B0D509F71F}" type="datetime1">
               <a:rPr lang="de-CH" noProof="0" smtClean="0"/>
-              <a:t>29.04.2026</a:t>
+              <a:t>30.04.2026</a:t>
             </a:fld>
             <a:endParaRPr lang="de-CH" noProof="0"/>
           </a:p>
@@ -19610,7 +18648,7 @@
           <a:p>
             <a:fld id="{68EF82BE-DF56-4719-B180-C3B0D509F71F}" type="datetime1">
               <a:rPr lang="de-CH" noProof="0" smtClean="0"/>
-              <a:t>29.04.2026</a:t>
+              <a:t>30.04.2026</a:t>
             </a:fld>
             <a:endParaRPr lang="de-CH" noProof="0"/>
           </a:p>
@@ -21269,7 +20307,7 @@
           <a:p>
             <a:fld id="{11B96697-4585-4368-989A-16003D150648}" type="datetime1">
               <a:rPr lang="de-CH" noProof="0" smtClean="0"/>
-              <a:t>29.04.2026</a:t>
+              <a:t>30.04.2026</a:t>
             </a:fld>
             <a:endParaRPr lang="de-CH" noProof="0"/>
           </a:p>
@@ -21752,7 +20790,7 @@
           <a:p>
             <a:fld id="{11B96697-4585-4368-989A-16003D150648}" type="datetime1">
               <a:rPr lang="de-CH" noProof="0" smtClean="0"/>
-              <a:t>29.04.2026</a:t>
+              <a:t>30.04.2026</a:t>
             </a:fld>
             <a:endParaRPr lang="de-CH" noProof="0"/>
           </a:p>
@@ -21962,7 +21000,7 @@
           <a:p>
             <a:fld id="{11B96697-4585-4368-989A-16003D150648}" type="datetime1">
               <a:rPr lang="de-CH" noProof="0" smtClean="0"/>
-              <a:t>29.04.2026</a:t>
+              <a:t>30.04.2026</a:t>
             </a:fld>
             <a:endParaRPr lang="de-CH" noProof="0"/>
           </a:p>
@@ -22620,7 +21658,7 @@
           <a:p>
             <a:fld id="{11B96697-4585-4368-989A-16003D150648}" type="datetime1">
               <a:rPr lang="de-CH" noProof="0" smtClean="0"/>
-              <a:t>29.04.2026</a:t>
+              <a:t>30.04.2026</a:t>
             </a:fld>
             <a:endParaRPr lang="de-CH" noProof="0"/>
           </a:p>
@@ -23463,7 +22501,7 @@
           <a:p>
             <a:fld id="{11B96697-4585-4368-989A-16003D150648}" type="datetime1">
               <a:rPr lang="de-CH" noProof="0" smtClean="0"/>
-              <a:t>29.04.2026</a:t>
+              <a:t>30.04.2026</a:t>
             </a:fld>
             <a:endParaRPr lang="de-CH" noProof="0"/>
           </a:p>
@@ -23905,7 +22943,7 @@
           <a:p>
             <a:fld id="{11B96697-4585-4368-989A-16003D150648}" type="datetime1">
               <a:rPr lang="de-CH" noProof="0" smtClean="0"/>
-              <a:t>29.04.2026</a:t>
+              <a:t>30.04.2026</a:t>
             </a:fld>
             <a:endParaRPr lang="de-CH" noProof="0"/>
           </a:p>
@@ -25467,7 +24505,7 @@
           <a:p>
             <a:fld id="{11B96697-4585-4368-989A-16003D150648}" type="datetime1">
               <a:rPr lang="de-CH" noProof="0" smtClean="0"/>
-              <a:t>29.04.2026</a:t>
+              <a:t>30.04.2026</a:t>
             </a:fld>
             <a:endParaRPr lang="de-CH" noProof="0"/>
           </a:p>
@@ -26076,7 +25114,7 @@
           <a:p>
             <a:fld id="{11B96697-4585-4368-989A-16003D150648}" type="datetime1">
               <a:rPr lang="de-CH" noProof="0" smtClean="0"/>
-              <a:t>29.04.2026</a:t>
+              <a:t>30.04.2026</a:t>
             </a:fld>
             <a:endParaRPr lang="de-CH" noProof="0"/>
           </a:p>
@@ -26535,7 +25573,7 @@
             </a:r>
             <a:r>
               <a:rPr lang="de-DE" dirty="0" err="1"/>
-              <a:t>baseline</a:t>
+              <a:t>CLVTools</a:t>
             </a:r>
             <a:r>
               <a:rPr lang="de-DE" dirty="0"/>
@@ -26543,7 +25581,15 @@
             </a:r>
             <a:r>
               <a:rPr lang="de-DE" dirty="0" err="1"/>
-              <a:t>agains</a:t>
+              <a:t>baseline</a:t>
+            </a:r>
+            <a:r>
+              <a:rPr lang="de-DE" dirty="0"/>
+              <a:t> </a:t>
+            </a:r>
+            <a:r>
+              <a:rPr lang="de-DE" dirty="0" err="1"/>
+              <a:t>against</a:t>
             </a:r>
             <a:r>
               <a:rPr lang="de-DE" dirty="0"/>
@@ -26857,7 +25903,7 @@
           <a:p>
             <a:fld id="{11B96697-4585-4368-989A-16003D150648}" type="datetime1">
               <a:rPr lang="de-CH" noProof="0" smtClean="0"/>
-              <a:t>29.04.2026</a:t>
+              <a:t>30.04.2026</a:t>
             </a:fld>
             <a:endParaRPr lang="de-CH" noProof="0"/>
           </a:p>
@@ -27390,7 +26436,7 @@
           <a:p>
             <a:fld id="{1332D50A-E6CC-4D88-8908-F2129032F4C7}" type="datetime1">
               <a:rPr lang="de-CH" noProof="0" smtClean="0"/>
-              <a:t>29.04.2026</a:t>
+              <a:t>30.04.2026</a:t>
             </a:fld>
             <a:endParaRPr lang="de-CH" noProof="0"/>
           </a:p>
@@ -31862,6 +30908,12 @@
 </file>
 
 <file path=customXml/item1.xml><?xml version="1.0" encoding="utf-8"?>
+<p:properties xmlns:p="http://schemas.microsoft.com/office/2006/metadata/properties" xmlns:xsi="http://www.w3.org/2001/XMLSchema-instance" xmlns:pc="http://schemas.microsoft.com/office/infopath/2007/PartnerControls">
+  <documentManagement/>
+</p:properties>
+</file>
+
+<file path=customXml/item2.xml><?xml version="1.0" encoding="utf-8"?>
 <ct:contentTypeSchema xmlns:ct="http://schemas.microsoft.com/office/2006/metadata/contentType" xmlns:ma="http://schemas.microsoft.com/office/2006/metadata/properties/metaAttributes" ct:_="" ma:_="" ma:contentTypeName="Dokument" ma:contentTypeID="0x010100D0F59E03F3A02E49BD70E31348545014" ma:contentTypeVersion="7" ma:contentTypeDescription="Ein neues Dokument erstellen." ma:contentTypeScope="" ma:versionID="907cdc0f808be0b4bc1373a5a8f6a492">
   <xsd:schema xmlns:xsd="http://www.w3.org/2001/XMLSchema" xmlns:xs="http://www.w3.org/2001/XMLSchema" xmlns:p="http://schemas.microsoft.com/office/2006/metadata/properties" xmlns:ns2="7fd05bba-d45d-467f-a5a8-3f2970e80e4a" targetNamespace="http://schemas.microsoft.com/office/2006/metadata/properties" ma:root="true" ma:fieldsID="6eaf8534fcc486a778b01aa1a7a62fa4" ns2:_="">
     <xsd:import namespace="7fd05bba-d45d-467f-a5a8-3f2970e80e4a"/>
@@ -32023,12 +31075,6 @@
 </ct:contentTypeSchema>
 </file>
 
-<file path=customXml/item2.xml><?xml version="1.0" encoding="utf-8"?>
-<p:properties xmlns:p="http://schemas.microsoft.com/office/2006/metadata/properties" xmlns:xsi="http://www.w3.org/2001/XMLSchema-instance" xmlns:pc="http://schemas.microsoft.com/office/infopath/2007/PartnerControls">
-  <documentManagement/>
-</p:properties>
-</file>
-
 <file path=customXml/item3.xml><?xml version="1.0" encoding="utf-8"?>
 <?mso-contentType ?>
 <FormTemplates xmlns="http://schemas.microsoft.com/sharepoint/v3/contenttype/forms">
@@ -32039,6 +31085,22 @@
 </file>
 
 <file path=customXml/itemProps1.xml><?xml version="1.0" encoding="utf-8"?>
+<ds:datastoreItem xmlns:ds="http://schemas.openxmlformats.org/officeDocument/2006/customXml" ds:itemID="{2C3B1C8D-BA84-44B8-B31F-BF26E7BAC85C}">
+  <ds:schemaRefs>
+    <ds:schemaRef ds:uri="7fd05bba-d45d-467f-a5a8-3f2970e80e4a"/>
+    <ds:schemaRef ds:uri="http://schemas.microsoft.com/office/2006/documentManagement/types"/>
+    <ds:schemaRef ds:uri="http://schemas.microsoft.com/office/2006/metadata/properties"/>
+    <ds:schemaRef ds:uri="http://schemas.openxmlformats.org/package/2006/metadata/core-properties"/>
+    <ds:schemaRef ds:uri="http://purl.org/dc/dcmitype/"/>
+    <ds:schemaRef ds:uri="http://purl.org/dc/terms/"/>
+    <ds:schemaRef ds:uri="http://www.w3.org/XML/1998/namespace"/>
+    <ds:schemaRef ds:uri="http://purl.org/dc/elements/1.1/"/>
+    <ds:schemaRef ds:uri="http://schemas.microsoft.com/office/infopath/2007/PartnerControls"/>
+  </ds:schemaRefs>
+</ds:datastoreItem>
+</file>
+
+<file path=customXml/itemProps2.xml><?xml version="1.0" encoding="utf-8"?>
 <ds:datastoreItem xmlns:ds="http://schemas.openxmlformats.org/officeDocument/2006/customXml" ds:itemID="{6B7B52BC-33EF-4C54-820C-9984D5F8AFB1}">
   <ds:schemaRefs>
     <ds:schemaRef ds:uri="7fd05bba-d45d-467f-a5a8-3f2970e80e4a"/>
@@ -32056,22 +31118,6 @@
 </ds:datastoreItem>
 </file>
 
-<file path=customXml/itemProps2.xml><?xml version="1.0" encoding="utf-8"?>
-<ds:datastoreItem xmlns:ds="http://schemas.openxmlformats.org/officeDocument/2006/customXml" ds:itemID="{2C3B1C8D-BA84-44B8-B31F-BF26E7BAC85C}">
-  <ds:schemaRefs>
-    <ds:schemaRef ds:uri="7fd05bba-d45d-467f-a5a8-3f2970e80e4a"/>
-    <ds:schemaRef ds:uri="http://schemas.microsoft.com/office/2006/documentManagement/types"/>
-    <ds:schemaRef ds:uri="http://schemas.microsoft.com/office/2006/metadata/properties"/>
-    <ds:schemaRef ds:uri="http://schemas.openxmlformats.org/package/2006/metadata/core-properties"/>
-    <ds:schemaRef ds:uri="http://purl.org/dc/dcmitype/"/>
-    <ds:schemaRef ds:uri="http://purl.org/dc/terms/"/>
-    <ds:schemaRef ds:uri="http://www.w3.org/XML/1998/namespace"/>
-    <ds:schemaRef ds:uri="http://purl.org/dc/elements/1.1/"/>
-    <ds:schemaRef ds:uri="http://schemas.microsoft.com/office/infopath/2007/PartnerControls"/>
-  </ds:schemaRefs>
-</ds:datastoreItem>
-</file>
-
 <file path=customXml/itemProps3.xml><?xml version="1.0" encoding="utf-8"?>
 <ds:datastoreItem xmlns:ds="http://schemas.openxmlformats.org/officeDocument/2006/customXml" ds:itemID="{E0CFCB78-2973-46E2-963D-C72C98C43B41}">
   <ds:schemaRefs>

--- a/Presentations/MA_Final_Presentation.pptx
+++ b/Presentations/MA_Final_Presentation.pptx
@@ -4042,7 +4042,7 @@
           <a:p>
             <a:fld id="{2B685DCD-866D-47AE-A236-118539F53379}" type="slidenum">
               <a:rPr lang="de-CH" smtClean="0"/>
-              <a:t>‹Nr.›</a:t>
+              <a:t>‹#›</a:t>
             </a:fld>
             <a:endParaRPr lang="de-CH"/>
           </a:p>
@@ -4300,7 +4300,7 @@
           <a:p>
             <a:fld id="{F615DDFD-030C-4D5A-B33E-3A7E7538D2BE}" type="slidenum">
               <a:rPr lang="de-CH" smtClean="0"/>
-              <a:t>‹Nr.›</a:t>
+              <a:t>‹#›</a:t>
             </a:fld>
             <a:endParaRPr lang="de-CH"/>
           </a:p>
@@ -7454,7 +7454,7 @@
           <a:p>
             <a:fld id="{5ACA52AF-F19D-405C-AD5F-7D94B96A5CC3}" type="slidenum">
               <a:rPr lang="de-CH" noProof="0" smtClean="0"/>
-              <a:t>‹Nr.›</a:t>
+              <a:t>‹#›</a:t>
             </a:fld>
             <a:endParaRPr lang="de-CH" noProof="0"/>
           </a:p>
@@ -7649,7 +7649,7 @@
           <a:p>
             <a:fld id="{5ACA52AF-F19D-405C-AD5F-7D94B96A5CC3}" type="slidenum">
               <a:rPr lang="de-CH" noProof="0" smtClean="0"/>
-              <a:t>‹Nr.›</a:t>
+              <a:t>‹#›</a:t>
             </a:fld>
             <a:endParaRPr lang="de-CH" noProof="0"/>
           </a:p>
@@ -7936,7 +7936,7 @@
           <a:p>
             <a:fld id="{5ACA52AF-F19D-405C-AD5F-7D94B96A5CC3}" type="slidenum">
               <a:rPr lang="de-CH" noProof="0" smtClean="0"/>
-              <a:t>‹Nr.›</a:t>
+              <a:t>‹#›</a:t>
             </a:fld>
             <a:endParaRPr lang="de-CH" noProof="0"/>
           </a:p>
@@ -8234,7 +8234,7 @@
           <a:p>
             <a:fld id="{5ACA52AF-F19D-405C-AD5F-7D94B96A5CC3}" type="slidenum">
               <a:rPr lang="de-CH" noProof="0" smtClean="0"/>
-              <a:t>‹Nr.›</a:t>
+              <a:t>‹#›</a:t>
             </a:fld>
             <a:endParaRPr lang="de-CH" noProof="0"/>
           </a:p>
@@ -8634,7 +8634,7 @@
           <a:p>
             <a:fld id="{5ACA52AF-F19D-405C-AD5F-7D94B96A5CC3}" type="slidenum">
               <a:rPr lang="de-CH" noProof="0" smtClean="0"/>
-              <a:t>‹Nr.›</a:t>
+              <a:t>‹#›</a:t>
             </a:fld>
             <a:endParaRPr lang="de-CH" noProof="0"/>
           </a:p>
@@ -9002,7 +9002,7 @@
           <a:p>
             <a:fld id="{5ACA52AF-F19D-405C-AD5F-7D94B96A5CC3}" type="slidenum">
               <a:rPr lang="de-CH" noProof="0" smtClean="0"/>
-              <a:t>‹Nr.›</a:t>
+              <a:t>‹#›</a:t>
             </a:fld>
             <a:endParaRPr lang="de-CH" noProof="0"/>
           </a:p>
@@ -11031,7 +11031,7 @@
           <a:p>
             <a:fld id="{5ACA52AF-F19D-405C-AD5F-7D94B96A5CC3}" type="slidenum">
               <a:rPr lang="de-CH" noProof="0" smtClean="0"/>
-              <a:t>‹Nr.›</a:t>
+              <a:t>‹#›</a:t>
             </a:fld>
             <a:endParaRPr lang="de-CH" noProof="0"/>
           </a:p>
@@ -11274,7 +11274,7 @@
           <a:p>
             <a:fld id="{5ACA52AF-F19D-405C-AD5F-7D94B96A5CC3}" type="slidenum">
               <a:rPr lang="de-CH" noProof="0" smtClean="0"/>
-              <a:t>‹Nr.›</a:t>
+              <a:t>‹#›</a:t>
             </a:fld>
             <a:endParaRPr lang="de-CH" noProof="0"/>
           </a:p>
@@ -11522,7 +11522,7 @@
           <a:p>
             <a:fld id="{5ACA52AF-F19D-405C-AD5F-7D94B96A5CC3}" type="slidenum">
               <a:rPr lang="de-CH" noProof="0" smtClean="0"/>
-              <a:t>‹Nr.›</a:t>
+              <a:t>‹#›</a:t>
             </a:fld>
             <a:endParaRPr lang="de-CH" noProof="0"/>
           </a:p>
@@ -11815,7 +11815,7 @@
             <a:fld id="{5ACA52AF-F19D-405C-AD5F-7D94B96A5CC3}" type="slidenum">
               <a:rPr lang="de-CH" noProof="0" smtClean="0"/>
               <a:pPr/>
-              <a:t>‹Nr.›</a:t>
+              <a:t>‹#›</a:t>
             </a:fld>
             <a:endParaRPr lang="de-CH" noProof="0"/>
           </a:p>
@@ -13758,7 +13758,7 @@
             <a:fld id="{5ACA52AF-F19D-405C-AD5F-7D94B96A5CC3}" type="slidenum">
               <a:rPr lang="de-CH" noProof="0" smtClean="0"/>
               <a:pPr/>
-              <a:t>‹Nr.›</a:t>
+              <a:t>‹#›</a:t>
             </a:fld>
             <a:endParaRPr lang="de-CH" noProof="0"/>
           </a:p>
@@ -24651,7 +24651,7 @@
         <p:spPr>
           <a:xfrm>
             <a:off x="177764" y="809018"/>
-            <a:ext cx="7432532" cy="3688136"/>
+            <a:ext cx="6944396" cy="3445915"/>
           </a:xfrm>
           <a:prstGeom prst="rect">
             <a:avLst/>
@@ -24672,8 +24672,8 @@
         </p:nvSpPr>
         <p:spPr>
           <a:xfrm>
-            <a:off x="7731889" y="726583"/>
-            <a:ext cx="4460111" cy="3854901"/>
+            <a:off x="7274561" y="614823"/>
+            <a:ext cx="4917440" cy="3439403"/>
           </a:xfrm>
           <a:prstGeom prst="rect">
             <a:avLst/>
@@ -24734,7 +24734,7 @@
               <a:buFont typeface="Wingdings" panose="05000000000000000000" pitchFamily="2" charset="2"/>
               <a:buChar char="Ø"/>
             </a:pPr>
-            <a:endParaRPr lang="en-US" sz="1050" dirty="0"/>
+            <a:endParaRPr lang="en-US" sz="700" dirty="0"/>
           </a:p>
           <a:p>
             <a:pPr marL="285750" indent="-285750">
@@ -24766,7 +24766,7 @@
             </a:r>
           </a:p>
           <a:p>
-            <a:endParaRPr lang="en-US" dirty="0"/>
+            <a:endParaRPr lang="en-US" sz="900" dirty="0"/>
           </a:p>
           <a:p>
             <a:r>
@@ -24822,8 +24822,8 @@
         </p:nvSpPr>
         <p:spPr>
           <a:xfrm>
-            <a:off x="9188904" y="4891785"/>
-            <a:ext cx="2767746" cy="1323439"/>
+            <a:off x="8471424" y="4456509"/>
+            <a:ext cx="3605940" cy="2031325"/>
           </a:xfrm>
           <a:prstGeom prst="rect">
             <a:avLst/>
@@ -24836,11 +24836,11 @@
           </a:bodyPr>
           <a:lstStyle/>
           <a:p>
-            <a:pPr algn="ctr"/>
-            <a:r>
-              <a:rPr lang="en-US" sz="2000" b="1" dirty="0"/>
-              <a:t>Later confirmed independently by the churn classifier's SFS feature selection</a:t>
-            </a:r>
+            <a:r>
+              <a:rPr lang="en-US" dirty="0"/>
+              <a:t>The model derived the full behavioral pattern from just a few targeted features, confirming that engagement with specific catalog anchors, more than just broad diversity metrics, is the decisive predictor of retention</a:t>
+            </a:r>
+            <a:endParaRPr lang="en-US" b="1" dirty="0"/>
           </a:p>
         </p:txBody>
       </p:sp>
@@ -24858,8 +24858,8 @@
         </p:nvSpPr>
         <p:spPr>
           <a:xfrm>
-            <a:off x="206076" y="4817301"/>
-            <a:ext cx="3868214" cy="1384995"/>
+            <a:off x="114636" y="4299141"/>
+            <a:ext cx="3847764" cy="1923604"/>
           </a:xfrm>
           <a:prstGeom prst="rect">
             <a:avLst/>
@@ -24873,17 +24873,18 @@
           <a:lstStyle/>
           <a:p>
             <a:r>
-              <a:rPr lang="en-US" sz="2000" b="1" dirty="0"/>
+              <a:rPr lang="en-US" b="1" dirty="0"/>
               <a:t>Why this matters for modeling</a:t>
             </a:r>
-          </a:p>
-          <a:p>
-            <a:endParaRPr lang="en-US" sz="1000" b="1" dirty="0"/>
-          </a:p>
-          <a:p>
-            <a:r>
-              <a:rPr lang="en-US" dirty="0"/>
-              <a:t>Loyalty is not driven by which cluster a customer prefers, but by the diversity of their engagement </a:t>
+            <a:endParaRPr lang="en-US" sz="2000" b="1" dirty="0"/>
+          </a:p>
+          <a:p>
+            <a:endParaRPr lang="en-US" sz="500" b="1" dirty="0"/>
+          </a:p>
+          <a:p>
+            <a:r>
+              <a:rPr lang="en-US" sz="1600" dirty="0"/>
+              <a:t>This behavioral insight motivated the use of Style Entropy and Cluster Affinity features: Style Entropy to capture overall diversity, individual Cluster Affinities to capture engagement with specific product categories</a:t>
             </a:r>
           </a:p>
         </p:txBody>
@@ -24902,8 +24903,8 @@
         </p:nvSpPr>
         <p:spPr>
           <a:xfrm>
-            <a:off x="4813825" y="4753286"/>
-            <a:ext cx="3774589" cy="1600438"/>
+            <a:off x="4358296" y="4254933"/>
+            <a:ext cx="3383537" cy="2446824"/>
           </a:xfrm>
           <a:prstGeom prst="rect">
             <a:avLst/>
@@ -24917,24 +24918,17 @@
           <a:lstStyle/>
           <a:p>
             <a:r>
-              <a:rPr lang="en-US" sz="2000" b="1" dirty="0"/>
-              <a:t>This is formalized as Style Entropy</a:t>
-            </a:r>
-            <a:br>
-              <a:rPr lang="en-US" sz="2000" b="1" u="sng" dirty="0"/>
-            </a:br>
-            <a:r>
-              <a:rPr lang="en-US" sz="1200" dirty="0"/>
-              <a:t>(Shannon entropy across cluster affinity shares)</a:t>
-            </a:r>
-          </a:p>
-          <a:p>
-            <a:endParaRPr lang="en-US" sz="1000" dirty="0"/>
-          </a:p>
-          <a:p>
-            <a:r>
-              <a:rPr lang="en-US" dirty="0"/>
-              <a:t>The primary early-warning signal for latent attrition </a:t>
+              <a:rPr lang="en-US" b="1" dirty="0"/>
+              <a:t>SFS eliminated Style Entropy as redundant</a:t>
+            </a:r>
+          </a:p>
+          <a:p>
+            <a:endParaRPr lang="en-US" sz="500" dirty="0"/>
+          </a:p>
+          <a:p>
+            <a:r>
+              <a:rPr lang="en-US" sz="1600" dirty="0"/>
+              <a:t>Once specific Cluster Affinities were included, the diversity signal was already captured. Not all affinities were needed either: only the economic anchors identified in the business profiling (Bags, Tops, Dresses, Jackets)</a:t>
             </a:r>
           </a:p>
         </p:txBody>
@@ -24953,7 +24947,7 @@
         </p:nvCxnSpPr>
         <p:spPr>
           <a:xfrm>
-            <a:off x="4004841" y="5602147"/>
+            <a:off x="3547641" y="5472172"/>
             <a:ext cx="739535" cy="0"/>
           </a:xfrm>
           <a:prstGeom prst="straightConnector1">
@@ -24995,7 +24989,7 @@
         </p:nvCxnSpPr>
         <p:spPr>
           <a:xfrm>
-            <a:off x="8391649" y="5602147"/>
+            <a:off x="7731889" y="5632627"/>
             <a:ext cx="739535" cy="0"/>
           </a:xfrm>
           <a:prstGeom prst="straightConnector1">
@@ -30908,9 +30902,12 @@
 </file>
 
 <file path=customXml/item1.xml><?xml version="1.0" encoding="utf-8"?>
-<p:properties xmlns:p="http://schemas.microsoft.com/office/2006/metadata/properties" xmlns:xsi="http://www.w3.org/2001/XMLSchema-instance" xmlns:pc="http://schemas.microsoft.com/office/infopath/2007/PartnerControls">
-  <documentManagement/>
-</p:properties>
+<?mso-contentType ?>
+<FormTemplates xmlns="http://schemas.microsoft.com/sharepoint/v3/contenttype/forms">
+  <Display>DocumentLibraryForm</Display>
+  <Edit>DocumentLibraryForm</Edit>
+  <New>DocumentLibraryForm</New>
+</FormTemplates>
 </file>
 
 <file path=customXml/item2.xml><?xml version="1.0" encoding="utf-8"?>
@@ -31076,26 +31073,15 @@
 </file>
 
 <file path=customXml/item3.xml><?xml version="1.0" encoding="utf-8"?>
-<?mso-contentType ?>
-<FormTemplates xmlns="http://schemas.microsoft.com/sharepoint/v3/contenttype/forms">
-  <Display>DocumentLibraryForm</Display>
-  <Edit>DocumentLibraryForm</Edit>
-  <New>DocumentLibraryForm</New>
-</FormTemplates>
+<p:properties xmlns:p="http://schemas.microsoft.com/office/2006/metadata/properties" xmlns:xsi="http://www.w3.org/2001/XMLSchema-instance" xmlns:pc="http://schemas.microsoft.com/office/infopath/2007/PartnerControls">
+  <documentManagement/>
+</p:properties>
 </file>
 
 <file path=customXml/itemProps1.xml><?xml version="1.0" encoding="utf-8"?>
-<ds:datastoreItem xmlns:ds="http://schemas.openxmlformats.org/officeDocument/2006/customXml" ds:itemID="{2C3B1C8D-BA84-44B8-B31F-BF26E7BAC85C}">
+<ds:datastoreItem xmlns:ds="http://schemas.openxmlformats.org/officeDocument/2006/customXml" ds:itemID="{E0CFCB78-2973-46E2-963D-C72C98C43B41}">
   <ds:schemaRefs>
-    <ds:schemaRef ds:uri="7fd05bba-d45d-467f-a5a8-3f2970e80e4a"/>
-    <ds:schemaRef ds:uri="http://schemas.microsoft.com/office/2006/documentManagement/types"/>
-    <ds:schemaRef ds:uri="http://schemas.microsoft.com/office/2006/metadata/properties"/>
-    <ds:schemaRef ds:uri="http://schemas.openxmlformats.org/package/2006/metadata/core-properties"/>
-    <ds:schemaRef ds:uri="http://purl.org/dc/dcmitype/"/>
-    <ds:schemaRef ds:uri="http://purl.org/dc/terms/"/>
-    <ds:schemaRef ds:uri="http://www.w3.org/XML/1998/namespace"/>
-    <ds:schemaRef ds:uri="http://purl.org/dc/elements/1.1/"/>
-    <ds:schemaRef ds:uri="http://schemas.microsoft.com/office/infopath/2007/PartnerControls"/>
+    <ds:schemaRef ds:uri="http://schemas.microsoft.com/sharepoint/v3/contenttype/forms"/>
   </ds:schemaRefs>
 </ds:datastoreItem>
 </file>
@@ -31119,9 +31105,17 @@
 </file>
 
 <file path=customXml/itemProps3.xml><?xml version="1.0" encoding="utf-8"?>
-<ds:datastoreItem xmlns:ds="http://schemas.openxmlformats.org/officeDocument/2006/customXml" ds:itemID="{E0CFCB78-2973-46E2-963D-C72C98C43B41}">
+<ds:datastoreItem xmlns:ds="http://schemas.openxmlformats.org/officeDocument/2006/customXml" ds:itemID="{2C3B1C8D-BA84-44B8-B31F-BF26E7BAC85C}">
   <ds:schemaRefs>
-    <ds:schemaRef ds:uri="http://schemas.microsoft.com/sharepoint/v3/contenttype/forms"/>
+    <ds:schemaRef ds:uri="7fd05bba-d45d-467f-a5a8-3f2970e80e4a"/>
+    <ds:schemaRef ds:uri="http://schemas.microsoft.com/office/2006/documentManagement/types"/>
+    <ds:schemaRef ds:uri="http://schemas.microsoft.com/office/2006/metadata/properties"/>
+    <ds:schemaRef ds:uri="http://schemas.openxmlformats.org/package/2006/metadata/core-properties"/>
+    <ds:schemaRef ds:uri="http://purl.org/dc/dcmitype/"/>
+    <ds:schemaRef ds:uri="http://purl.org/dc/terms/"/>
+    <ds:schemaRef ds:uri="http://www.w3.org/XML/1998/namespace"/>
+    <ds:schemaRef ds:uri="http://purl.org/dc/elements/1.1/"/>
+    <ds:schemaRef ds:uri="http://schemas.microsoft.com/office/infopath/2007/PartnerControls"/>
   </ds:schemaRefs>
 </ds:datastoreItem>
 </file>